--- a/docs/content/wrangling_data/wrangling_data_lecture.pptx
+++ b/docs/content/wrangling_data/wrangling_data_lecture.pptx
@@ -27,6 +27,10 @@
     <p:sldId id="275" r:id="rId21"/>
     <p:sldId id="276" r:id="rId22"/>
     <p:sldId id="277" r:id="rId23"/>
+    <p:sldId id="278" r:id="rId24"/>
+    <p:sldId id="279" r:id="rId25"/>
+    <p:sldId id="280" r:id="rId26"/>
+    <p:sldId id="281" r:id="rId27"/>
   </p:sldIdLst>
   <p:sldSz cx="9144000" cy="5143500" type="screen16x9"/>
   <p:notesSz cx="6858000" cy="9144000"/>
@@ -3390,8 +3394,11 @@
         <p:spPr>
           <a:xfrm>
             <a:off x="0" y="0"/>
-            <a:ext cx="9144000" cy="582780"/>
+            <a:ext cx="9144000" cy="602780"/>
           </a:xfrm>
+          <a:solidFill>
+            <a:srgbClr val="70121D"/>
+          </a:solidFill>
         </p:spPr>
         <p:txBody>
           <a:bodyPr/>
@@ -3404,11 +3411,11 @@
               <a:rPr>
                 <a:latin typeface="Courier"/>
               </a:rPr>
-              <a:t>mutate()</a:t>
+              <a:t>select()</a:t>
             </a:r>
             <a:r>
               <a:rPr/>
-              <a:t> — Creating and Changing Columns</a:t>
+              <a:t> — Picking Columns</a:t>
             </a:r>
           </a:p>
         </p:txBody>
@@ -3420,7 +3427,7 @@
             <a:spLocks noGrp="1"/>
           </p:cNvSpPr>
           <p:nvPr>
-            <p:ph idx="1"/>
+            <p:ph idx="1" sz="half"/>
           </p:nvPr>
         </p:nvSpPr>
         <p:spPr/>
@@ -3428,6 +3435,254 @@
           <a:bodyPr/>
           <a:lstStyle/>
           <a:p>
+            <a:pPr lvl="0" indent="0">
+              <a:buNone/>
+            </a:pPr>
+            <a:r>
+              <a:rPr>
+                <a:solidFill>
+                  <a:srgbClr val="5E5E5E"/>
+                </a:solidFill>
+                <a:latin typeface="Courier"/>
+              </a:rPr>
+              <a:t># Keep only side and length</a:t>
+            </a:r>
+            <a:br/>
+            <a:r>
+              <a:rPr>
+                <a:solidFill>
+                  <a:srgbClr val="003B4F"/>
+                </a:solidFill>
+                <a:latin typeface="Courier"/>
+              </a:rPr>
+              <a:t>pine_csv_df </a:t>
+            </a:r>
+            <a:r>
+              <a:rPr>
+                <a:solidFill>
+                  <a:srgbClr val="5E5E5E"/>
+                </a:solidFill>
+                <a:latin typeface="Courier"/>
+              </a:rPr>
+              <a:t>|&gt;</a:t>
+            </a:r>
+            <a:r>
+              <a:rPr>
+                <a:solidFill>
+                  <a:srgbClr val="003B4F"/>
+                </a:solidFill>
+                <a:latin typeface="Courier"/>
+              </a:rPr>
+              <a:t> </a:t>
+            </a:r>
+            <a:r>
+              <a:rPr>
+                <a:solidFill>
+                  <a:srgbClr val="4758AB"/>
+                </a:solidFill>
+                <a:latin typeface="Courier"/>
+              </a:rPr>
+              <a:t>select</a:t>
+            </a:r>
+            <a:r>
+              <a:rPr>
+                <a:solidFill>
+                  <a:srgbClr val="003B4F"/>
+                </a:solidFill>
+                <a:latin typeface="Courier"/>
+              </a:rPr>
+              <a:t>(n_s, length_mm) </a:t>
+            </a:r>
+            <a:r>
+              <a:rPr>
+                <a:solidFill>
+                  <a:srgbClr val="5E5E5E"/>
+                </a:solidFill>
+                <a:latin typeface="Courier"/>
+              </a:rPr>
+              <a:t>|&gt;</a:t>
+            </a:r>
+            <a:r>
+              <a:rPr>
+                <a:solidFill>
+                  <a:srgbClr val="003B4F"/>
+                </a:solidFill>
+                <a:latin typeface="Courier"/>
+              </a:rPr>
+              <a:t> </a:t>
+            </a:r>
+            <a:r>
+              <a:rPr>
+                <a:solidFill>
+                  <a:srgbClr val="4758AB"/>
+                </a:solidFill>
+                <a:latin typeface="Courier"/>
+              </a:rPr>
+              <a:t>head</a:t>
+            </a:r>
+            <a:r>
+              <a:rPr>
+                <a:solidFill>
+                  <a:srgbClr val="003B4F"/>
+                </a:solidFill>
+                <a:latin typeface="Courier"/>
+              </a:rPr>
+              <a:t>()</a:t>
+            </a:r>
+          </a:p>
+          <a:p>
+            <a:pPr lvl="0" indent="0">
+              <a:buNone/>
+            </a:pPr>
+            <a:r>
+              <a:rPr>
+                <a:latin typeface="Courier"/>
+              </a:rPr>
+              <a:t># A tibble: 6 × 2
+  n_s   length_mm
+  &lt;chr&gt;     &lt;dbl&gt;
+1 n            20
+2 n            21
+3 n            23
+4 n            25
+5 n            21
+6 n            16</a:t>
+            </a:r>
+          </a:p>
+          <a:p>
+            <a:pPr lvl="0" indent="0">
+              <a:buNone/>
+            </a:pPr>
+            <a:r>
+              <a:rPr>
+                <a:solidFill>
+                  <a:srgbClr val="5E5E5E"/>
+                </a:solidFill>
+                <a:latin typeface="Courier"/>
+              </a:rPr>
+              <a:t># Drop the date column (minus sign)</a:t>
+            </a:r>
+            <a:br/>
+            <a:r>
+              <a:rPr>
+                <a:solidFill>
+                  <a:srgbClr val="003B4F"/>
+                </a:solidFill>
+                <a:latin typeface="Courier"/>
+              </a:rPr>
+              <a:t>pine_csv_df </a:t>
+            </a:r>
+            <a:r>
+              <a:rPr>
+                <a:solidFill>
+                  <a:srgbClr val="5E5E5E"/>
+                </a:solidFill>
+                <a:latin typeface="Courier"/>
+              </a:rPr>
+              <a:t>|&gt;</a:t>
+            </a:r>
+            <a:r>
+              <a:rPr>
+                <a:solidFill>
+                  <a:srgbClr val="003B4F"/>
+                </a:solidFill>
+                <a:latin typeface="Courier"/>
+              </a:rPr>
+              <a:t> </a:t>
+            </a:r>
+            <a:r>
+              <a:rPr>
+                <a:solidFill>
+                  <a:srgbClr val="4758AB"/>
+                </a:solidFill>
+                <a:latin typeface="Courier"/>
+              </a:rPr>
+              <a:t>select</a:t>
+            </a:r>
+            <a:r>
+              <a:rPr>
+                <a:solidFill>
+                  <a:srgbClr val="003B4F"/>
+                </a:solidFill>
+                <a:latin typeface="Courier"/>
+              </a:rPr>
+              <a:t>(</a:t>
+            </a:r>
+            <a:r>
+              <a:rPr>
+                <a:solidFill>
+                  <a:srgbClr val="5E5E5E"/>
+                </a:solidFill>
+                <a:latin typeface="Courier"/>
+              </a:rPr>
+              <a:t>-</a:t>
+            </a:r>
+            <a:r>
+              <a:rPr>
+                <a:solidFill>
+                  <a:srgbClr val="003B4F"/>
+                </a:solidFill>
+                <a:latin typeface="Courier"/>
+              </a:rPr>
+              <a:t>date) </a:t>
+            </a:r>
+            <a:r>
+              <a:rPr>
+                <a:solidFill>
+                  <a:srgbClr val="5E5E5E"/>
+                </a:solidFill>
+                <a:latin typeface="Courier"/>
+              </a:rPr>
+              <a:t>|&gt;</a:t>
+            </a:r>
+            <a:r>
+              <a:rPr>
+                <a:solidFill>
+                  <a:srgbClr val="003B4F"/>
+                </a:solidFill>
+                <a:latin typeface="Courier"/>
+              </a:rPr>
+              <a:t> </a:t>
+            </a:r>
+            <a:r>
+              <a:rPr>
+                <a:solidFill>
+                  <a:srgbClr val="4758AB"/>
+                </a:solidFill>
+                <a:latin typeface="Courier"/>
+              </a:rPr>
+              <a:t>head</a:t>
+            </a:r>
+            <a:r>
+              <a:rPr>
+                <a:solidFill>
+                  <a:srgbClr val="003B4F"/>
+                </a:solidFill>
+                <a:latin typeface="Courier"/>
+              </a:rPr>
+              <a:t>()</a:t>
+            </a:r>
+          </a:p>
+          <a:p>
+            <a:pPr lvl="0" indent="0">
+              <a:buNone/>
+            </a:pPr>
+            <a:r>
+              <a:rPr>
+                <a:latin typeface="Courier"/>
+              </a:rPr>
+              <a:t># A tibble: 6 × 5
+  group       n_s   wind  tree_no length_mm
+  &lt;chr&gt;       &lt;chr&gt; &lt;chr&gt;   &lt;dbl&gt;     &lt;dbl&gt;
+1 cephalopods n     lee         1        20
+2 cephalopods n     lee         1        21
+3 cephalopods n     lee         1        23
+4 cephalopods n     lee         1        25
+5 cephalopods n     lee         1        21
+6 cephalopods n     lee         1        16</a:t>
+            </a:r>
+          </a:p>
+          <a:p>
             <a:pPr lvl="0" indent="0" marL="1270000">
               <a:buNone/>
             </a:pPr>
@@ -3442,57 +3697,62 @@
             </a:pPr>
             <a:r>
               <a:rPr sz="2000" b="1"/>
-              <a:t>🔮 Predict first:</a:t>
+              <a:t>✅ Key idea</a:t>
+            </a:r>
+          </a:p>
+          <a:p>
+            <a:pPr lvl="0" indent="0" marL="1270000">
+              <a:buNone/>
+            </a:pPr>
+            <a:r>
+              <a:rPr sz="2000">
+                <a:latin typeface="Courier"/>
+              </a:rPr>
+              <a:t>select()</a:t>
             </a:r>
             <a:r>
               <a:rPr sz="2000"/>
-              <a:t> </a:t>
-            </a:r>
-            <a:r>
-              <a:rPr sz="2000">
-                <a:latin typeface="Courier"/>
-              </a:rPr>
-              <a:t>length_mm / 10</a:t>
-            </a:r>
-            <a:r>
-              <a:rPr sz="2000"/>
-              <a:t> converts millimeters to centimeters. Will </a:t>
-            </a:r>
-            <a:r>
-              <a:rPr sz="2000">
-                <a:latin typeface="Courier"/>
-              </a:rPr>
-              <a:t>mutate()</a:t>
-            </a:r>
-            <a:r>
-              <a:rPr sz="2000"/>
-              <a:t> </a:t>
-            </a:r>
-            <a:r>
-              <a:rPr sz="2000" b="1"/>
-              <a:t>replace</a:t>
-            </a:r>
-            <a:r>
-              <a:rPr sz="2000"/>
-              <a:t> </a:t>
-            </a:r>
-            <a:r>
-              <a:rPr sz="2000">
-                <a:latin typeface="Courier"/>
-              </a:rPr>
-              <a:t>length_mm</a:t>
-            </a:r>
-            <a:r>
-              <a:rPr sz="2000"/>
-              <a:t>, or </a:t>
-            </a:r>
-            <a:r>
-              <a:rPr sz="2000" b="1"/>
-              <a:t>add</a:t>
-            </a:r>
-            <a:r>
-              <a:rPr sz="2000"/>
-              <a:t> a new column? How many columns will the result have?</a:t>
+              <a:t> doesn’t touch rows — it only trims the columns you’re carrying forward. Useful the moment a dataset has 30+ columns and you need 4 of them.</a:t>
+            </a:r>
+          </a:p>
+        </p:txBody>
+      </p:sp>
+      <p:sp>
+        <p:nvSpPr>
+          <p:cNvPr id="4" name="Content Placeholder 3"/>
+          <p:cNvSpPr>
+            <a:spLocks noGrp="1"/>
+          </p:cNvSpPr>
+          <p:nvPr>
+            <p:ph idx="2" sz="half"/>
+          </p:nvPr>
+        </p:nvSpPr>
+        <p:spPr/>
+        <p:txBody>
+          <a:bodyPr/>
+          <a:lstStyle/>
+          <a:p>
+            <a:pPr lvl="0"/>
+            <a:r>
+              <a:rPr/>
+              <a:t>Name the columns you want, in any order</a:t>
+            </a:r>
+          </a:p>
+          <a:p>
+            <a:pPr lvl="0"/>
+            <a:r>
+              <a:rPr/>
+              <a:t>A leading </a:t>
+            </a:r>
+            <a:r>
+              <a:rPr>
+                <a:latin typeface="Courier"/>
+              </a:rPr>
+              <a:t>-</a:t>
+            </a:r>
+            <a:r>
+              <a:rPr/>
+              <a:t> drops a column instead of keeping it</a:t>
             </a:r>
           </a:p>
         </p:txBody>
@@ -3521,661 +3781,51 @@
       </p:grpSpPr>
       <p:sp>
         <p:nvSpPr>
-          <p:cNvPr id="3" name="Content Placeholder 2"/>
-          <p:cNvSpPr>
-            <a:spLocks noGrp="1"/>
-          </p:cNvSpPr>
-          <p:nvPr>
-            <p:ph idx="1" sz="half"/>
-          </p:nvPr>
-        </p:nvSpPr>
-        <p:spPr/>
+          <p:cNvPr id="2" name="Title 1"/>
+          <p:cNvSpPr>
+            <a:spLocks noGrp="1"/>
+          </p:cNvSpPr>
+          <p:nvPr>
+            <p:ph type="title"/>
+          </p:nvPr>
+        </p:nvSpPr>
+        <p:spPr>
+          <a:xfrm>
+            <a:off x="0" y="0"/>
+            <a:ext cx="9144000" cy="602780"/>
+          </a:xfrm>
+          <a:solidFill>
+            <a:srgbClr val="70121D"/>
+          </a:solidFill>
+        </p:spPr>
         <p:txBody>
           <a:bodyPr/>
           <a:lstStyle/>
           <a:p>
-            <a:pPr lvl="0" indent="0">
-              <a:buNone/>
-            </a:pPr>
-            <a:r>
-              <a:rPr>
-                <a:solidFill>
-                  <a:srgbClr val="5E5E5E"/>
-                </a:solidFill>
-                <a:latin typeface="Courier"/>
-              </a:rPr>
-              <a:t># Add a converted-units column</a:t>
-            </a:r>
-            <a:br/>
-            <a:r>
-              <a:rPr>
-                <a:solidFill>
-                  <a:srgbClr val="003B4F"/>
-                </a:solidFill>
-                <a:latin typeface="Courier"/>
-              </a:rPr>
-              <a:t>pine_csv_df </a:t>
-            </a:r>
-            <a:r>
-              <a:rPr>
-                <a:solidFill>
-                  <a:srgbClr val="5E5E5E"/>
-                </a:solidFill>
-                <a:latin typeface="Courier"/>
-              </a:rPr>
-              <a:t>|&gt;</a:t>
-            </a:r>
-            <a:br/>
-            <a:r>
-              <a:rPr>
-                <a:solidFill>
-                  <a:srgbClr val="003B4F"/>
-                </a:solidFill>
-                <a:latin typeface="Courier"/>
-              </a:rPr>
-              <a:t>  </a:t>
-            </a:r>
-            <a:r>
-              <a:rPr>
-                <a:solidFill>
-                  <a:srgbClr val="4758AB"/>
-                </a:solidFill>
-                <a:latin typeface="Courier"/>
-              </a:rPr>
-              <a:t>mutate</a:t>
-            </a:r>
-            <a:r>
-              <a:rPr>
-                <a:solidFill>
-                  <a:srgbClr val="003B4F"/>
-                </a:solidFill>
-                <a:latin typeface="Courier"/>
-              </a:rPr>
-              <a:t>(</a:t>
-            </a:r>
-            <a:r>
-              <a:rPr>
-                <a:solidFill>
-                  <a:srgbClr val="657422"/>
-                </a:solidFill>
-                <a:latin typeface="Courier"/>
-              </a:rPr>
-              <a:t>length_cm =</a:t>
-            </a:r>
-            <a:r>
-              <a:rPr>
-                <a:solidFill>
-                  <a:srgbClr val="003B4F"/>
-                </a:solidFill>
-                <a:latin typeface="Courier"/>
-              </a:rPr>
-              <a:t> length_mm </a:t>
-            </a:r>
-            <a:r>
-              <a:rPr>
-                <a:solidFill>
-                  <a:srgbClr val="5E5E5E"/>
-                </a:solidFill>
-                <a:latin typeface="Courier"/>
-              </a:rPr>
-              <a:t>/</a:t>
-            </a:r>
-            <a:r>
-              <a:rPr>
-                <a:solidFill>
-                  <a:srgbClr val="003B4F"/>
-                </a:solidFill>
-                <a:latin typeface="Courier"/>
-              </a:rPr>
-              <a:t> </a:t>
-            </a:r>
-            <a:r>
-              <a:rPr>
-                <a:solidFill>
-                  <a:srgbClr val="AD0000"/>
-                </a:solidFill>
-                <a:latin typeface="Courier"/>
-              </a:rPr>
-              <a:t>10</a:t>
-            </a:r>
-            <a:r>
-              <a:rPr>
-                <a:solidFill>
-                  <a:srgbClr val="003B4F"/>
-                </a:solidFill>
-                <a:latin typeface="Courier"/>
-              </a:rPr>
-              <a:t>) </a:t>
-            </a:r>
-            <a:r>
-              <a:rPr>
-                <a:solidFill>
-                  <a:srgbClr val="5E5E5E"/>
-                </a:solidFill>
-                <a:latin typeface="Courier"/>
-              </a:rPr>
-              <a:t>|&gt;</a:t>
-            </a:r>
-            <a:br/>
-            <a:r>
-              <a:rPr>
-                <a:solidFill>
-                  <a:srgbClr val="003B4F"/>
-                </a:solidFill>
-                <a:latin typeface="Courier"/>
-              </a:rPr>
-              <a:t>  </a:t>
-            </a:r>
-            <a:r>
-              <a:rPr>
-                <a:solidFill>
-                  <a:srgbClr val="4758AB"/>
-                </a:solidFill>
-                <a:latin typeface="Courier"/>
-              </a:rPr>
-              <a:t>head</a:t>
-            </a:r>
-            <a:r>
-              <a:rPr>
-                <a:solidFill>
-                  <a:srgbClr val="003B4F"/>
-                </a:solidFill>
-                <a:latin typeface="Courier"/>
-              </a:rPr>
-              <a:t>()</a:t>
-            </a:r>
-          </a:p>
-          <a:p>
-            <a:pPr lvl="0" indent="0">
-              <a:buNone/>
-            </a:pPr>
-            <a:r>
-              <a:rPr>
-                <a:latin typeface="Courier"/>
-              </a:rPr>
-              <a:t># A tibble: 6 × 7
-  date    group       n_s   wind  tree_no length_mm length_cm
-  &lt;chr&gt;   &lt;chr&gt;       &lt;chr&gt; &lt;chr&gt;   &lt;dbl&gt;     &lt;dbl&gt;     &lt;dbl&gt;
-1 3/20/25 cephalopods n     lee         1        20       2  
-2 3/20/25 cephalopods n     lee         1        21       2.1
-3 3/20/25 cephalopods n     lee         1        23       2.3
-4 3/20/25 cephalopods n     lee         1        25       2.5
-5 3/20/25 cephalopods n     lee         1        21       2.1
-6 3/20/25 cephalopods n     lee         1        16       1.6</a:t>
-            </a:r>
-          </a:p>
-          <a:p>
-            <a:pPr lvl="0" indent="0">
-              <a:buNone/>
-            </a:pPr>
-            <a:r>
-              <a:rPr>
-                <a:solidFill>
-                  <a:srgbClr val="5E5E5E"/>
-                </a:solidFill>
-                <a:latin typeface="Courier"/>
-              </a:rPr>
-              <a:t># Add a log-transformed column</a:t>
-            </a:r>
-            <a:br/>
-            <a:r>
-              <a:rPr>
-                <a:solidFill>
-                  <a:srgbClr val="003B4F"/>
-                </a:solidFill>
-                <a:latin typeface="Courier"/>
-              </a:rPr>
-              <a:t>pine_csv_df </a:t>
-            </a:r>
-            <a:r>
-              <a:rPr>
-                <a:solidFill>
-                  <a:srgbClr val="5E5E5E"/>
-                </a:solidFill>
-                <a:latin typeface="Courier"/>
-              </a:rPr>
-              <a:t>|&gt;</a:t>
-            </a:r>
-            <a:br/>
-            <a:r>
-              <a:rPr>
-                <a:solidFill>
-                  <a:srgbClr val="003B4F"/>
-                </a:solidFill>
-                <a:latin typeface="Courier"/>
-              </a:rPr>
-              <a:t>  </a:t>
-            </a:r>
-            <a:r>
-              <a:rPr>
-                <a:solidFill>
-                  <a:srgbClr val="4758AB"/>
-                </a:solidFill>
-                <a:latin typeface="Courier"/>
-              </a:rPr>
-              <a:t>mutate</a:t>
-            </a:r>
-            <a:r>
-              <a:rPr>
-                <a:solidFill>
-                  <a:srgbClr val="003B4F"/>
-                </a:solidFill>
-                <a:latin typeface="Courier"/>
-              </a:rPr>
-              <a:t>(</a:t>
-            </a:r>
-            <a:r>
-              <a:rPr>
-                <a:solidFill>
-                  <a:srgbClr val="657422"/>
-                </a:solidFill>
-                <a:latin typeface="Courier"/>
-              </a:rPr>
-              <a:t>log_length =</a:t>
-            </a:r>
-            <a:r>
-              <a:rPr>
-                <a:solidFill>
-                  <a:srgbClr val="003B4F"/>
-                </a:solidFill>
-                <a:latin typeface="Courier"/>
-              </a:rPr>
-              <a:t> </a:t>
-            </a:r>
-            <a:r>
-              <a:rPr>
-                <a:solidFill>
-                  <a:srgbClr val="4758AB"/>
-                </a:solidFill>
-                <a:latin typeface="Courier"/>
-              </a:rPr>
-              <a:t>log</a:t>
-            </a:r>
-            <a:r>
-              <a:rPr>
-                <a:solidFill>
-                  <a:srgbClr val="003B4F"/>
-                </a:solidFill>
-                <a:latin typeface="Courier"/>
-              </a:rPr>
-              <a:t>(length_mm)) </a:t>
-            </a:r>
-            <a:r>
-              <a:rPr>
-                <a:solidFill>
-                  <a:srgbClr val="5E5E5E"/>
-                </a:solidFill>
-                <a:latin typeface="Courier"/>
-              </a:rPr>
-              <a:t>|&gt;</a:t>
-            </a:r>
-            <a:br/>
-            <a:r>
-              <a:rPr>
-                <a:solidFill>
-                  <a:srgbClr val="003B4F"/>
-                </a:solidFill>
-                <a:latin typeface="Courier"/>
-              </a:rPr>
-              <a:t>  </a:t>
-            </a:r>
-            <a:r>
-              <a:rPr>
-                <a:solidFill>
-                  <a:srgbClr val="4758AB"/>
-                </a:solidFill>
-                <a:latin typeface="Courier"/>
-              </a:rPr>
-              <a:t>head</a:t>
-            </a:r>
-            <a:r>
-              <a:rPr>
-                <a:solidFill>
-                  <a:srgbClr val="003B4F"/>
-                </a:solidFill>
-                <a:latin typeface="Courier"/>
-              </a:rPr>
-              <a:t>()</a:t>
-            </a:r>
-          </a:p>
-          <a:p>
-            <a:pPr lvl="0" indent="0">
-              <a:buNone/>
-            </a:pPr>
-            <a:r>
-              <a:rPr>
-                <a:latin typeface="Courier"/>
-              </a:rPr>
-              <a:t># A tibble: 6 × 7
-  date    group       n_s   wind  tree_no length_mm log_length
-  &lt;chr&gt;   &lt;chr&gt;       &lt;chr&gt; &lt;chr&gt;   &lt;dbl&gt;     &lt;dbl&gt;      &lt;dbl&gt;
-1 3/20/25 cephalopods n     lee         1        20       3.00
-2 3/20/25 cephalopods n     lee         1        21       3.04
-3 3/20/25 cephalopods n     lee         1        23       3.14
-4 3/20/25 cephalopods n     lee         1        25       3.22
-5 3/20/25 cephalopods n     lee         1        21       3.04
-6 3/20/25 cephalopods n     lee         1        16       2.77</a:t>
-            </a:r>
-          </a:p>
-          <a:p>
-            <a:pPr lvl="0" indent="0">
-              <a:buNone/>
-            </a:pPr>
-            <a:r>
-              <a:rPr>
-                <a:solidFill>
-                  <a:srgbClr val="5E5E5E"/>
-                </a:solidFill>
-                <a:latin typeface="Courier"/>
-              </a:rPr>
-              <a:t># mutate() can build on a column it just created</a:t>
-            </a:r>
-            <a:br/>
-            <a:r>
-              <a:rPr>
-                <a:solidFill>
-                  <a:srgbClr val="003B4F"/>
-                </a:solidFill>
-                <a:latin typeface="Courier"/>
-              </a:rPr>
-              <a:t>pine_csv_df </a:t>
-            </a:r>
-            <a:r>
-              <a:rPr>
-                <a:solidFill>
-                  <a:srgbClr val="5E5E5E"/>
-                </a:solidFill>
-                <a:latin typeface="Courier"/>
-              </a:rPr>
-              <a:t>|&gt;</a:t>
-            </a:r>
-            <a:br/>
-            <a:r>
-              <a:rPr>
-                <a:solidFill>
-                  <a:srgbClr val="003B4F"/>
-                </a:solidFill>
-                <a:latin typeface="Courier"/>
-              </a:rPr>
-              <a:t>  </a:t>
-            </a:r>
-            <a:r>
-              <a:rPr>
-                <a:solidFill>
-                  <a:srgbClr val="4758AB"/>
-                </a:solidFill>
-                <a:latin typeface="Courier"/>
-              </a:rPr>
-              <a:t>mutate</a:t>
-            </a:r>
-            <a:r>
-              <a:rPr>
-                <a:solidFill>
-                  <a:srgbClr val="003B4F"/>
-                </a:solidFill>
-                <a:latin typeface="Courier"/>
-              </a:rPr>
-              <a:t>(</a:t>
-            </a:r>
-            <a:br/>
-            <a:r>
-              <a:rPr>
-                <a:solidFill>
-                  <a:srgbClr val="003B4F"/>
-                </a:solidFill>
-                <a:latin typeface="Courier"/>
-              </a:rPr>
-              <a:t>    </a:t>
-            </a:r>
-            <a:r>
-              <a:rPr>
-                <a:solidFill>
-                  <a:srgbClr val="657422"/>
-                </a:solidFill>
-                <a:latin typeface="Courier"/>
-              </a:rPr>
-              <a:t>length_cm  =</a:t>
-            </a:r>
-            <a:r>
-              <a:rPr>
-                <a:solidFill>
-                  <a:srgbClr val="003B4F"/>
-                </a:solidFill>
-                <a:latin typeface="Courier"/>
-              </a:rPr>
-              <a:t> length_mm </a:t>
-            </a:r>
-            <a:r>
-              <a:rPr>
-                <a:solidFill>
-                  <a:srgbClr val="5E5E5E"/>
-                </a:solidFill>
-                <a:latin typeface="Courier"/>
-              </a:rPr>
-              <a:t>/</a:t>
-            </a:r>
-            <a:r>
-              <a:rPr>
-                <a:solidFill>
-                  <a:srgbClr val="003B4F"/>
-                </a:solidFill>
-                <a:latin typeface="Courier"/>
-              </a:rPr>
-              <a:t> </a:t>
-            </a:r>
-            <a:r>
-              <a:rPr>
-                <a:solidFill>
-                  <a:srgbClr val="AD0000"/>
-                </a:solidFill>
-                <a:latin typeface="Courier"/>
-              </a:rPr>
-              <a:t>10</a:t>
-            </a:r>
-            <a:r>
-              <a:rPr>
-                <a:solidFill>
-                  <a:srgbClr val="003B4F"/>
-                </a:solidFill>
-                <a:latin typeface="Courier"/>
-              </a:rPr>
-              <a:t>,</a:t>
-            </a:r>
-            <a:br/>
-            <a:r>
-              <a:rPr>
-                <a:solidFill>
-                  <a:srgbClr val="003B4F"/>
-                </a:solidFill>
-                <a:latin typeface="Courier"/>
-              </a:rPr>
-              <a:t>    </a:t>
-            </a:r>
-            <a:r>
-              <a:rPr>
-                <a:solidFill>
-                  <a:srgbClr val="657422"/>
-                </a:solidFill>
-                <a:latin typeface="Courier"/>
-              </a:rPr>
-              <a:t>size_class =</a:t>
-            </a:r>
-            <a:r>
-              <a:rPr>
-                <a:solidFill>
-                  <a:srgbClr val="003B4F"/>
-                </a:solidFill>
-                <a:latin typeface="Courier"/>
-              </a:rPr>
-              <a:t> </a:t>
-            </a:r>
-            <a:r>
-              <a:rPr>
-                <a:solidFill>
-                  <a:srgbClr val="4758AB"/>
-                </a:solidFill>
-                <a:latin typeface="Courier"/>
-              </a:rPr>
-              <a:t>if_else</a:t>
-            </a:r>
-            <a:r>
-              <a:rPr>
-                <a:solidFill>
-                  <a:srgbClr val="003B4F"/>
-                </a:solidFill>
-                <a:latin typeface="Courier"/>
-              </a:rPr>
-              <a:t>(length_mm </a:t>
-            </a:r>
-            <a:r>
-              <a:rPr>
-                <a:solidFill>
-                  <a:srgbClr val="5E5E5E"/>
-                </a:solidFill>
-                <a:latin typeface="Courier"/>
-              </a:rPr>
-              <a:t>&gt;</a:t>
-            </a:r>
-            <a:r>
-              <a:rPr>
-                <a:solidFill>
-                  <a:srgbClr val="003B4F"/>
-                </a:solidFill>
-                <a:latin typeface="Courier"/>
-              </a:rPr>
-              <a:t> </a:t>
-            </a:r>
-            <a:r>
-              <a:rPr>
-                <a:solidFill>
-                  <a:srgbClr val="AD0000"/>
-                </a:solidFill>
-                <a:latin typeface="Courier"/>
-              </a:rPr>
-              <a:t>18</a:t>
-            </a:r>
-            <a:r>
-              <a:rPr>
-                <a:solidFill>
-                  <a:srgbClr val="003B4F"/>
-                </a:solidFill>
-                <a:latin typeface="Courier"/>
-              </a:rPr>
-              <a:t>, </a:t>
-            </a:r>
-            <a:r>
-              <a:rPr>
-                <a:solidFill>
-                  <a:srgbClr val="20794D"/>
-                </a:solidFill>
-                <a:latin typeface="Courier"/>
-              </a:rPr>
-              <a:t>"long"</a:t>
-            </a:r>
-            <a:r>
-              <a:rPr>
-                <a:solidFill>
-                  <a:srgbClr val="003B4F"/>
-                </a:solidFill>
-                <a:latin typeface="Courier"/>
-              </a:rPr>
-              <a:t>, </a:t>
-            </a:r>
-            <a:r>
-              <a:rPr>
-                <a:solidFill>
-                  <a:srgbClr val="20794D"/>
-                </a:solidFill>
-                <a:latin typeface="Courier"/>
-              </a:rPr>
-              <a:t>"short"</a:t>
-            </a:r>
-            <a:r>
-              <a:rPr>
-                <a:solidFill>
-                  <a:srgbClr val="003B4F"/>
-                </a:solidFill>
-                <a:latin typeface="Courier"/>
-              </a:rPr>
-              <a:t>)</a:t>
-            </a:r>
-            <a:br/>
-            <a:r>
-              <a:rPr>
-                <a:solidFill>
-                  <a:srgbClr val="003B4F"/>
-                </a:solidFill>
-                <a:latin typeface="Courier"/>
-              </a:rPr>
-              <a:t>  ) </a:t>
-            </a:r>
-            <a:r>
-              <a:rPr>
-                <a:solidFill>
-                  <a:srgbClr val="5E5E5E"/>
-                </a:solidFill>
-                <a:latin typeface="Courier"/>
-              </a:rPr>
-              <a:t>|&gt;</a:t>
-            </a:r>
-            <a:br/>
-            <a:r>
-              <a:rPr>
-                <a:solidFill>
-                  <a:srgbClr val="003B4F"/>
-                </a:solidFill>
-                <a:latin typeface="Courier"/>
-              </a:rPr>
-              <a:t>  </a:t>
-            </a:r>
-            <a:r>
-              <a:rPr>
-                <a:solidFill>
-                  <a:srgbClr val="4758AB"/>
-                </a:solidFill>
-                <a:latin typeface="Courier"/>
-              </a:rPr>
-              <a:t>head</a:t>
-            </a:r>
-            <a:r>
-              <a:rPr>
-                <a:solidFill>
-                  <a:srgbClr val="003B4F"/>
-                </a:solidFill>
-                <a:latin typeface="Courier"/>
-              </a:rPr>
-              <a:t>()</a:t>
-            </a:r>
-          </a:p>
-          <a:p>
-            <a:pPr lvl="0" indent="0">
-              <a:buNone/>
-            </a:pPr>
-            <a:r>
-              <a:rPr>
-                <a:latin typeface="Courier"/>
-              </a:rPr>
-              <a:t># A tibble: 6 × 8
-  date    group       n_s   wind  tree_no length_mm length_cm size_class
-  &lt;chr&gt;   &lt;chr&gt;       &lt;chr&gt; &lt;chr&gt;   &lt;dbl&gt;     &lt;dbl&gt;     &lt;dbl&gt; &lt;chr&gt;     
-1 3/20/25 cephalopods n     lee         1        20       2   long      
-2 3/20/25 cephalopods n     lee         1        21       2.1 long      
-3 3/20/25 cephalopods n     lee         1        23       2.3 long      
-4 3/20/25 cephalopods n     lee         1        25       2.5 long      
-5 3/20/25 cephalopods n     lee         1        21       2.1 long      
-6 3/20/25 cephalopods n     lee         1        16       1.6 short     </a:t>
-            </a:r>
-          </a:p>
-        </p:txBody>
-      </p:sp>
-      <p:sp>
-        <p:nvSpPr>
-          <p:cNvPr id="4" name="Content Placeholder 3"/>
-          <p:cNvSpPr>
-            <a:spLocks noGrp="1"/>
-          </p:cNvSpPr>
-          <p:nvPr>
-            <p:ph idx="2" sz="half"/>
+            <a:pPr lvl="0" indent="0" marL="0">
+              <a:buNone/>
+            </a:pPr>
+            <a:r>
+              <a:rPr>
+                <a:latin typeface="Courier"/>
+              </a:rPr>
+              <a:t>select()</a:t>
+            </a:r>
+            <a:r>
+              <a:rPr/>
+              <a:t> — Picking Columns by Pattern</a:t>
+            </a:r>
+          </a:p>
+        </p:txBody>
+      </p:sp>
+      <p:sp>
+        <p:nvSpPr>
+          <p:cNvPr id="3" name="Content Placeholder 2"/>
+          <p:cNvSpPr>
+            <a:spLocks noGrp="1"/>
+          </p:cNvSpPr>
+          <p:nvPr>
+            <p:ph idx="1" sz="half"/>
           </p:nvPr>
         </p:nvSpPr>
         <p:spPr/>
@@ -4183,89 +3833,221 @@
           <a:bodyPr/>
           <a:lstStyle/>
           <a:p>
-            <a:pPr lvl="0" indent="0" marL="1270000">
-              <a:buNone/>
-            </a:pPr>
-            <a:r>
-              <a:rPr sz="2000" b="1"/>
-              <a:t>Note</a:t>
-            </a:r>
-          </a:p>
-          <a:p>
-            <a:pPr lvl="0" indent="0" marL="1270000">
-              <a:buNone/>
-            </a:pPr>
-            <a:r>
-              <a:rPr sz="2000" b="1"/>
-              <a:t>✅ Key idea</a:t>
-            </a:r>
-          </a:p>
-          <a:p>
-            <a:pPr lvl="0" indent="0" marL="1270000">
-              <a:buNone/>
-            </a:pPr>
-            <a:r>
-              <a:rPr sz="2000">
-                <a:latin typeface="Courier"/>
-              </a:rPr>
-              <a:t>mutate()</a:t>
-            </a:r>
-            <a:r>
-              <a:rPr sz="2000"/>
-              <a:t> keeps every existing column and adds new ones to the right. To </a:t>
-            </a:r>
-            <a:r>
-              <a:rPr sz="2000" i="1"/>
-              <a:t>overwrite</a:t>
-            </a:r>
-            <a:r>
-              <a:rPr sz="2000"/>
-              <a:t> a column, reuse its name: </a:t>
-            </a:r>
-            <a:r>
-              <a:rPr sz="2000">
-                <a:latin typeface="Courier"/>
-              </a:rPr>
-              <a:t>mutate(length_mm = round(length_mm, 1))</a:t>
-            </a:r>
-            <a:r>
-              <a:rPr sz="2000"/>
-              <a:t>.</a:t>
-            </a:r>
-          </a:p>
-          <a:p>
-            <a:pPr lvl="0" indent="0" marL="1270000">
-              <a:buNone/>
-            </a:pPr>
-            <a:r>
-              <a:rPr sz="2000" b="1"/>
-              <a:t>Tip</a:t>
-            </a:r>
-          </a:p>
-          <a:p>
-            <a:pPr lvl="0" indent="0" marL="1270000">
-              <a:buNone/>
-            </a:pPr>
-            <a:r>
-              <a:rPr sz="2000" b="1"/>
-              <a:t>📖 Why log-transform?</a:t>
-            </a:r>
-          </a:p>
-          <a:p>
-            <a:pPr lvl="0" indent="0" marL="1270000">
-              <a:buNone/>
-            </a:pPr>
-            <a:r>
-              <a:rPr sz="2000"/>
-              <a:t>Many biological measurements are </a:t>
-            </a:r>
-            <a:r>
-              <a:rPr sz="2000" b="1"/>
-              <a:t>right-skewed</a:t>
-            </a:r>
-            <a:r>
-              <a:rPr sz="2000"/>
-              <a:t> — a log transform pulls extreme values in and can make a distribution more symmetric before you summarize or test it. We’ll check whether it matters for our data in a later module.</a:t>
+            <a:pPr lvl="0" indent="0">
+              <a:buNone/>
+            </a:pPr>
+            <a:r>
+              <a:rPr>
+                <a:solidFill>
+                  <a:srgbClr val="5E5E5E"/>
+                </a:solidFill>
+                <a:latin typeface="Courier"/>
+              </a:rPr>
+              <a:t># Keep columns that contain a word</a:t>
+            </a:r>
+            <a:br/>
+            <a:r>
+              <a:rPr>
+                <a:solidFill>
+                  <a:srgbClr val="003B4F"/>
+                </a:solidFill>
+                <a:latin typeface="Courier"/>
+              </a:rPr>
+              <a:t>pine_csv_df </a:t>
+            </a:r>
+            <a:r>
+              <a:rPr>
+                <a:solidFill>
+                  <a:srgbClr val="5E5E5E"/>
+                </a:solidFill>
+                <a:latin typeface="Courier"/>
+              </a:rPr>
+              <a:t>|&gt;</a:t>
+            </a:r>
+            <a:r>
+              <a:rPr>
+                <a:solidFill>
+                  <a:srgbClr val="003B4F"/>
+                </a:solidFill>
+                <a:latin typeface="Courier"/>
+              </a:rPr>
+              <a:t> </a:t>
+            </a:r>
+            <a:r>
+              <a:rPr>
+                <a:solidFill>
+                  <a:srgbClr val="4758AB"/>
+                </a:solidFill>
+                <a:latin typeface="Courier"/>
+              </a:rPr>
+              <a:t>select</a:t>
+            </a:r>
+            <a:r>
+              <a:rPr>
+                <a:solidFill>
+                  <a:srgbClr val="003B4F"/>
+                </a:solidFill>
+                <a:latin typeface="Courier"/>
+              </a:rPr>
+              <a:t>(</a:t>
+            </a:r>
+            <a:r>
+              <a:rPr>
+                <a:solidFill>
+                  <a:srgbClr val="4758AB"/>
+                </a:solidFill>
+                <a:latin typeface="Courier"/>
+              </a:rPr>
+              <a:t>contains</a:t>
+            </a:r>
+            <a:r>
+              <a:rPr>
+                <a:solidFill>
+                  <a:srgbClr val="003B4F"/>
+                </a:solidFill>
+                <a:latin typeface="Courier"/>
+              </a:rPr>
+              <a:t>(</a:t>
+            </a:r>
+            <a:r>
+              <a:rPr>
+                <a:solidFill>
+                  <a:srgbClr val="20794D"/>
+                </a:solidFill>
+                <a:latin typeface="Courier"/>
+              </a:rPr>
+              <a:t>"n"</a:t>
+            </a:r>
+            <a:r>
+              <a:rPr>
+                <a:solidFill>
+                  <a:srgbClr val="003B4F"/>
+                </a:solidFill>
+                <a:latin typeface="Courier"/>
+              </a:rPr>
+              <a:t>)) </a:t>
+            </a:r>
+            <a:r>
+              <a:rPr>
+                <a:solidFill>
+                  <a:srgbClr val="5E5E5E"/>
+                </a:solidFill>
+                <a:latin typeface="Courier"/>
+              </a:rPr>
+              <a:t>|&gt;</a:t>
+            </a:r>
+            <a:r>
+              <a:rPr>
+                <a:solidFill>
+                  <a:srgbClr val="003B4F"/>
+                </a:solidFill>
+                <a:latin typeface="Courier"/>
+              </a:rPr>
+              <a:t> </a:t>
+            </a:r>
+            <a:r>
+              <a:rPr>
+                <a:solidFill>
+                  <a:srgbClr val="4758AB"/>
+                </a:solidFill>
+                <a:latin typeface="Courier"/>
+              </a:rPr>
+              <a:t>head</a:t>
+            </a:r>
+            <a:r>
+              <a:rPr>
+                <a:solidFill>
+                  <a:srgbClr val="003B4F"/>
+                </a:solidFill>
+                <a:latin typeface="Courier"/>
+              </a:rPr>
+              <a:t>()</a:t>
+            </a:r>
+          </a:p>
+          <a:p>
+            <a:pPr lvl="0" indent="0">
+              <a:buNone/>
+            </a:pPr>
+            <a:r>
+              <a:rPr>
+                <a:latin typeface="Courier"/>
+              </a:rPr>
+              <a:t># A tibble: 6 × 4
+  n_s   wind  tree_no length_mm
+  &lt;chr&gt; &lt;chr&gt;   &lt;dbl&gt;     &lt;dbl&gt;
+1 n     lee         1        20
+2 n     lee         1        21
+3 n     lee         1        23
+4 n     lee         1        25
+5 n     lee         1        21
+6 n     lee         1        16</a:t>
+            </a:r>
+          </a:p>
+        </p:txBody>
+      </p:sp>
+      <p:sp>
+        <p:nvSpPr>
+          <p:cNvPr id="4" name="Content Placeholder 3"/>
+          <p:cNvSpPr>
+            <a:spLocks noGrp="1"/>
+          </p:cNvSpPr>
+          <p:nvPr>
+            <p:ph idx="2" sz="half"/>
+          </p:nvPr>
+        </p:nvSpPr>
+        <p:spPr/>
+        <p:txBody>
+          <a:bodyPr/>
+          <a:lstStyle/>
+          <a:p>
+            <a:pPr lvl="0" indent="0" marL="0">
+              <a:buNone/>
+            </a:pPr>
+            <a:r>
+              <a:rPr b="1"/>
+              <a:t>Useful helpers:</a:t>
+            </a:r>
+          </a:p>
+          <a:p>
+            <a:pPr lvl="0"/>
+            <a:r>
+              <a:rPr>
+                <a:latin typeface="Courier"/>
+              </a:rPr>
+              <a:t>starts_with("x")</a:t>
+            </a:r>
+          </a:p>
+          <a:p>
+            <a:pPr lvl="0"/>
+            <a:r>
+              <a:rPr>
+                <a:latin typeface="Courier"/>
+              </a:rPr>
+              <a:t>ends_with("_mm")</a:t>
+            </a:r>
+          </a:p>
+          <a:p>
+            <a:pPr lvl="0"/>
+            <a:r>
+              <a:rPr>
+                <a:latin typeface="Courier"/>
+              </a:rPr>
+              <a:t>contains("wind")</a:t>
+            </a:r>
+          </a:p>
+          <a:p>
+            <a:pPr lvl="0" indent="0" marL="0">
+              <a:buNone/>
+            </a:pPr>
+            <a:r>
+              <a:rPr/>
+              <a:t>📖 R4DS §3.3 — </a:t>
+            </a:r>
+            <a:r>
+              <a:rPr>
+                <a:latin typeface="Courier"/>
+              </a:rPr>
+              <a:t>select()</a:t>
             </a:r>
           </a:p>
         </p:txBody>
@@ -4305,6 +4087,1014 @@
         <p:spPr>
           <a:xfrm>
             <a:off x="0" y="0"/>
+            <a:ext cx="9144000" cy="582780"/>
+          </a:xfrm>
+        </p:spPr>
+        <p:txBody>
+          <a:bodyPr/>
+          <a:lstStyle/>
+          <a:p>
+            <a:pPr lvl="0" indent="0" marL="0">
+              <a:buNone/>
+            </a:pPr>
+            <a:r>
+              <a:rPr>
+                <a:latin typeface="Courier"/>
+              </a:rPr>
+              <a:t>mutate()</a:t>
+            </a:r>
+            <a:r>
+              <a:rPr/>
+              <a:t> — Creating and Changing Columns</a:t>
+            </a:r>
+          </a:p>
+        </p:txBody>
+      </p:sp>
+      <p:sp>
+        <p:nvSpPr>
+          <p:cNvPr id="3" name="Content Placeholder 2"/>
+          <p:cNvSpPr>
+            <a:spLocks noGrp="1"/>
+          </p:cNvSpPr>
+          <p:nvPr>
+            <p:ph idx="1"/>
+          </p:nvPr>
+        </p:nvSpPr>
+        <p:spPr/>
+        <p:txBody>
+          <a:bodyPr/>
+          <a:lstStyle/>
+          <a:p>
+            <a:pPr lvl="0" indent="0" marL="1270000">
+              <a:buNone/>
+            </a:pPr>
+            <a:r>
+              <a:rPr sz="2000" b="1"/>
+              <a:t>Note</a:t>
+            </a:r>
+          </a:p>
+          <a:p>
+            <a:pPr lvl="0" indent="0" marL="1270000">
+              <a:buNone/>
+            </a:pPr>
+            <a:r>
+              <a:rPr sz="2000" b="1"/>
+              <a:t>🔮 Predict first:</a:t>
+            </a:r>
+            <a:r>
+              <a:rPr sz="2000"/>
+              <a:t> </a:t>
+            </a:r>
+            <a:r>
+              <a:rPr sz="2000">
+                <a:latin typeface="Courier"/>
+              </a:rPr>
+              <a:t>length_mm / 10</a:t>
+            </a:r>
+            <a:r>
+              <a:rPr sz="2000"/>
+              <a:t> converts millimeters to centimeters. Will </a:t>
+            </a:r>
+            <a:r>
+              <a:rPr sz="2000">
+                <a:latin typeface="Courier"/>
+              </a:rPr>
+              <a:t>mutate()</a:t>
+            </a:r>
+            <a:r>
+              <a:rPr sz="2000"/>
+              <a:t> </a:t>
+            </a:r>
+            <a:r>
+              <a:rPr sz="2000" b="1"/>
+              <a:t>replace</a:t>
+            </a:r>
+            <a:r>
+              <a:rPr sz="2000"/>
+              <a:t> </a:t>
+            </a:r>
+            <a:r>
+              <a:rPr sz="2000">
+                <a:latin typeface="Courier"/>
+              </a:rPr>
+              <a:t>length_mm</a:t>
+            </a:r>
+            <a:r>
+              <a:rPr sz="2000"/>
+              <a:t>, or </a:t>
+            </a:r>
+            <a:r>
+              <a:rPr sz="2000" b="1"/>
+              <a:t>add</a:t>
+            </a:r>
+            <a:r>
+              <a:rPr sz="2000"/>
+              <a:t> a new column? How many columns will the result have?</a:t>
+            </a:r>
+          </a:p>
+        </p:txBody>
+      </p:sp>
+    </p:spTree>
+  </p:cSld>
+</p:sld>
+</file>
+
+<file path=ppt/slides/slide13.xml><?xml version="1.0" encoding="utf-8"?>
+<p:sld xmlns:a="http://schemas.openxmlformats.org/drawingml/2006/main" xmlns:r="http://schemas.openxmlformats.org/officeDocument/2006/relationships" xmlns:p="http://schemas.openxmlformats.org/presentationml/2006/main">
+  <p:cSld>
+    <p:spTree>
+      <p:nvGrpSpPr>
+        <p:cNvPr id="1" name=""/>
+        <p:cNvGrpSpPr/>
+        <p:nvPr/>
+      </p:nvGrpSpPr>
+      <p:grpSpPr>
+        <a:xfrm>
+          <a:off x="0" y="0"/>
+          <a:ext cx="0" cy="0"/>
+          <a:chOff x="0" y="0"/>
+          <a:chExt cx="0" cy="0"/>
+        </a:xfrm>
+      </p:grpSpPr>
+      <p:sp>
+        <p:nvSpPr>
+          <p:cNvPr id="3" name="Content Placeholder 2"/>
+          <p:cNvSpPr>
+            <a:spLocks noGrp="1"/>
+          </p:cNvSpPr>
+          <p:nvPr>
+            <p:ph idx="1" sz="half"/>
+          </p:nvPr>
+        </p:nvSpPr>
+        <p:spPr/>
+        <p:txBody>
+          <a:bodyPr/>
+          <a:lstStyle/>
+          <a:p>
+            <a:pPr lvl="0" indent="0">
+              <a:buNone/>
+            </a:pPr>
+            <a:r>
+              <a:rPr>
+                <a:solidFill>
+                  <a:srgbClr val="5E5E5E"/>
+                </a:solidFill>
+                <a:latin typeface="Courier"/>
+              </a:rPr>
+              <a:t># Add a converted-units column</a:t>
+            </a:r>
+            <a:br/>
+            <a:r>
+              <a:rPr>
+                <a:solidFill>
+                  <a:srgbClr val="003B4F"/>
+                </a:solidFill>
+                <a:latin typeface="Courier"/>
+              </a:rPr>
+              <a:t>pine_csv_df </a:t>
+            </a:r>
+            <a:r>
+              <a:rPr>
+                <a:solidFill>
+                  <a:srgbClr val="5E5E5E"/>
+                </a:solidFill>
+                <a:latin typeface="Courier"/>
+              </a:rPr>
+              <a:t>|&gt;</a:t>
+            </a:r>
+            <a:br/>
+            <a:r>
+              <a:rPr>
+                <a:solidFill>
+                  <a:srgbClr val="003B4F"/>
+                </a:solidFill>
+                <a:latin typeface="Courier"/>
+              </a:rPr>
+              <a:t>  </a:t>
+            </a:r>
+            <a:r>
+              <a:rPr>
+                <a:solidFill>
+                  <a:srgbClr val="4758AB"/>
+                </a:solidFill>
+                <a:latin typeface="Courier"/>
+              </a:rPr>
+              <a:t>mutate</a:t>
+            </a:r>
+            <a:r>
+              <a:rPr>
+                <a:solidFill>
+                  <a:srgbClr val="003B4F"/>
+                </a:solidFill>
+                <a:latin typeface="Courier"/>
+              </a:rPr>
+              <a:t>(</a:t>
+            </a:r>
+            <a:r>
+              <a:rPr>
+                <a:solidFill>
+                  <a:srgbClr val="657422"/>
+                </a:solidFill>
+                <a:latin typeface="Courier"/>
+              </a:rPr>
+              <a:t>length_cm =</a:t>
+            </a:r>
+            <a:r>
+              <a:rPr>
+                <a:solidFill>
+                  <a:srgbClr val="003B4F"/>
+                </a:solidFill>
+                <a:latin typeface="Courier"/>
+              </a:rPr>
+              <a:t> length_mm </a:t>
+            </a:r>
+            <a:r>
+              <a:rPr>
+                <a:solidFill>
+                  <a:srgbClr val="5E5E5E"/>
+                </a:solidFill>
+                <a:latin typeface="Courier"/>
+              </a:rPr>
+              <a:t>/</a:t>
+            </a:r>
+            <a:r>
+              <a:rPr>
+                <a:solidFill>
+                  <a:srgbClr val="003B4F"/>
+                </a:solidFill>
+                <a:latin typeface="Courier"/>
+              </a:rPr>
+              <a:t> </a:t>
+            </a:r>
+            <a:r>
+              <a:rPr>
+                <a:solidFill>
+                  <a:srgbClr val="AD0000"/>
+                </a:solidFill>
+                <a:latin typeface="Courier"/>
+              </a:rPr>
+              <a:t>10</a:t>
+            </a:r>
+            <a:r>
+              <a:rPr>
+                <a:solidFill>
+                  <a:srgbClr val="003B4F"/>
+                </a:solidFill>
+                <a:latin typeface="Courier"/>
+              </a:rPr>
+              <a:t>) </a:t>
+            </a:r>
+            <a:r>
+              <a:rPr>
+                <a:solidFill>
+                  <a:srgbClr val="5E5E5E"/>
+                </a:solidFill>
+                <a:latin typeface="Courier"/>
+              </a:rPr>
+              <a:t>|&gt;</a:t>
+            </a:r>
+            <a:br/>
+            <a:r>
+              <a:rPr>
+                <a:solidFill>
+                  <a:srgbClr val="003B4F"/>
+                </a:solidFill>
+                <a:latin typeface="Courier"/>
+              </a:rPr>
+              <a:t>  </a:t>
+            </a:r>
+            <a:r>
+              <a:rPr>
+                <a:solidFill>
+                  <a:srgbClr val="4758AB"/>
+                </a:solidFill>
+                <a:latin typeface="Courier"/>
+              </a:rPr>
+              <a:t>head</a:t>
+            </a:r>
+            <a:r>
+              <a:rPr>
+                <a:solidFill>
+                  <a:srgbClr val="003B4F"/>
+                </a:solidFill>
+                <a:latin typeface="Courier"/>
+              </a:rPr>
+              <a:t>()</a:t>
+            </a:r>
+          </a:p>
+          <a:p>
+            <a:pPr lvl="0" indent="0">
+              <a:buNone/>
+            </a:pPr>
+            <a:r>
+              <a:rPr>
+                <a:latin typeface="Courier"/>
+              </a:rPr>
+              <a:t># A tibble: 6 × 7
+  date    group       n_s   wind  tree_no length_mm length_cm
+  &lt;chr&gt;   &lt;chr&gt;       &lt;chr&gt; &lt;chr&gt;   &lt;dbl&gt;     &lt;dbl&gt;     &lt;dbl&gt;
+1 3/20/25 cephalopods n     lee         1        20       2  
+2 3/20/25 cephalopods n     lee         1        21       2.1
+3 3/20/25 cephalopods n     lee         1        23       2.3
+4 3/20/25 cephalopods n     lee         1        25       2.5
+5 3/20/25 cephalopods n     lee         1        21       2.1
+6 3/20/25 cephalopods n     lee         1        16       1.6</a:t>
+            </a:r>
+          </a:p>
+        </p:txBody>
+      </p:sp>
+      <p:sp>
+        <p:nvSpPr>
+          <p:cNvPr id="4" name="Content Placeholder 3"/>
+          <p:cNvSpPr>
+            <a:spLocks noGrp="1"/>
+          </p:cNvSpPr>
+          <p:nvPr>
+            <p:ph idx="2" sz="half"/>
+          </p:nvPr>
+        </p:nvSpPr>
+        <p:spPr/>
+        <p:txBody>
+          <a:bodyPr/>
+          <a:lstStyle/>
+          <a:p>
+            <a:pPr lvl="0" indent="0" marL="1270000">
+              <a:buNone/>
+            </a:pPr>
+            <a:r>
+              <a:rPr sz="2000" b="1"/>
+              <a:t>Note</a:t>
+            </a:r>
+          </a:p>
+          <a:p>
+            <a:pPr lvl="0" indent="0" marL="1270000">
+              <a:buNone/>
+            </a:pPr>
+            <a:r>
+              <a:rPr sz="2000" b="1"/>
+              <a:t>✅ Key idea</a:t>
+            </a:r>
+          </a:p>
+          <a:p>
+            <a:pPr lvl="0" indent="0" marL="1270000">
+              <a:buNone/>
+            </a:pPr>
+            <a:r>
+              <a:rPr sz="2000">
+                <a:latin typeface="Courier"/>
+              </a:rPr>
+              <a:t>mutate()</a:t>
+            </a:r>
+            <a:r>
+              <a:rPr sz="2000"/>
+              <a:t> keeps every existing column and adds new ones to the right. To </a:t>
+            </a:r>
+            <a:r>
+              <a:rPr sz="2000" i="1"/>
+              <a:t>overwrite</a:t>
+            </a:r>
+            <a:r>
+              <a:rPr sz="2000"/>
+              <a:t> a column, reuse its name: </a:t>
+            </a:r>
+            <a:r>
+              <a:rPr sz="2000">
+                <a:latin typeface="Courier"/>
+              </a:rPr>
+              <a:t>mutate(length_mm = round(length_mm, 1))</a:t>
+            </a:r>
+            <a:r>
+              <a:rPr sz="2000"/>
+              <a:t>.</a:t>
+            </a:r>
+          </a:p>
+        </p:txBody>
+      </p:sp>
+    </p:spTree>
+  </p:cSld>
+</p:sld>
+</file>
+
+<file path=ppt/slides/slide14.xml><?xml version="1.0" encoding="utf-8"?>
+<p:sld xmlns:a="http://schemas.openxmlformats.org/drawingml/2006/main" xmlns:r="http://schemas.openxmlformats.org/officeDocument/2006/relationships" xmlns:p="http://schemas.openxmlformats.org/presentationml/2006/main">
+  <p:cSld>
+    <p:spTree>
+      <p:nvGrpSpPr>
+        <p:cNvPr id="1" name=""/>
+        <p:cNvGrpSpPr/>
+        <p:nvPr/>
+      </p:nvGrpSpPr>
+      <p:grpSpPr>
+        <a:xfrm>
+          <a:off x="0" y="0"/>
+          <a:ext cx="0" cy="0"/>
+          <a:chOff x="0" y="0"/>
+          <a:chExt cx="0" cy="0"/>
+        </a:xfrm>
+      </p:grpSpPr>
+      <p:sp>
+        <p:nvSpPr>
+          <p:cNvPr id="2" name="Title 1"/>
+          <p:cNvSpPr>
+            <a:spLocks noGrp="1"/>
+          </p:cNvSpPr>
+          <p:nvPr>
+            <p:ph type="title"/>
+          </p:nvPr>
+        </p:nvSpPr>
+        <p:spPr>
+          <a:xfrm>
+            <a:off x="0" y="0"/>
+            <a:ext cx="9144000" cy="602780"/>
+          </a:xfrm>
+          <a:solidFill>
+            <a:srgbClr val="70121D"/>
+          </a:solidFill>
+        </p:spPr>
+        <p:txBody>
+          <a:bodyPr/>
+          <a:lstStyle/>
+          <a:p>
+            <a:pPr lvl="0" indent="0" marL="0">
+              <a:buNone/>
+            </a:pPr>
+            <a:r>
+              <a:rPr>
+                <a:latin typeface="Courier"/>
+              </a:rPr>
+              <a:t>mutate()</a:t>
+            </a:r>
+            <a:r>
+              <a:rPr/>
+              <a:t> — More Examples</a:t>
+            </a:r>
+          </a:p>
+        </p:txBody>
+      </p:sp>
+      <p:sp>
+        <p:nvSpPr>
+          <p:cNvPr id="3" name="Content Placeholder 2"/>
+          <p:cNvSpPr>
+            <a:spLocks noGrp="1"/>
+          </p:cNvSpPr>
+          <p:nvPr>
+            <p:ph idx="1" sz="half"/>
+          </p:nvPr>
+        </p:nvSpPr>
+        <p:spPr/>
+        <p:txBody>
+          <a:bodyPr/>
+          <a:lstStyle/>
+          <a:p>
+            <a:pPr lvl="0" indent="0">
+              <a:buNone/>
+            </a:pPr>
+            <a:r>
+              <a:rPr>
+                <a:solidFill>
+                  <a:srgbClr val="5E5E5E"/>
+                </a:solidFill>
+                <a:latin typeface="Courier"/>
+              </a:rPr>
+              <a:t># Add a log-transformed column</a:t>
+            </a:r>
+            <a:br/>
+            <a:r>
+              <a:rPr>
+                <a:solidFill>
+                  <a:srgbClr val="003B4F"/>
+                </a:solidFill>
+                <a:latin typeface="Courier"/>
+              </a:rPr>
+              <a:t>pine_csv_df </a:t>
+            </a:r>
+            <a:r>
+              <a:rPr>
+                <a:solidFill>
+                  <a:srgbClr val="5E5E5E"/>
+                </a:solidFill>
+                <a:latin typeface="Courier"/>
+              </a:rPr>
+              <a:t>|&gt;</a:t>
+            </a:r>
+            <a:br/>
+            <a:r>
+              <a:rPr>
+                <a:solidFill>
+                  <a:srgbClr val="003B4F"/>
+                </a:solidFill>
+                <a:latin typeface="Courier"/>
+              </a:rPr>
+              <a:t>  </a:t>
+            </a:r>
+            <a:r>
+              <a:rPr>
+                <a:solidFill>
+                  <a:srgbClr val="4758AB"/>
+                </a:solidFill>
+                <a:latin typeface="Courier"/>
+              </a:rPr>
+              <a:t>mutate</a:t>
+            </a:r>
+            <a:r>
+              <a:rPr>
+                <a:solidFill>
+                  <a:srgbClr val="003B4F"/>
+                </a:solidFill>
+                <a:latin typeface="Courier"/>
+              </a:rPr>
+              <a:t>(</a:t>
+            </a:r>
+            <a:r>
+              <a:rPr>
+                <a:solidFill>
+                  <a:srgbClr val="657422"/>
+                </a:solidFill>
+                <a:latin typeface="Courier"/>
+              </a:rPr>
+              <a:t>log_length =</a:t>
+            </a:r>
+            <a:r>
+              <a:rPr>
+                <a:solidFill>
+                  <a:srgbClr val="003B4F"/>
+                </a:solidFill>
+                <a:latin typeface="Courier"/>
+              </a:rPr>
+              <a:t> </a:t>
+            </a:r>
+            <a:r>
+              <a:rPr>
+                <a:solidFill>
+                  <a:srgbClr val="4758AB"/>
+                </a:solidFill>
+                <a:latin typeface="Courier"/>
+              </a:rPr>
+              <a:t>log</a:t>
+            </a:r>
+            <a:r>
+              <a:rPr>
+                <a:solidFill>
+                  <a:srgbClr val="003B4F"/>
+                </a:solidFill>
+                <a:latin typeface="Courier"/>
+              </a:rPr>
+              <a:t>(length_mm)) </a:t>
+            </a:r>
+            <a:r>
+              <a:rPr>
+                <a:solidFill>
+                  <a:srgbClr val="5E5E5E"/>
+                </a:solidFill>
+                <a:latin typeface="Courier"/>
+              </a:rPr>
+              <a:t>|&gt;</a:t>
+            </a:r>
+            <a:br/>
+            <a:r>
+              <a:rPr>
+                <a:solidFill>
+                  <a:srgbClr val="003B4F"/>
+                </a:solidFill>
+                <a:latin typeface="Courier"/>
+              </a:rPr>
+              <a:t>  </a:t>
+            </a:r>
+            <a:r>
+              <a:rPr>
+                <a:solidFill>
+                  <a:srgbClr val="4758AB"/>
+                </a:solidFill>
+                <a:latin typeface="Courier"/>
+              </a:rPr>
+              <a:t>head</a:t>
+            </a:r>
+            <a:r>
+              <a:rPr>
+                <a:solidFill>
+                  <a:srgbClr val="003B4F"/>
+                </a:solidFill>
+                <a:latin typeface="Courier"/>
+              </a:rPr>
+              <a:t>()</a:t>
+            </a:r>
+          </a:p>
+          <a:p>
+            <a:pPr lvl="0" indent="0">
+              <a:buNone/>
+            </a:pPr>
+            <a:r>
+              <a:rPr>
+                <a:latin typeface="Courier"/>
+              </a:rPr>
+              <a:t># A tibble: 6 × 7
+  date    group       n_s   wind  tree_no length_mm log_length
+  &lt;chr&gt;   &lt;chr&gt;       &lt;chr&gt; &lt;chr&gt;   &lt;dbl&gt;     &lt;dbl&gt;      &lt;dbl&gt;
+1 3/20/25 cephalopods n     lee         1        20       3.00
+2 3/20/25 cephalopods n     lee         1        21       3.04
+3 3/20/25 cephalopods n     lee         1        23       3.14
+4 3/20/25 cephalopods n     lee         1        25       3.22
+5 3/20/25 cephalopods n     lee         1        21       3.04
+6 3/20/25 cephalopods n     lee         1        16       2.77</a:t>
+            </a:r>
+          </a:p>
+          <a:p>
+            <a:pPr lvl="0" indent="0">
+              <a:buNone/>
+            </a:pPr>
+            <a:r>
+              <a:rPr>
+                <a:solidFill>
+                  <a:srgbClr val="5E5E5E"/>
+                </a:solidFill>
+                <a:latin typeface="Courier"/>
+              </a:rPr>
+              <a:t># mutate() can build on a column it just created</a:t>
+            </a:r>
+            <a:br/>
+            <a:r>
+              <a:rPr>
+                <a:solidFill>
+                  <a:srgbClr val="003B4F"/>
+                </a:solidFill>
+                <a:latin typeface="Courier"/>
+              </a:rPr>
+              <a:t>pine_csv_df </a:t>
+            </a:r>
+            <a:r>
+              <a:rPr>
+                <a:solidFill>
+                  <a:srgbClr val="5E5E5E"/>
+                </a:solidFill>
+                <a:latin typeface="Courier"/>
+              </a:rPr>
+              <a:t>|&gt;</a:t>
+            </a:r>
+            <a:br/>
+            <a:r>
+              <a:rPr>
+                <a:solidFill>
+                  <a:srgbClr val="003B4F"/>
+                </a:solidFill>
+                <a:latin typeface="Courier"/>
+              </a:rPr>
+              <a:t>  </a:t>
+            </a:r>
+            <a:r>
+              <a:rPr>
+                <a:solidFill>
+                  <a:srgbClr val="4758AB"/>
+                </a:solidFill>
+                <a:latin typeface="Courier"/>
+              </a:rPr>
+              <a:t>mutate</a:t>
+            </a:r>
+            <a:r>
+              <a:rPr>
+                <a:solidFill>
+                  <a:srgbClr val="003B4F"/>
+                </a:solidFill>
+                <a:latin typeface="Courier"/>
+              </a:rPr>
+              <a:t>(</a:t>
+            </a:r>
+            <a:br/>
+            <a:r>
+              <a:rPr>
+                <a:solidFill>
+                  <a:srgbClr val="003B4F"/>
+                </a:solidFill>
+                <a:latin typeface="Courier"/>
+              </a:rPr>
+              <a:t>    </a:t>
+            </a:r>
+            <a:r>
+              <a:rPr>
+                <a:solidFill>
+                  <a:srgbClr val="657422"/>
+                </a:solidFill>
+                <a:latin typeface="Courier"/>
+              </a:rPr>
+              <a:t>length_cm  =</a:t>
+            </a:r>
+            <a:r>
+              <a:rPr>
+                <a:solidFill>
+                  <a:srgbClr val="003B4F"/>
+                </a:solidFill>
+                <a:latin typeface="Courier"/>
+              </a:rPr>
+              <a:t> length_mm </a:t>
+            </a:r>
+            <a:r>
+              <a:rPr>
+                <a:solidFill>
+                  <a:srgbClr val="5E5E5E"/>
+                </a:solidFill>
+                <a:latin typeface="Courier"/>
+              </a:rPr>
+              <a:t>/</a:t>
+            </a:r>
+            <a:r>
+              <a:rPr>
+                <a:solidFill>
+                  <a:srgbClr val="003B4F"/>
+                </a:solidFill>
+                <a:latin typeface="Courier"/>
+              </a:rPr>
+              <a:t> </a:t>
+            </a:r>
+            <a:r>
+              <a:rPr>
+                <a:solidFill>
+                  <a:srgbClr val="AD0000"/>
+                </a:solidFill>
+                <a:latin typeface="Courier"/>
+              </a:rPr>
+              <a:t>10</a:t>
+            </a:r>
+            <a:r>
+              <a:rPr>
+                <a:solidFill>
+                  <a:srgbClr val="003B4F"/>
+                </a:solidFill>
+                <a:latin typeface="Courier"/>
+              </a:rPr>
+              <a:t>,</a:t>
+            </a:r>
+            <a:br/>
+            <a:r>
+              <a:rPr>
+                <a:solidFill>
+                  <a:srgbClr val="003B4F"/>
+                </a:solidFill>
+                <a:latin typeface="Courier"/>
+              </a:rPr>
+              <a:t>    </a:t>
+            </a:r>
+            <a:r>
+              <a:rPr>
+                <a:solidFill>
+                  <a:srgbClr val="657422"/>
+                </a:solidFill>
+                <a:latin typeface="Courier"/>
+              </a:rPr>
+              <a:t>size_class =</a:t>
+            </a:r>
+            <a:r>
+              <a:rPr>
+                <a:solidFill>
+                  <a:srgbClr val="003B4F"/>
+                </a:solidFill>
+                <a:latin typeface="Courier"/>
+              </a:rPr>
+              <a:t> </a:t>
+            </a:r>
+            <a:r>
+              <a:rPr>
+                <a:solidFill>
+                  <a:srgbClr val="4758AB"/>
+                </a:solidFill>
+                <a:latin typeface="Courier"/>
+              </a:rPr>
+              <a:t>if_else</a:t>
+            </a:r>
+            <a:r>
+              <a:rPr>
+                <a:solidFill>
+                  <a:srgbClr val="003B4F"/>
+                </a:solidFill>
+                <a:latin typeface="Courier"/>
+              </a:rPr>
+              <a:t>(length_mm </a:t>
+            </a:r>
+            <a:r>
+              <a:rPr>
+                <a:solidFill>
+                  <a:srgbClr val="5E5E5E"/>
+                </a:solidFill>
+                <a:latin typeface="Courier"/>
+              </a:rPr>
+              <a:t>&gt;</a:t>
+            </a:r>
+            <a:r>
+              <a:rPr>
+                <a:solidFill>
+                  <a:srgbClr val="003B4F"/>
+                </a:solidFill>
+                <a:latin typeface="Courier"/>
+              </a:rPr>
+              <a:t> </a:t>
+            </a:r>
+            <a:r>
+              <a:rPr>
+                <a:solidFill>
+                  <a:srgbClr val="AD0000"/>
+                </a:solidFill>
+                <a:latin typeface="Courier"/>
+              </a:rPr>
+              <a:t>18</a:t>
+            </a:r>
+            <a:r>
+              <a:rPr>
+                <a:solidFill>
+                  <a:srgbClr val="003B4F"/>
+                </a:solidFill>
+                <a:latin typeface="Courier"/>
+              </a:rPr>
+              <a:t>, </a:t>
+            </a:r>
+            <a:r>
+              <a:rPr>
+                <a:solidFill>
+                  <a:srgbClr val="20794D"/>
+                </a:solidFill>
+                <a:latin typeface="Courier"/>
+              </a:rPr>
+              <a:t>"long"</a:t>
+            </a:r>
+            <a:r>
+              <a:rPr>
+                <a:solidFill>
+                  <a:srgbClr val="003B4F"/>
+                </a:solidFill>
+                <a:latin typeface="Courier"/>
+              </a:rPr>
+              <a:t>, </a:t>
+            </a:r>
+            <a:r>
+              <a:rPr>
+                <a:solidFill>
+                  <a:srgbClr val="20794D"/>
+                </a:solidFill>
+                <a:latin typeface="Courier"/>
+              </a:rPr>
+              <a:t>"short"</a:t>
+            </a:r>
+            <a:r>
+              <a:rPr>
+                <a:solidFill>
+                  <a:srgbClr val="003B4F"/>
+                </a:solidFill>
+                <a:latin typeface="Courier"/>
+              </a:rPr>
+              <a:t>)</a:t>
+            </a:r>
+            <a:br/>
+            <a:r>
+              <a:rPr>
+                <a:solidFill>
+                  <a:srgbClr val="003B4F"/>
+                </a:solidFill>
+                <a:latin typeface="Courier"/>
+              </a:rPr>
+              <a:t>  ) </a:t>
+            </a:r>
+            <a:r>
+              <a:rPr>
+                <a:solidFill>
+                  <a:srgbClr val="5E5E5E"/>
+                </a:solidFill>
+                <a:latin typeface="Courier"/>
+              </a:rPr>
+              <a:t>|&gt;</a:t>
+            </a:r>
+            <a:br/>
+            <a:r>
+              <a:rPr>
+                <a:solidFill>
+                  <a:srgbClr val="003B4F"/>
+                </a:solidFill>
+                <a:latin typeface="Courier"/>
+              </a:rPr>
+              <a:t>  </a:t>
+            </a:r>
+            <a:r>
+              <a:rPr>
+                <a:solidFill>
+                  <a:srgbClr val="4758AB"/>
+                </a:solidFill>
+                <a:latin typeface="Courier"/>
+              </a:rPr>
+              <a:t>head</a:t>
+            </a:r>
+            <a:r>
+              <a:rPr>
+                <a:solidFill>
+                  <a:srgbClr val="003B4F"/>
+                </a:solidFill>
+                <a:latin typeface="Courier"/>
+              </a:rPr>
+              <a:t>()</a:t>
+            </a:r>
+          </a:p>
+          <a:p>
+            <a:pPr lvl="0" indent="0">
+              <a:buNone/>
+            </a:pPr>
+            <a:r>
+              <a:rPr>
+                <a:latin typeface="Courier"/>
+              </a:rPr>
+              <a:t># A tibble: 6 × 8
+  date    group       n_s   wind  tree_no length_mm length_cm size_class
+  &lt;chr&gt;   &lt;chr&gt;       &lt;chr&gt; &lt;chr&gt;   &lt;dbl&gt;     &lt;dbl&gt;     &lt;dbl&gt; &lt;chr&gt;     
+1 3/20/25 cephalopods n     lee         1        20       2   long      
+2 3/20/25 cephalopods n     lee         1        21       2.1 long      
+3 3/20/25 cephalopods n     lee         1        23       2.3 long      
+4 3/20/25 cephalopods n     lee         1        25       2.5 long      
+5 3/20/25 cephalopods n     lee         1        21       2.1 long      
+6 3/20/25 cephalopods n     lee         1        16       1.6 short     </a:t>
+            </a:r>
+          </a:p>
+        </p:txBody>
+      </p:sp>
+      <p:sp>
+        <p:nvSpPr>
+          <p:cNvPr id="4" name="Content Placeholder 3"/>
+          <p:cNvSpPr>
+            <a:spLocks noGrp="1"/>
+          </p:cNvSpPr>
+          <p:nvPr>
+            <p:ph idx="2" sz="half"/>
+          </p:nvPr>
+        </p:nvSpPr>
+        <p:spPr/>
+        <p:txBody>
+          <a:bodyPr/>
+          <a:lstStyle/>
+          <a:p>
+            <a:pPr lvl="0" indent="0" marL="1270000">
+              <a:buNone/>
+            </a:pPr>
+            <a:r>
+              <a:rPr sz="2000" b="1"/>
+              <a:t>Tip</a:t>
+            </a:r>
+          </a:p>
+          <a:p>
+            <a:pPr lvl="0" indent="0" marL="1270000">
+              <a:buNone/>
+            </a:pPr>
+            <a:r>
+              <a:rPr sz="2000" b="1"/>
+              <a:t>📖 Why log-transform?</a:t>
+            </a:r>
+          </a:p>
+          <a:p>
+            <a:pPr lvl="0" indent="0" marL="1270000">
+              <a:buNone/>
+            </a:pPr>
+            <a:r>
+              <a:rPr sz="2000"/>
+              <a:t>Many biological measurements are </a:t>
+            </a:r>
+            <a:r>
+              <a:rPr sz="2000" b="1"/>
+              <a:t>right-skewed</a:t>
+            </a:r>
+            <a:r>
+              <a:rPr sz="2000"/>
+              <a:t> — a log transform pulls extreme values in and can make a distribution more symmetric before you summarize or test it. We’ll check whether it matters for our data in a later module.</a:t>
+            </a:r>
+          </a:p>
+        </p:txBody>
+      </p:sp>
+    </p:spTree>
+  </p:cSld>
+</p:sld>
+</file>
+
+<file path=ppt/slides/slide15.xml><?xml version="1.0" encoding="utf-8"?>
+<p:sld xmlns:a="http://schemas.openxmlformats.org/drawingml/2006/main" xmlns:r="http://schemas.openxmlformats.org/officeDocument/2006/relationships" xmlns:p="http://schemas.openxmlformats.org/presentationml/2006/main">
+  <p:cSld>
+    <p:spTree>
+      <p:nvGrpSpPr>
+        <p:cNvPr id="1" name=""/>
+        <p:cNvGrpSpPr/>
+        <p:nvPr/>
+      </p:nvGrpSpPr>
+      <p:grpSpPr>
+        <a:xfrm>
+          <a:off x="0" y="0"/>
+          <a:ext cx="0" cy="0"/>
+          <a:chOff x="0" y="0"/>
+          <a:chExt cx="0" cy="0"/>
+        </a:xfrm>
+      </p:grpSpPr>
+      <p:sp>
+        <p:nvSpPr>
+          <p:cNvPr id="2" name="Title 1"/>
+          <p:cNvSpPr>
+            <a:spLocks noGrp="1"/>
+          </p:cNvSpPr>
+          <p:nvPr>
+            <p:ph type="title"/>
+          </p:nvPr>
+        </p:nvSpPr>
+        <p:spPr>
+          <a:xfrm>
+            <a:off x="0" y="0"/>
             <a:ext cx="9144000" cy="602780"/>
           </a:xfrm>
           <a:solidFill>
@@ -4531,6 +5321,127 @@
 # ℹ 38 more rows</a:t>
             </a:r>
           </a:p>
+        </p:txBody>
+      </p:sp>
+      <p:sp>
+        <p:nvSpPr>
+          <p:cNvPr id="4" name="Content Placeholder 3"/>
+          <p:cNvSpPr>
+            <a:spLocks noGrp="1"/>
+          </p:cNvSpPr>
+          <p:nvPr>
+            <p:ph idx="2" sz="half"/>
+          </p:nvPr>
+        </p:nvSpPr>
+        <p:spPr/>
+        <p:txBody>
+          <a:bodyPr/>
+          <a:lstStyle/>
+          <a:p>
+            <a:pPr lvl="0"/>
+            <a:r>
+              <a:rPr/>
+              <a:t>Default is </a:t>
+            </a:r>
+            <a:r>
+              <a:rPr b="1"/>
+              <a:t>ascending</a:t>
+            </a:r>
+            <a:r>
+              <a:rPr/>
+              <a:t> (smallest first)</a:t>
+            </a:r>
+          </a:p>
+          <a:p>
+            <a:pPr lvl="0"/>
+            <a:r>
+              <a:rPr>
+                <a:latin typeface="Courier"/>
+              </a:rPr>
+              <a:t>desc()</a:t>
+            </a:r>
+            <a:r>
+              <a:rPr/>
+              <a:t> reverses it</a:t>
+            </a:r>
+          </a:p>
+        </p:txBody>
+      </p:sp>
+    </p:spTree>
+  </p:cSld>
+</p:sld>
+</file>
+
+<file path=ppt/slides/slide16.xml><?xml version="1.0" encoding="utf-8"?>
+<p:sld xmlns:a="http://schemas.openxmlformats.org/drawingml/2006/main" xmlns:r="http://schemas.openxmlformats.org/officeDocument/2006/relationships" xmlns:p="http://schemas.openxmlformats.org/presentationml/2006/main">
+  <p:cSld>
+    <p:spTree>
+      <p:nvGrpSpPr>
+        <p:cNvPr id="1" name=""/>
+        <p:cNvGrpSpPr/>
+        <p:nvPr/>
+      </p:nvGrpSpPr>
+      <p:grpSpPr>
+        <a:xfrm>
+          <a:off x="0" y="0"/>
+          <a:ext cx="0" cy="0"/>
+          <a:chOff x="0" y="0"/>
+          <a:chExt cx="0" cy="0"/>
+        </a:xfrm>
+      </p:grpSpPr>
+      <p:sp>
+        <p:nvSpPr>
+          <p:cNvPr id="2" name="Title 1"/>
+          <p:cNvSpPr>
+            <a:spLocks noGrp="1"/>
+          </p:cNvSpPr>
+          <p:nvPr>
+            <p:ph type="title"/>
+          </p:nvPr>
+        </p:nvSpPr>
+        <p:spPr>
+          <a:xfrm>
+            <a:off x="0" y="0"/>
+            <a:ext cx="9144000" cy="602780"/>
+          </a:xfrm>
+          <a:solidFill>
+            <a:srgbClr val="70121D"/>
+          </a:solidFill>
+        </p:spPr>
+        <p:txBody>
+          <a:bodyPr/>
+          <a:lstStyle/>
+          <a:p>
+            <a:pPr lvl="0" indent="0" marL="0">
+              <a:buNone/>
+            </a:pPr>
+            <a:r>
+              <a:rPr>
+                <a:latin typeface="Courier"/>
+              </a:rPr>
+              <a:t>arrange()</a:t>
+            </a:r>
+            <a:r>
+              <a:rPr/>
+              <a:t> — Sorting by Multiple Columns</a:t>
+            </a:r>
+          </a:p>
+        </p:txBody>
+      </p:sp>
+      <p:sp>
+        <p:nvSpPr>
+          <p:cNvPr id="3" name="Content Placeholder 2"/>
+          <p:cNvSpPr>
+            <a:spLocks noGrp="1"/>
+          </p:cNvSpPr>
+          <p:nvPr>
+            <p:ph idx="1" sz="half"/>
+          </p:nvPr>
+        </p:nvSpPr>
+        <p:spPr/>
+        <p:txBody>
+          <a:bodyPr/>
+          <a:lstStyle/>
           <a:p>
             <a:pPr lvl="0" indent="0">
               <a:buNone/>
@@ -4653,34 +5564,6 @@
             <a:pPr lvl="0"/>
             <a:r>
               <a:rPr/>
-              <a:t>Default is </a:t>
-            </a:r>
-            <a:r>
-              <a:rPr b="1"/>
-              <a:t>ascending</a:t>
-            </a:r>
-            <a:r>
-              <a:rPr/>
-              <a:t> (smallest first)</a:t>
-            </a:r>
-          </a:p>
-          <a:p>
-            <a:pPr lvl="0"/>
-            <a:r>
-              <a:rPr>
-                <a:latin typeface="Courier"/>
-              </a:rPr>
-              <a:t>desc()</a:t>
-            </a:r>
-            <a:r>
-              <a:rPr/>
-              <a:t> reverses it</a:t>
-            </a:r>
-          </a:p>
-          <a:p>
-            <a:pPr lvl="0"/>
-            <a:r>
-              <a:rPr/>
               <a:t>Most useful at the </a:t>
             </a:r>
             <a:r>
@@ -4731,7 +5614,7 @@
 </p:sld>
 </file>
 
-<file path=ppt/slides/slide13.xml><?xml version="1.0" encoding="utf-8"?>
+<file path=ppt/slides/slide17.xml><?xml version="1.0" encoding="utf-8"?>
 <p:sld xmlns:a="http://schemas.openxmlformats.org/drawingml/2006/main" xmlns:r="http://schemas.openxmlformats.org/officeDocument/2006/relationships" xmlns:p="http://schemas.openxmlformats.org/presentationml/2006/main">
   <p:cSld>
     <p:spTree>
@@ -5623,857 +6506,6 @@
 </p:sld>
 </file>
 
-<file path=ppt/slides/slide14.xml><?xml version="1.0" encoding="utf-8"?>
-<p:sld xmlns:a="http://schemas.openxmlformats.org/drawingml/2006/main" xmlns:r="http://schemas.openxmlformats.org/officeDocument/2006/relationships" xmlns:p="http://schemas.openxmlformats.org/presentationml/2006/main">
-  <p:cSld>
-    <p:spTree>
-      <p:nvGrpSpPr>
-        <p:cNvPr id="1" name=""/>
-        <p:cNvGrpSpPr/>
-        <p:nvPr/>
-      </p:nvGrpSpPr>
-      <p:grpSpPr>
-        <a:xfrm>
-          <a:off x="0" y="0"/>
-          <a:ext cx="0" cy="0"/>
-          <a:chOff x="0" y="0"/>
-          <a:chExt cx="0" cy="0"/>
-        </a:xfrm>
-      </p:grpSpPr>
-      <p:sp>
-        <p:nvSpPr>
-          <p:cNvPr id="2" name="Title 1"/>
-          <p:cNvSpPr>
-            <a:spLocks noGrp="1"/>
-          </p:cNvSpPr>
-          <p:nvPr>
-            <p:ph type="title"/>
-          </p:nvPr>
-        </p:nvSpPr>
-        <p:spPr>
-          <a:xfrm>
-            <a:off x="0" y="0"/>
-            <a:ext cx="9144000" cy="602780"/>
-          </a:xfrm>
-          <a:solidFill>
-            <a:srgbClr val="70121D"/>
-          </a:solidFill>
-        </p:spPr>
-        <p:txBody>
-          <a:bodyPr/>
-          <a:lstStyle/>
-          <a:p>
-            <a:pPr lvl="0" indent="0" marL="0">
-              <a:buNone/>
-            </a:pPr>
-            <a:r>
-              <a:rPr/>
-              <a:t>Part 3 · A Duplicate-Row Problem</a:t>
-            </a:r>
-          </a:p>
-        </p:txBody>
-      </p:sp>
-      <p:sp>
-        <p:nvSpPr>
-          <p:cNvPr id="3" name="Content Placeholder 2"/>
-          <p:cNvSpPr>
-            <a:spLocks noGrp="1"/>
-          </p:cNvSpPr>
-          <p:nvPr>
-            <p:ph idx="1" sz="half"/>
-          </p:nvPr>
-        </p:nvSpPr>
-        <p:spPr/>
-        <p:txBody>
-          <a:bodyPr/>
-          <a:lstStyle/>
-          <a:p>
-            <a:pPr lvl="0" indent="0" marL="0">
-              <a:buNone/>
-            </a:pPr>
-            <a:r>
-              <a:rPr/>
-              <a:t>Remember </a:t>
-            </a:r>
-            <a:r>
-              <a:rPr b="1"/>
-              <a:t>pseudoreplication</a:t>
-            </a:r>
-            <a:r>
-              <a:rPr/>
-              <a:t> from Module 1 — one tree standing in for many? Duplicate rows are the data-entry version of the same mistake: the same measurement counted twice inflates your sample size without adding real information.</a:t>
-            </a:r>
-          </a:p>
-          <a:p>
-            <a:pPr lvl="0" indent="0">
-              <a:buNone/>
-            </a:pPr>
-            <a:r>
-              <a:rPr>
-                <a:solidFill>
-                  <a:srgbClr val="003B4F"/>
-                </a:solidFill>
-                <a:latin typeface="Courier"/>
-              </a:rPr>
-              <a:t>needle_check_df &lt;- </a:t>
-            </a:r>
-            <a:r>
-              <a:rPr>
-                <a:solidFill>
-                  <a:srgbClr val="4758AB"/>
-                </a:solidFill>
-                <a:latin typeface="Courier"/>
-              </a:rPr>
-              <a:t>read_csv</a:t>
-            </a:r>
-            <a:r>
-              <a:rPr>
-                <a:solidFill>
-                  <a:srgbClr val="003B4F"/>
-                </a:solidFill>
-                <a:latin typeface="Courier"/>
-              </a:rPr>
-              <a:t>(</a:t>
-            </a:r>
-            <a:r>
-              <a:rPr>
-                <a:solidFill>
-                  <a:srgbClr val="20794D"/>
-                </a:solidFill>
-                <a:latin typeface="Courier"/>
-              </a:rPr>
-              <a:t>"data/pine_needles_error.csv"</a:t>
-            </a:r>
-            <a:r>
-              <a:rPr>
-                <a:solidFill>
-                  <a:srgbClr val="003B4F"/>
-                </a:solidFill>
-                <a:latin typeface="Courier"/>
-              </a:rPr>
-              <a:t>)</a:t>
-            </a:r>
-            <a:br/>
-            <a:br/>
-            <a:r>
-              <a:rPr>
-                <a:solidFill>
-                  <a:srgbClr val="4758AB"/>
-                </a:solidFill>
-                <a:latin typeface="Courier"/>
-              </a:rPr>
-              <a:t>nrow</a:t>
-            </a:r>
-            <a:r>
-              <a:rPr>
-                <a:solidFill>
-                  <a:srgbClr val="003B4F"/>
-                </a:solidFill>
-                <a:latin typeface="Courier"/>
-              </a:rPr>
-              <a:t>(needle_check_df)</a:t>
-            </a:r>
-          </a:p>
-          <a:p>
-            <a:pPr lvl="0" indent="0">
-              <a:buNone/>
-            </a:pPr>
-            <a:r>
-              <a:rPr>
-                <a:latin typeface="Courier"/>
-              </a:rPr>
-              <a:t>[1] 36</a:t>
-            </a:r>
-          </a:p>
-          <a:p>
-            <a:pPr lvl="0" indent="0">
-              <a:buNone/>
-            </a:pPr>
-            <a:r>
-              <a:rPr>
-                <a:solidFill>
-                  <a:srgbClr val="4758AB"/>
-                </a:solidFill>
-                <a:latin typeface="Courier"/>
-              </a:rPr>
-              <a:t>n_distinct</a:t>
-            </a:r>
-            <a:r>
-              <a:rPr>
-                <a:solidFill>
-                  <a:srgbClr val="003B4F"/>
-                </a:solidFill>
-                <a:latin typeface="Courier"/>
-              </a:rPr>
-              <a:t>(needle_check_df)</a:t>
-            </a:r>
-          </a:p>
-          <a:p>
-            <a:pPr lvl="0" indent="0">
-              <a:buNone/>
-            </a:pPr>
-            <a:r>
-              <a:rPr>
-                <a:latin typeface="Courier"/>
-              </a:rPr>
-              <a:t>[1] 18</a:t>
-            </a:r>
-          </a:p>
-          <a:p>
-            <a:pPr lvl="0" indent="0" marL="1270000">
-              <a:buNone/>
-            </a:pPr>
-            <a:r>
-              <a:rPr sz="2000" b="1"/>
-              <a:t>Important</a:t>
-            </a:r>
-          </a:p>
-          <a:p>
-            <a:pPr lvl="0" indent="0" marL="1270000">
-              <a:buNone/>
-            </a:pPr>
-            <a:r>
-              <a:rPr sz="2000" b="1"/>
-              <a:t>Something’s wrong:</a:t>
-            </a:r>
-            <a:r>
-              <a:rPr sz="2000"/>
-              <a:t> </a:t>
-            </a:r>
-            <a:r>
-              <a:rPr sz="2000">
-                <a:latin typeface="Courier"/>
-              </a:rPr>
-              <a:t>nrow()</a:t>
-            </a:r>
-            <a:r>
-              <a:rPr sz="2000"/>
-              <a:t> and </a:t>
-            </a:r>
-            <a:r>
-              <a:rPr sz="2000">
-                <a:latin typeface="Courier"/>
-              </a:rPr>
-              <a:t>n_distinct()</a:t>
-            </a:r>
-            <a:r>
-              <a:rPr sz="2000"/>
-              <a:t> don’t match. Some rows are exact repeats.</a:t>
-            </a:r>
-          </a:p>
-        </p:txBody>
-      </p:sp>
-      <p:sp>
-        <p:nvSpPr>
-          <p:cNvPr id="4" name="Content Placeholder 3"/>
-          <p:cNvSpPr>
-            <a:spLocks noGrp="1"/>
-          </p:cNvSpPr>
-          <p:nvPr>
-            <p:ph idx="2" sz="half"/>
-          </p:nvPr>
-        </p:nvSpPr>
-        <p:spPr/>
-        <p:txBody>
-          <a:bodyPr/>
-          <a:lstStyle/>
-          <a:p>
-            <a:pPr lvl="0" indent="0" marL="1270000">
-              <a:buNone/>
-            </a:pPr>
-            <a:r>
-              <a:rPr sz="2000" b="1"/>
-              <a:t>Note</a:t>
-            </a:r>
-          </a:p>
-          <a:p>
-            <a:pPr lvl="0" indent="0" marL="1270000">
-              <a:buNone/>
-            </a:pPr>
-            <a:r>
-              <a:rPr sz="2000" b="1"/>
-              <a:t>📖 New words</a:t>
-            </a:r>
-          </a:p>
-          <a:p>
-            <a:pPr lvl="0"/>
-            <a:r>
-              <a:rPr sz="2000" b="1">
-                <a:latin typeface="Courier"/>
-              </a:rPr>
-              <a:t>n_distinct()</a:t>
-            </a:r>
-            <a:r>
-              <a:rPr sz="2000"/>
-              <a:t> — counts how many </a:t>
-            </a:r>
-            <a:r>
-              <a:rPr sz="2000" i="1"/>
-              <a:t>unique</a:t>
-            </a:r>
-            <a:r>
-              <a:rPr sz="2000"/>
-              <a:t> rows exist</a:t>
-            </a:r>
-          </a:p>
-          <a:p>
-            <a:pPr lvl="0"/>
-            <a:r>
-              <a:rPr sz="2000" b="1">
-                <a:latin typeface="Courier"/>
-              </a:rPr>
-              <a:t>distinct()</a:t>
-            </a:r>
-            <a:r>
-              <a:rPr sz="2000"/>
-              <a:t> — returns the data with duplicate rows removed</a:t>
-            </a:r>
-          </a:p>
-        </p:txBody>
-      </p:sp>
-    </p:spTree>
-  </p:cSld>
-</p:sld>
-</file>
-
-<file path=ppt/slides/slide15.xml><?xml version="1.0" encoding="utf-8"?>
-<p:sld xmlns:a="http://schemas.openxmlformats.org/drawingml/2006/main" xmlns:r="http://schemas.openxmlformats.org/officeDocument/2006/relationships" xmlns:p="http://schemas.openxmlformats.org/presentationml/2006/main">
-  <p:cSld>
-    <p:spTree>
-      <p:nvGrpSpPr>
-        <p:cNvPr id="1" name=""/>
-        <p:cNvGrpSpPr/>
-        <p:nvPr/>
-      </p:nvGrpSpPr>
-      <p:grpSpPr>
-        <a:xfrm>
-          <a:off x="0" y="0"/>
-          <a:ext cx="0" cy="0"/>
-          <a:chOff x="0" y="0"/>
-          <a:chExt cx="0" cy="0"/>
-        </a:xfrm>
-      </p:grpSpPr>
-      <p:sp>
-        <p:nvSpPr>
-          <p:cNvPr id="3" name="Content Placeholder 2"/>
-          <p:cNvSpPr>
-            <a:spLocks noGrp="1"/>
-          </p:cNvSpPr>
-          <p:nvPr>
-            <p:ph idx="1"/>
-          </p:nvPr>
-        </p:nvSpPr>
-        <p:spPr/>
-        <p:txBody>
-          <a:bodyPr/>
-          <a:lstStyle/>
-          <a:p>
-            <a:pPr lvl="0" indent="0" marL="0">
-              <a:spcBef>
-                <a:spcPts val="3000"/>
-              </a:spcBef>
-              <a:buNone/>
-            </a:pPr>
-            <a:r>
-              <a:rPr b="1"/>
-              <a:t>Finding and removing the duplicates</a:t>
-            </a:r>
-          </a:p>
-        </p:txBody>
-      </p:sp>
-    </p:spTree>
-  </p:cSld>
-</p:sld>
-</file>
-
-<file path=ppt/slides/slide16.xml><?xml version="1.0" encoding="utf-8"?>
-<p:sld xmlns:a="http://schemas.openxmlformats.org/drawingml/2006/main" xmlns:r="http://schemas.openxmlformats.org/officeDocument/2006/relationships" xmlns:p="http://schemas.openxmlformats.org/presentationml/2006/main">
-  <p:cSld>
-    <p:spTree>
-      <p:nvGrpSpPr>
-        <p:cNvPr id="1" name=""/>
-        <p:cNvGrpSpPr/>
-        <p:nvPr/>
-      </p:nvGrpSpPr>
-      <p:grpSpPr>
-        <a:xfrm>
-          <a:off x="0" y="0"/>
-          <a:ext cx="0" cy="0"/>
-          <a:chOff x="0" y="0"/>
-          <a:chExt cx="0" cy="0"/>
-        </a:xfrm>
-      </p:grpSpPr>
-      <p:sp>
-        <p:nvSpPr>
-          <p:cNvPr id="3" name="Content Placeholder 2"/>
-          <p:cNvSpPr>
-            <a:spLocks noGrp="1"/>
-          </p:cNvSpPr>
-          <p:nvPr>
-            <p:ph idx="1" sz="half"/>
-          </p:nvPr>
-        </p:nvSpPr>
-        <p:spPr/>
-        <p:txBody>
-          <a:bodyPr/>
-          <a:lstStyle/>
-          <a:p>
-            <a:pPr lvl="0" indent="0">
-              <a:buNone/>
-            </a:pPr>
-            <a:r>
-              <a:rPr>
-                <a:solidFill>
-                  <a:srgbClr val="5E5E5E"/>
-                </a:solidFill>
-                <a:latin typeface="Courier"/>
-              </a:rPr>
-              <a:t># Which rows are exact duplicates of an earlier row?</a:t>
-            </a:r>
-            <a:br/>
-            <a:r>
-              <a:rPr>
-                <a:solidFill>
-                  <a:srgbClr val="003B4F"/>
-                </a:solidFill>
-                <a:latin typeface="Courier"/>
-              </a:rPr>
-              <a:t>needle_check_df </a:t>
-            </a:r>
-            <a:r>
-              <a:rPr>
-                <a:solidFill>
-                  <a:srgbClr val="5E5E5E"/>
-                </a:solidFill>
-                <a:latin typeface="Courier"/>
-              </a:rPr>
-              <a:t>|&gt;</a:t>
-            </a:r>
-            <a:r>
-              <a:rPr>
-                <a:solidFill>
-                  <a:srgbClr val="003B4F"/>
-                </a:solidFill>
-                <a:latin typeface="Courier"/>
-              </a:rPr>
-              <a:t> </a:t>
-            </a:r>
-            <a:r>
-              <a:rPr>
-                <a:solidFill>
-                  <a:srgbClr val="4758AB"/>
-                </a:solidFill>
-                <a:latin typeface="Courier"/>
-              </a:rPr>
-              <a:t>filter</a:t>
-            </a:r>
-            <a:r>
-              <a:rPr>
-                <a:solidFill>
-                  <a:srgbClr val="003B4F"/>
-                </a:solidFill>
-                <a:latin typeface="Courier"/>
-              </a:rPr>
-              <a:t>(</a:t>
-            </a:r>
-            <a:r>
-              <a:rPr>
-                <a:solidFill>
-                  <a:srgbClr val="4758AB"/>
-                </a:solidFill>
-                <a:latin typeface="Courier"/>
-              </a:rPr>
-              <a:t>duplicated</a:t>
-            </a:r>
-            <a:r>
-              <a:rPr>
-                <a:solidFill>
-                  <a:srgbClr val="003B4F"/>
-                </a:solidFill>
-                <a:latin typeface="Courier"/>
-              </a:rPr>
-              <a:t>(needle_check_df))</a:t>
-            </a:r>
-          </a:p>
-          <a:p>
-            <a:pPr lvl="0" indent="0">
-              <a:buNone/>
-            </a:pPr>
-            <a:r>
-              <a:rPr>
-                <a:latin typeface="Courier"/>
-              </a:rPr>
-              <a:t># A tibble: 18 × 5
-   name  species needle_id needle_name length_mm
-   &lt;chr&gt; &lt;chr&gt;       &lt;dbl&gt; &lt;chr&gt;           &lt;dbl&gt;
- 1 John  a               1 one              21.1
- 2 John  a               2 two              21.2
- 3 John  a               3 three            21.5
- 4 Mary  a               1 one              21  
- 5 Mary  a               2 two              21.1
- 6 Mary  a               3 three            21.3
- 7 Steve a               1 one              21.4
- 8 Steve a               2 two              21.3
- 9 Steve a               3 three            21.9
-10 Harry a               1 one              24.1
-11 Harry a               2 two              24.2
-12 Harry a               3 three            24.3
-13 Stan  a               1 one              22.1
-14 Stan  a               2 two              22.2
-15 Stan  a               3 three            22.4
-16 Jake  a               1 one              20.3
-17 Jake  a               2 two              20.4
-18 Jake  a               3 three            20.1</a:t>
-            </a:r>
-          </a:p>
-          <a:p>
-            <a:pPr lvl="0" indent="0">
-              <a:buNone/>
-            </a:pPr>
-            <a:r>
-              <a:rPr>
-                <a:solidFill>
-                  <a:srgbClr val="5E5E5E"/>
-                </a:solidFill>
-                <a:latin typeface="Courier"/>
-              </a:rPr>
-              <a:t># Keep only one copy of each unique row</a:t>
-            </a:r>
-            <a:br/>
-            <a:r>
-              <a:rPr>
-                <a:solidFill>
-                  <a:srgbClr val="003B4F"/>
-                </a:solidFill>
-                <a:latin typeface="Courier"/>
-              </a:rPr>
-              <a:t>needle_clean_df &lt;- needle_check_df </a:t>
-            </a:r>
-            <a:r>
-              <a:rPr>
-                <a:solidFill>
-                  <a:srgbClr val="5E5E5E"/>
-                </a:solidFill>
-                <a:latin typeface="Courier"/>
-              </a:rPr>
-              <a:t>|&gt;</a:t>
-            </a:r>
-            <a:r>
-              <a:rPr>
-                <a:solidFill>
-                  <a:srgbClr val="003B4F"/>
-                </a:solidFill>
-                <a:latin typeface="Courier"/>
-              </a:rPr>
-              <a:t> </a:t>
-            </a:r>
-            <a:r>
-              <a:rPr>
-                <a:solidFill>
-                  <a:srgbClr val="4758AB"/>
-                </a:solidFill>
-                <a:latin typeface="Courier"/>
-              </a:rPr>
-              <a:t>distinct</a:t>
-            </a:r>
-            <a:r>
-              <a:rPr>
-                <a:solidFill>
-                  <a:srgbClr val="003B4F"/>
-                </a:solidFill>
-                <a:latin typeface="Courier"/>
-              </a:rPr>
-              <a:t>()</a:t>
-            </a:r>
-            <a:br/>
-            <a:br/>
-            <a:r>
-              <a:rPr>
-                <a:solidFill>
-                  <a:srgbClr val="4758AB"/>
-                </a:solidFill>
-                <a:latin typeface="Courier"/>
-              </a:rPr>
-              <a:t>nrow</a:t>
-            </a:r>
-            <a:r>
-              <a:rPr>
-                <a:solidFill>
-                  <a:srgbClr val="003B4F"/>
-                </a:solidFill>
-                <a:latin typeface="Courier"/>
-              </a:rPr>
-              <a:t>(needle_check_df)</a:t>
-            </a:r>
-          </a:p>
-          <a:p>
-            <a:pPr lvl="0" indent="0">
-              <a:buNone/>
-            </a:pPr>
-            <a:r>
-              <a:rPr>
-                <a:latin typeface="Courier"/>
-              </a:rPr>
-              <a:t>[1] 36</a:t>
-            </a:r>
-          </a:p>
-          <a:p>
-            <a:pPr lvl="0" indent="0">
-              <a:buNone/>
-            </a:pPr>
-            <a:r>
-              <a:rPr>
-                <a:solidFill>
-                  <a:srgbClr val="4758AB"/>
-                </a:solidFill>
-                <a:latin typeface="Courier"/>
-              </a:rPr>
-              <a:t>nrow</a:t>
-            </a:r>
-            <a:r>
-              <a:rPr>
-                <a:solidFill>
-                  <a:srgbClr val="003B4F"/>
-                </a:solidFill>
-                <a:latin typeface="Courier"/>
-              </a:rPr>
-              <a:t>(needle_clean_df)</a:t>
-            </a:r>
-          </a:p>
-          <a:p>
-            <a:pPr lvl="0" indent="0">
-              <a:buNone/>
-            </a:pPr>
-            <a:r>
-              <a:rPr>
-                <a:latin typeface="Courier"/>
-              </a:rPr>
-              <a:t>[1] 18</a:t>
-            </a:r>
-          </a:p>
-          <a:p>
-            <a:pPr lvl="0" indent="0" marL="1270000">
-              <a:buNone/>
-            </a:pPr>
-            <a:r>
-              <a:rPr sz="2000" b="1"/>
-              <a:t>Warning</a:t>
-            </a:r>
-          </a:p>
-          <a:p>
-            <a:pPr lvl="0" indent="0" marL="1270000">
-              <a:buNone/>
-            </a:pPr>
-            <a:r>
-              <a:rPr sz="2000" b="1"/>
-              <a:t>⚠️ Watch out!</a:t>
-            </a:r>
-          </a:p>
-          <a:p>
-            <a:pPr lvl="0" indent="0" marL="1270000">
-              <a:buNone/>
-            </a:pPr>
-            <a:r>
-              <a:rPr sz="2000">
-                <a:latin typeface="Courier"/>
-              </a:rPr>
-              <a:t>distinct()</a:t>
-            </a:r>
-            <a:r>
-              <a:rPr sz="2000"/>
-              <a:t> only catches </a:t>
-            </a:r>
-            <a:r>
-              <a:rPr sz="2000" i="1"/>
-              <a:t>exact</a:t>
-            </a:r>
-            <a:r>
-              <a:rPr sz="2000"/>
-              <a:t> duplicate rows. A typo’d duplicate (</a:t>
-            </a:r>
-            <a:r>
-              <a:rPr sz="2000">
-                <a:latin typeface="Courier"/>
-              </a:rPr>
-              <a:t>John</a:t>
-            </a:r>
-            <a:r>
-              <a:rPr sz="2000"/>
-              <a:t> vs </a:t>
-            </a:r>
-            <a:r>
-              <a:rPr sz="2000">
-                <a:latin typeface="Courier"/>
-              </a:rPr>
-              <a:t>john</a:t>
-            </a:r>
-            <a:r>
-              <a:rPr sz="2000"/>
-              <a:t>) slips right through — always eyeball your data too.</a:t>
-            </a:r>
-          </a:p>
-        </p:txBody>
-      </p:sp>
-      <p:sp>
-        <p:nvSpPr>
-          <p:cNvPr id="4" name="Content Placeholder 3"/>
-          <p:cNvSpPr>
-            <a:spLocks noGrp="1"/>
-          </p:cNvSpPr>
-          <p:nvPr>
-            <p:ph idx="2" sz="half"/>
-          </p:nvPr>
-        </p:nvSpPr>
-        <p:spPr/>
-        <p:txBody>
-          <a:bodyPr/>
-          <a:lstStyle/>
-          <a:p>
-            <a:pPr lvl="0" indent="0" marL="1270000">
-              <a:buNone/>
-            </a:pPr>
-            <a:r>
-              <a:rPr sz="2000" b="1"/>
-              <a:t>Tip</a:t>
-            </a:r>
-          </a:p>
-          <a:p>
-            <a:pPr lvl="0" indent="0" marL="1270000">
-              <a:buNone/>
-            </a:pPr>
-            <a:r>
-              <a:rPr sz="2000" b="1"/>
-              <a:t>🖐 Field habit</a:t>
-            </a:r>
-          </a:p>
-          <a:p>
-            <a:pPr lvl="0" indent="0" marL="1270000">
-              <a:buNone/>
-            </a:pPr>
-            <a:r>
-              <a:rPr sz="2000"/>
-              <a:t>Before you trust any dataset — yours or a collaborator’s — check </a:t>
-            </a:r>
-            <a:r>
-              <a:rPr sz="2000">
-                <a:latin typeface="Courier"/>
-              </a:rPr>
-              <a:t>nrow()</a:t>
-            </a:r>
-            <a:r>
-              <a:rPr sz="2000"/>
-              <a:t> against </a:t>
-            </a:r>
-            <a:r>
-              <a:rPr sz="2000">
-                <a:latin typeface="Courier"/>
-              </a:rPr>
-              <a:t>n_distinct()</a:t>
-            </a:r>
-            <a:r>
-              <a:rPr sz="2000"/>
-              <a:t>. It takes five seconds and catches a real, common mistake.</a:t>
-            </a:r>
-          </a:p>
-        </p:txBody>
-      </p:sp>
-    </p:spTree>
-  </p:cSld>
-</p:sld>
-</file>
-
-<file path=ppt/slides/slide17.xml><?xml version="1.0" encoding="utf-8"?>
-<p:sld xmlns:a="http://schemas.openxmlformats.org/drawingml/2006/main" xmlns:r="http://schemas.openxmlformats.org/officeDocument/2006/relationships" xmlns:p="http://schemas.openxmlformats.org/presentationml/2006/main">
-  <p:cSld>
-    <p:spTree>
-      <p:nvGrpSpPr>
-        <p:cNvPr id="1" name=""/>
-        <p:cNvGrpSpPr/>
-        <p:nvPr/>
-      </p:nvGrpSpPr>
-      <p:grpSpPr>
-        <a:xfrm>
-          <a:off x="0" y="0"/>
-          <a:ext cx="0" cy="0"/>
-          <a:chOff x="0" y="0"/>
-          <a:chExt cx="0" cy="0"/>
-        </a:xfrm>
-      </p:grpSpPr>
-      <p:sp>
-        <p:nvSpPr>
-          <p:cNvPr id="2" name="Title 1"/>
-          <p:cNvSpPr>
-            <a:spLocks noGrp="1"/>
-          </p:cNvSpPr>
-          <p:nvPr>
-            <p:ph type="title"/>
-          </p:nvPr>
-        </p:nvSpPr>
-        <p:spPr>
-          <a:xfrm>
-            <a:off x="0" y="0"/>
-            <a:ext cx="9144000" cy="582780"/>
-          </a:xfrm>
-        </p:spPr>
-        <p:txBody>
-          <a:bodyPr/>
-          <a:lstStyle/>
-          <a:p>
-            <a:pPr lvl="0" indent="0" marL="0">
-              <a:buNone/>
-            </a:pPr>
-            <a:r>
-              <a:rPr/>
-              <a:t>Part 4 · Saving Your Work</a:t>
-            </a:r>
-          </a:p>
-        </p:txBody>
-      </p:sp>
-      <p:sp>
-        <p:nvSpPr>
-          <p:cNvPr id="3" name="Content Placeholder 2"/>
-          <p:cNvSpPr>
-            <a:spLocks noGrp="1"/>
-          </p:cNvSpPr>
-          <p:nvPr>
-            <p:ph idx="1"/>
-          </p:nvPr>
-        </p:nvSpPr>
-        <p:spPr/>
-        <p:txBody>
-          <a:bodyPr/>
-          <a:lstStyle/>
-          <a:p>
-            <a:pPr lvl="0" indent="0" marL="0">
-              <a:spcBef>
-                <a:spcPts val="3000"/>
-              </a:spcBef>
-              <a:buNone/>
-            </a:pPr>
-            <a:r>
-              <a:rPr b="1">
-                <a:latin typeface="Courier"/>
-              </a:rPr>
-              <a:t>write_csv()</a:t>
-            </a:r>
-            <a:r>
-              <a:rPr b="1"/>
-              <a:t> — the mirror image of </a:t>
-            </a:r>
-            <a:r>
-              <a:rPr b="1">
-                <a:latin typeface="Courier"/>
-              </a:rPr>
-              <a:t>read_csv()</a:t>
-            </a:r>
-          </a:p>
-        </p:txBody>
-      </p:sp>
-    </p:spTree>
-  </p:cSld>
-</p:sld>
-</file>
-
 <file path=ppt/slides/slide18.xml><?xml version="1.0" encoding="utf-8"?>
 <p:sld xmlns:a="http://schemas.openxmlformats.org/drawingml/2006/main" xmlns:r="http://schemas.openxmlformats.org/officeDocument/2006/relationships" xmlns:p="http://schemas.openxmlformats.org/presentationml/2006/main">
   <p:cSld>
@@ -6493,170 +6525,30 @@
       </p:grpSpPr>
       <p:sp>
         <p:nvSpPr>
-          <p:cNvPr id="3" name="Content Placeholder 2"/>
-          <p:cNvSpPr>
-            <a:spLocks noGrp="1"/>
-          </p:cNvSpPr>
-          <p:nvPr>
-            <p:ph idx="1" sz="half"/>
-          </p:nvPr>
-        </p:nvSpPr>
-        <p:spPr/>
+          <p:cNvPr id="2" name="Title 1"/>
+          <p:cNvSpPr>
+            <a:spLocks noGrp="1"/>
+          </p:cNvSpPr>
+          <p:nvPr>
+            <p:ph type="title"/>
+          </p:nvPr>
+        </p:nvSpPr>
+        <p:spPr>
+          <a:xfrm>
+            <a:off x="0" y="0"/>
+            <a:ext cx="9144000" cy="582780"/>
+          </a:xfrm>
+        </p:spPr>
         <p:txBody>
           <a:bodyPr/>
           <a:lstStyle/>
           <a:p>
-            <a:pPr lvl="0" indent="0">
-              <a:buNone/>
-            </a:pPr>
-            <a:r>
-              <a:rPr>
-                <a:solidFill>
-                  <a:srgbClr val="4758AB"/>
-                </a:solidFill>
-                <a:latin typeface="Courier"/>
-              </a:rPr>
-              <a:t>write_csv</a:t>
-            </a:r>
-            <a:r>
-              <a:rPr>
-                <a:solidFill>
-                  <a:srgbClr val="003B4F"/>
-                </a:solidFill>
-                <a:latin typeface="Courier"/>
-              </a:rPr>
-              <a:t>(pine_wrangled_df, </a:t>
-            </a:r>
-            <a:r>
-              <a:rPr>
-                <a:solidFill>
-                  <a:srgbClr val="20794D"/>
-                </a:solidFill>
-                <a:latin typeface="Courier"/>
-              </a:rPr>
-              <a:t>"data/pine_needles_wrangled.csv"</a:t>
-            </a:r>
-            <a:r>
-              <a:rPr>
-                <a:solidFill>
-                  <a:srgbClr val="003B4F"/>
-                </a:solidFill>
-                <a:latin typeface="Courier"/>
-              </a:rPr>
-              <a:t>)</a:t>
-            </a:r>
-          </a:p>
-          <a:p>
-            <a:pPr lvl="0" indent="0" marL="1270000">
-              <a:buNone/>
-            </a:pPr>
-            <a:r>
-              <a:rPr sz="2000" b="1"/>
-              <a:t>Important</a:t>
-            </a:r>
-          </a:p>
-          <a:p>
-            <a:pPr lvl="0" indent="0" marL="1270000">
-              <a:buNone/>
-            </a:pPr>
-            <a:r>
-              <a:rPr sz="2000" b="1"/>
-              <a:t>Raw data is read-only.</a:t>
-            </a:r>
-            <a:r>
-              <a:rPr sz="2000"/>
-              <a:t> </a:t>
-            </a:r>
-            <a:r>
-              <a:rPr sz="2000">
-                <a:latin typeface="Courier"/>
-              </a:rPr>
-              <a:t>pine_needles.csv</a:t>
-            </a:r>
-            <a:r>
-              <a:rPr sz="2000"/>
-              <a:t> never gets overwritten — </a:t>
-            </a:r>
-            <a:r>
-              <a:rPr sz="2000">
-                <a:latin typeface="Courier"/>
-              </a:rPr>
-              <a:t>write_csv()</a:t>
-            </a:r>
-            <a:r>
-              <a:rPr sz="2000"/>
-              <a:t> always creates a </a:t>
-            </a:r>
-            <a:r>
-              <a:rPr sz="2000" b="1"/>
-              <a:t>new, separate file</a:t>
-            </a:r>
-            <a:r>
-              <a:rPr sz="2000"/>
-              <a:t>. That’s why we named it </a:t>
-            </a:r>
-            <a:r>
-              <a:rPr sz="2000">
-                <a:latin typeface="Courier"/>
-              </a:rPr>
-              <a:t>pine_needles_wrangled.csv</a:t>
-            </a:r>
-            <a:r>
-              <a:rPr sz="2000"/>
-              <a:t>, not </a:t>
-            </a:r>
-            <a:r>
-              <a:rPr sz="2000">
-                <a:latin typeface="Courier"/>
-              </a:rPr>
-              <a:t>pine_needles.csv</a:t>
-            </a:r>
-            <a:r>
-              <a:rPr sz="2000"/>
-              <a:t>.</a:t>
-            </a:r>
-          </a:p>
-        </p:txBody>
-      </p:sp>
-      <p:sp>
-        <p:nvSpPr>
-          <p:cNvPr id="4" name="Content Placeholder 3"/>
-          <p:cNvSpPr>
-            <a:spLocks noGrp="1"/>
-          </p:cNvSpPr>
-          <p:nvPr>
-            <p:ph idx="2" sz="half"/>
-          </p:nvPr>
-        </p:nvSpPr>
-        <p:spPr/>
-        <p:txBody>
-          <a:bodyPr/>
-          <a:lstStyle/>
-          <a:p>
-            <a:pPr lvl="0" indent="0" marL="1270000">
-              <a:buNone/>
-            </a:pPr>
-            <a:r>
-              <a:rPr sz="2000" b="1"/>
-              <a:t>Note</a:t>
-            </a:r>
-          </a:p>
-          <a:p>
-            <a:pPr lvl="0" indent="0" marL="1270000">
-              <a:buNone/>
-            </a:pPr>
-            <a:r>
-              <a:rPr sz="2000" b="1"/>
-              <a:t>✅ Key idea</a:t>
-            </a:r>
-          </a:p>
-          <a:p>
-            <a:pPr lvl="0" indent="0" marL="1270000">
-              <a:buNone/>
-            </a:pPr>
-            <a:r>
-              <a:rPr sz="2000"/>
-              <a:t>If you can’t reproduce a result from raw data + a script, something’s wrong with the script — never with the raw file. Keeping raw data untouched is what makes that guarantee possible.</a:t>
+            <a:pPr lvl="0" indent="0" marL="0">
+              <a:buNone/>
+            </a:pPr>
+            <a:r>
+              <a:rPr/>
+              <a:t>Part 3 · A Duplicate-Row Problem</a:t>
             </a:r>
           </a:p>
         </p:txBody>
@@ -6685,28 +6577,291 @@
       </p:grpSpPr>
       <p:sp>
         <p:nvSpPr>
-          <p:cNvPr id="3" name="Content Placeholder 2"/>
-          <p:cNvSpPr>
-            <a:spLocks noGrp="1"/>
-          </p:cNvSpPr>
-          <p:nvPr>
-            <p:ph idx="1"/>
-          </p:nvPr>
-        </p:nvSpPr>
-        <p:spPr/>
+          <p:cNvPr id="2" name="Title 1"/>
+          <p:cNvSpPr>
+            <a:spLocks noGrp="1"/>
+          </p:cNvSpPr>
+          <p:nvPr>
+            <p:ph type="title"/>
+          </p:nvPr>
+        </p:nvSpPr>
+        <p:spPr>
+          <a:xfrm>
+            <a:off x="0" y="0"/>
+            <a:ext cx="9144000" cy="602780"/>
+          </a:xfrm>
+          <a:solidFill>
+            <a:srgbClr val="70121D"/>
+          </a:solidFill>
+        </p:spPr>
         <p:txBody>
           <a:bodyPr/>
           <a:lstStyle/>
           <a:p>
             <a:pPr lvl="0" indent="0" marL="0">
-              <a:spcBef>
-                <a:spcPts val="3000"/>
-              </a:spcBef>
-              <a:buNone/>
-            </a:pPr>
+              <a:buNone/>
+            </a:pPr>
+            <a:r>
+              <a:rPr/>
+              <a:t>A Duplicate-Row Problem</a:t>
+            </a:r>
+          </a:p>
+        </p:txBody>
+      </p:sp>
+      <p:sp>
+        <p:nvSpPr>
+          <p:cNvPr id="3" name="Content Placeholder 2"/>
+          <p:cNvSpPr>
+            <a:spLocks noGrp="1"/>
+          </p:cNvSpPr>
+          <p:nvPr>
+            <p:ph idx="1" sz="half"/>
+          </p:nvPr>
+        </p:nvSpPr>
+        <p:spPr/>
+        <p:txBody>
+          <a:bodyPr/>
+          <a:lstStyle/>
+          <a:p>
+            <a:pPr lvl="0" indent="0" marL="0">
+              <a:buNone/>
+            </a:pPr>
+            <a:r>
+              <a:rPr/>
+              <a:t>Remember </a:t>
+            </a:r>
             <a:r>
               <a:rPr b="1"/>
-              <a:t>Naming your saved files</a:t>
+              <a:t>pseudoreplication</a:t>
+            </a:r>
+            <a:r>
+              <a:rPr/>
+              <a:t> from Module 1 — one tree standing in for many? Duplicate rows are the data-entry version of the same mistake: the same measurement counted twice inflates your sample size without adding real information.</a:t>
+            </a:r>
+          </a:p>
+          <a:p>
+            <a:pPr lvl="0" indent="0">
+              <a:buNone/>
+            </a:pPr>
+            <a:r>
+              <a:rPr>
+                <a:solidFill>
+                  <a:srgbClr val="003B4F"/>
+                </a:solidFill>
+                <a:latin typeface="Courier"/>
+              </a:rPr>
+              <a:t>needle_check_df &lt;- </a:t>
+            </a:r>
+            <a:r>
+              <a:rPr>
+                <a:solidFill>
+                  <a:srgbClr val="4758AB"/>
+                </a:solidFill>
+                <a:latin typeface="Courier"/>
+              </a:rPr>
+              <a:t>read_csv</a:t>
+            </a:r>
+            <a:r>
+              <a:rPr>
+                <a:solidFill>
+                  <a:srgbClr val="003B4F"/>
+                </a:solidFill>
+                <a:latin typeface="Courier"/>
+              </a:rPr>
+              <a:t>(</a:t>
+            </a:r>
+            <a:r>
+              <a:rPr>
+                <a:solidFill>
+                  <a:srgbClr val="20794D"/>
+                </a:solidFill>
+                <a:latin typeface="Courier"/>
+              </a:rPr>
+              <a:t>"data/pine_needles_error.csv"</a:t>
+            </a:r>
+            <a:r>
+              <a:rPr>
+                <a:solidFill>
+                  <a:srgbClr val="003B4F"/>
+                </a:solidFill>
+                <a:latin typeface="Courier"/>
+              </a:rPr>
+              <a:t>)</a:t>
+            </a:r>
+            <a:br/>
+            <a:br/>
+            <a:r>
+              <a:rPr>
+                <a:solidFill>
+                  <a:srgbClr val="4758AB"/>
+                </a:solidFill>
+                <a:latin typeface="Courier"/>
+              </a:rPr>
+              <a:t>nrow</a:t>
+            </a:r>
+            <a:r>
+              <a:rPr>
+                <a:solidFill>
+                  <a:srgbClr val="003B4F"/>
+                </a:solidFill>
+                <a:latin typeface="Courier"/>
+              </a:rPr>
+              <a:t>(needle_check_df)</a:t>
+            </a:r>
+          </a:p>
+          <a:p>
+            <a:pPr lvl="0" indent="0">
+              <a:buNone/>
+            </a:pPr>
+            <a:r>
+              <a:rPr>
+                <a:latin typeface="Courier"/>
+              </a:rPr>
+              <a:t>[1] 36</a:t>
+            </a:r>
+          </a:p>
+          <a:p>
+            <a:pPr lvl="0" indent="0">
+              <a:buNone/>
+            </a:pPr>
+            <a:r>
+              <a:rPr>
+                <a:solidFill>
+                  <a:srgbClr val="4758AB"/>
+                </a:solidFill>
+                <a:latin typeface="Courier"/>
+              </a:rPr>
+              <a:t>n_distinct</a:t>
+            </a:r>
+            <a:r>
+              <a:rPr>
+                <a:solidFill>
+                  <a:srgbClr val="003B4F"/>
+                </a:solidFill>
+                <a:latin typeface="Courier"/>
+              </a:rPr>
+              <a:t>(needle_check_df)</a:t>
+            </a:r>
+          </a:p>
+          <a:p>
+            <a:pPr lvl="0" indent="0">
+              <a:buNone/>
+            </a:pPr>
+            <a:r>
+              <a:rPr>
+                <a:latin typeface="Courier"/>
+              </a:rPr>
+              <a:t>[1] 18</a:t>
+            </a:r>
+          </a:p>
+          <a:p>
+            <a:pPr lvl="0" indent="0" marL="1270000">
+              <a:buNone/>
+            </a:pPr>
+            <a:r>
+              <a:rPr sz="2000" b="1"/>
+              <a:t>Important</a:t>
+            </a:r>
+          </a:p>
+          <a:p>
+            <a:pPr lvl="0" indent="0" marL="1270000">
+              <a:buNone/>
+            </a:pPr>
+            <a:r>
+              <a:rPr sz="2000" b="1"/>
+              <a:t>Something’s wrong:</a:t>
+            </a:r>
+            <a:r>
+              <a:rPr sz="2000"/>
+              <a:t> </a:t>
+            </a:r>
+            <a:r>
+              <a:rPr sz="2000">
+                <a:latin typeface="Courier"/>
+              </a:rPr>
+              <a:t>nrow()</a:t>
+            </a:r>
+            <a:r>
+              <a:rPr sz="2000"/>
+              <a:t> and </a:t>
+            </a:r>
+            <a:r>
+              <a:rPr sz="2000">
+                <a:latin typeface="Courier"/>
+              </a:rPr>
+              <a:t>n_distinct()</a:t>
+            </a:r>
+            <a:r>
+              <a:rPr sz="2000"/>
+              <a:t> don’t match. Some rows are exact repeats.</a:t>
+            </a:r>
+          </a:p>
+        </p:txBody>
+      </p:sp>
+      <p:sp>
+        <p:nvSpPr>
+          <p:cNvPr id="4" name="Content Placeholder 3"/>
+          <p:cNvSpPr>
+            <a:spLocks noGrp="1"/>
+          </p:cNvSpPr>
+          <p:nvPr>
+            <p:ph idx="2" sz="half"/>
+          </p:nvPr>
+        </p:nvSpPr>
+        <p:spPr/>
+        <p:txBody>
+          <a:bodyPr/>
+          <a:lstStyle/>
+          <a:p>
+            <a:pPr lvl="0" indent="0" marL="1270000">
+              <a:buNone/>
+            </a:pPr>
+            <a:r>
+              <a:rPr sz="2000" b="1"/>
+              <a:t>Note</a:t>
+            </a:r>
+          </a:p>
+          <a:p>
+            <a:pPr lvl="0" indent="0" marL="1270000">
+              <a:buNone/>
+            </a:pPr>
+            <a:r>
+              <a:rPr sz="2000" b="1"/>
+              <a:t>📖 New words</a:t>
+            </a:r>
+          </a:p>
+          <a:p>
+            <a:pPr lvl="0"/>
+            <a:r>
+              <a:rPr sz="2000" b="1">
+                <a:latin typeface="Courier"/>
+              </a:rPr>
+              <a:t>n_distinct()</a:t>
+            </a:r>
+            <a:r>
+              <a:rPr sz="2000"/>
+              <a:t> — counts how many </a:t>
+            </a:r>
+            <a:r>
+              <a:rPr sz="2000" i="1"/>
+              <a:t>unique</a:t>
+            </a:r>
+            <a:r>
+              <a:rPr sz="2000"/>
+              <a:t> rows exist</a:t>
+            </a:r>
+          </a:p>
+          <a:p>
+            <a:pPr lvl="0"/>
+            <a:r>
+              <a:rPr sz="2000" b="1">
+                <a:latin typeface="Courier"/>
+              </a:rPr>
+              <a:t>distinct()</a:t>
+            </a:r>
+            <a:r>
+              <a:rPr sz="2000"/>
+              <a:t> — returns the data with duplicate rows removed</a:t>
             </a:r>
           </a:p>
         </p:txBody>
@@ -7028,138 +7183,45 @@
       </p:grpSpPr>
       <p:sp>
         <p:nvSpPr>
-          <p:cNvPr id="3" name="Content Placeholder 2"/>
-          <p:cNvSpPr>
-            <a:spLocks noGrp="1"/>
-          </p:cNvSpPr>
-          <p:nvPr>
-            <p:ph idx="1" sz="half"/>
-          </p:nvPr>
-        </p:nvSpPr>
-        <p:spPr/>
+          <p:cNvPr id="2" name="Title 1"/>
+          <p:cNvSpPr>
+            <a:spLocks noGrp="1"/>
+          </p:cNvSpPr>
+          <p:nvPr>
+            <p:ph type="title"/>
+          </p:nvPr>
+        </p:nvSpPr>
+        <p:spPr>
+          <a:xfrm>
+            <a:off x="0" y="0"/>
+            <a:ext cx="9144000" cy="602780"/>
+          </a:xfrm>
+          <a:solidFill>
+            <a:srgbClr val="70121D"/>
+          </a:solidFill>
+        </p:spPr>
         <p:txBody>
           <a:bodyPr/>
           <a:lstStyle/>
           <a:p>
-            <a:pPr lvl="0"/>
+            <a:pPr lvl="0" indent="0" marL="0">
+              <a:buNone/>
+            </a:pPr>
             <a:r>
               <a:rPr/>
-              <a:t>Never overwrite </a:t>
-            </a:r>
-            <a:r>
-              <a:rPr>
-                <a:latin typeface="Courier"/>
-              </a:rPr>
-              <a:t>data/pine_needles.csv</a:t>
-            </a:r>
-            <a:r>
-              <a:rPr/>
-              <a:t> — that file is raw</a:t>
-            </a:r>
-          </a:p>
-          <a:p>
-            <a:pPr lvl="0"/>
-            <a:r>
-              <a:rPr/>
-              <a:t>Save wrangled output with a name that says what happened: </a:t>
-            </a:r>
-            <a:r>
-              <a:rPr>
-                <a:latin typeface="Courier"/>
-              </a:rPr>
-              <a:t>pine_needles_wrangled.csv</a:t>
-            </a:r>
-            <a:r>
-              <a:rPr/>
-              <a:t>, not </a:t>
-            </a:r>
-            <a:r>
-              <a:rPr>
-                <a:latin typeface="Courier"/>
-              </a:rPr>
-              <a:t>pine_needles2.csv</a:t>
-            </a:r>
-            <a:r>
-              <a:rPr/>
-              <a:t> or </a:t>
-            </a:r>
-            <a:r>
-              <a:rPr>
-                <a:latin typeface="Courier"/>
-              </a:rPr>
-              <a:t>final.csv</a:t>
-            </a:r>
-          </a:p>
-          <a:p>
-            <a:pPr lvl="0"/>
-            <a:r>
-              <a:rPr/>
-              <a:t>Anyone re-running your script from scratch should get the exact same output file</a:t>
-            </a:r>
-          </a:p>
-          <a:p>
-            <a:pPr lvl="0" indent="0" marL="1270000">
-              <a:buNone/>
-            </a:pPr>
-            <a:r>
-              <a:rPr sz="2000" b="1"/>
-              <a:t>Warning</a:t>
-            </a:r>
-          </a:p>
-          <a:p>
-            <a:pPr lvl="0" indent="0" marL="1270000">
-              <a:buNone/>
-            </a:pPr>
-            <a:r>
-              <a:rPr sz="2000" b="1"/>
-              <a:t>⚠️ Watch out!</a:t>
-            </a:r>
-          </a:p>
-          <a:p>
-            <a:pPr lvl="0" indent="0" marL="1270000">
-              <a:buNone/>
-            </a:pPr>
-            <a:r>
-              <a:rPr sz="2000">
-                <a:latin typeface="Courier"/>
-              </a:rPr>
-              <a:t>final.csv</a:t>
-            </a:r>
-            <a:r>
-              <a:rPr sz="2000"/>
-              <a:t>, </a:t>
-            </a:r>
-            <a:r>
-              <a:rPr sz="2000">
-                <a:latin typeface="Courier"/>
-              </a:rPr>
-              <a:t>final_v2.csv</a:t>
-            </a:r>
-            <a:r>
-              <a:rPr sz="2000"/>
-              <a:t>, </a:t>
-            </a:r>
-            <a:r>
-              <a:rPr sz="2000">
-                <a:latin typeface="Courier"/>
-              </a:rPr>
-              <a:t>final_FINAL.csv</a:t>
-            </a:r>
-            <a:r>
-              <a:rPr sz="2000"/>
-              <a:t> — this is exactly the mess a project folder with relative paths and clear names is meant to prevent.</a:t>
-            </a:r>
-          </a:p>
-        </p:txBody>
-      </p:sp>
-      <p:sp>
-        <p:nvSpPr>
-          <p:cNvPr id="4" name="Content Placeholder 3"/>
-          <p:cNvSpPr>
-            <a:spLocks noGrp="1"/>
-          </p:cNvSpPr>
-          <p:nvPr>
-            <p:ph idx="2" sz="half"/>
+              <a:t>Finding the duplicates</a:t>
+            </a:r>
+          </a:p>
+        </p:txBody>
+      </p:sp>
+      <p:sp>
+        <p:nvSpPr>
+          <p:cNvPr id="3" name="Content Placeholder 2"/>
+          <p:cNvSpPr>
+            <a:spLocks noGrp="1"/>
+          </p:cNvSpPr>
+          <p:nvPr>
+            <p:ph idx="1" sz="half"/>
           </p:nvPr>
         </p:nvSpPr>
         <p:spPr/>
@@ -7167,6 +7229,131 @@
           <a:bodyPr/>
           <a:lstStyle/>
           <a:p>
+            <a:pPr lvl="0" indent="0">
+              <a:buNone/>
+            </a:pPr>
+            <a:r>
+              <a:rPr>
+                <a:solidFill>
+                  <a:srgbClr val="5E5E5E"/>
+                </a:solidFill>
+                <a:latin typeface="Courier"/>
+              </a:rPr>
+              <a:t># Which rows are exact duplicates of an earlier row?</a:t>
+            </a:r>
+            <a:br/>
+            <a:r>
+              <a:rPr>
+                <a:solidFill>
+                  <a:srgbClr val="003B4F"/>
+                </a:solidFill>
+                <a:latin typeface="Courier"/>
+              </a:rPr>
+              <a:t>needle_check_df </a:t>
+            </a:r>
+            <a:r>
+              <a:rPr>
+                <a:solidFill>
+                  <a:srgbClr val="5E5E5E"/>
+                </a:solidFill>
+                <a:latin typeface="Courier"/>
+              </a:rPr>
+              <a:t>|&gt;</a:t>
+            </a:r>
+            <a:r>
+              <a:rPr>
+                <a:solidFill>
+                  <a:srgbClr val="003B4F"/>
+                </a:solidFill>
+                <a:latin typeface="Courier"/>
+              </a:rPr>
+              <a:t> </a:t>
+            </a:r>
+            <a:r>
+              <a:rPr>
+                <a:solidFill>
+                  <a:srgbClr val="4758AB"/>
+                </a:solidFill>
+                <a:latin typeface="Courier"/>
+              </a:rPr>
+              <a:t>filter</a:t>
+            </a:r>
+            <a:r>
+              <a:rPr>
+                <a:solidFill>
+                  <a:srgbClr val="003B4F"/>
+                </a:solidFill>
+                <a:latin typeface="Courier"/>
+              </a:rPr>
+              <a:t>(</a:t>
+            </a:r>
+            <a:r>
+              <a:rPr>
+                <a:solidFill>
+                  <a:srgbClr val="4758AB"/>
+                </a:solidFill>
+                <a:latin typeface="Courier"/>
+              </a:rPr>
+              <a:t>duplicated</a:t>
+            </a:r>
+            <a:r>
+              <a:rPr>
+                <a:solidFill>
+                  <a:srgbClr val="003B4F"/>
+                </a:solidFill>
+                <a:latin typeface="Courier"/>
+              </a:rPr>
+              <a:t>(needle_check_df))</a:t>
+            </a:r>
+          </a:p>
+          <a:p>
+            <a:pPr lvl="0" indent="0">
+              <a:buNone/>
+            </a:pPr>
+            <a:r>
+              <a:rPr>
+                <a:latin typeface="Courier"/>
+              </a:rPr>
+              <a:t># A tibble: 18 × 5
+   name  species needle_id needle_name length_mm
+   &lt;chr&gt; &lt;chr&gt;       &lt;dbl&gt; &lt;chr&gt;           &lt;dbl&gt;
+ 1 John  a               1 one              21.1
+ 2 John  a               2 two              21.2
+ 3 John  a               3 three            21.5
+ 4 Mary  a               1 one              21  
+ 5 Mary  a               2 two              21.1
+ 6 Mary  a               3 three            21.3
+ 7 Steve a               1 one              21.4
+ 8 Steve a               2 two              21.3
+ 9 Steve a               3 three            21.9
+10 Harry a               1 one              24.1
+11 Harry a               2 two              24.2
+12 Harry a               3 three            24.3
+13 Stan  a               1 one              22.1
+14 Stan  a               2 two              22.2
+15 Stan  a               3 three            22.4
+16 Jake  a               1 one              20.3
+17 Jake  a               2 two              20.4
+18 Jake  a               3 three            20.1</a:t>
+            </a:r>
+          </a:p>
+        </p:txBody>
+      </p:sp>
+      <p:sp>
+        <p:nvSpPr>
+          <p:cNvPr id="4" name="Content Placeholder 3"/>
+          <p:cNvSpPr>
+            <a:spLocks noGrp="1"/>
+          </p:cNvSpPr>
+          <p:nvPr>
+            <p:ph idx="2" sz="half"/>
+          </p:nvPr>
+        </p:nvSpPr>
+        <p:spPr/>
+        <p:txBody>
+          <a:bodyPr/>
+          <a:lstStyle/>
+          <a:p>
             <a:pPr lvl="0" indent="0" marL="1270000">
               <a:buNone/>
             </a:pPr>
@@ -7181,7 +7368,7 @@
             </a:pPr>
             <a:r>
               <a:rPr sz="2000" b="1"/>
-              <a:t>🖐 Try it yourself</a:t>
+              <a:t>🖐 Field habit</a:t>
             </a:r>
           </a:p>
           <a:p>
@@ -7190,17 +7377,27 @@
             </a:pPr>
             <a:r>
               <a:rPr sz="2000"/>
-              <a:t>Predict what </a:t>
+              <a:t>Before you trust any dataset — yours or a collaborator’s — check </a:t>
             </a:r>
             <a:r>
               <a:rPr sz="2000">
                 <a:latin typeface="Courier"/>
               </a:rPr>
-              <a:t>write_csv(pine_wrangled_df, "data/pine_needles_wrangled.csv")</a:t>
+              <a:t>nrow()</a:t>
             </a:r>
             <a:r>
               <a:rPr sz="2000"/>
-              <a:t> does if that file doesn’t exist yet. What if it already does?</a:t>
+              <a:t> against </a:t>
+            </a:r>
+            <a:r>
+              <a:rPr sz="2000">
+                <a:latin typeface="Courier"/>
+              </a:rPr>
+              <a:t>n_distinct()</a:t>
+            </a:r>
+            <a:r>
+              <a:rPr sz="2000"/>
+              <a:t>. It takes five seconds and catches a real, common mistake.</a:t>
             </a:r>
           </a:p>
         </p:txBody>
@@ -7255,7 +7452,13 @@
             </a:pPr>
             <a:r>
               <a:rPr/>
-              <a:t>Wrap-up</a:t>
+              <a:t>Removing duplicates with </a:t>
+            </a:r>
+            <a:r>
+              <a:rPr>
+                <a:latin typeface="Courier"/>
+              </a:rPr>
+              <a:t>distinct()</a:t>
             </a:r>
           </a:p>
         </p:txBody>
@@ -7275,180 +7478,128 @@
           <a:bodyPr/>
           <a:lstStyle/>
           <a:p>
-            <a:pPr lvl="0" indent="0" marL="0">
-              <a:buNone/>
-            </a:pPr>
-            <a:r>
-              <a:rPr/>
-              <a:t>Today you:</a:t>
-            </a:r>
-          </a:p>
-          <a:p>
-            <a:pPr lvl="0"/>
-            <a:r>
-              <a:rPr/>
-              <a:t>Imported the same data from a </a:t>
-            </a:r>
-            <a:r>
-              <a:rPr>
-                <a:latin typeface="Courier"/>
-              </a:rPr>
-              <a:t>.csv</a:t>
-            </a:r>
-            <a:r>
-              <a:rPr/>
+            <a:pPr lvl="0" indent="0">
+              <a:buNone/>
+            </a:pPr>
+            <a:r>
+              <a:rPr>
+                <a:solidFill>
+                  <a:srgbClr val="5E5E5E"/>
+                </a:solidFill>
+                <a:latin typeface="Courier"/>
+              </a:rPr>
+              <a:t># Keep only one copy of each unique row</a:t>
+            </a:r>
+            <a:br/>
+            <a:r>
+              <a:rPr>
+                <a:solidFill>
+                  <a:srgbClr val="003B4F"/>
+                </a:solidFill>
+                <a:latin typeface="Courier"/>
+              </a:rPr>
+              <a:t>needle_clean_df &lt;- needle_check_df </a:t>
+            </a:r>
+            <a:r>
+              <a:rPr>
+                <a:solidFill>
+                  <a:srgbClr val="5E5E5E"/>
+                </a:solidFill>
+                <a:latin typeface="Courier"/>
+              </a:rPr>
+              <a:t>|&gt;</a:t>
+            </a:r>
+            <a:r>
+              <a:rPr>
+                <a:solidFill>
+                  <a:srgbClr val="003B4F"/>
+                </a:solidFill>
+                <a:latin typeface="Courier"/>
+              </a:rPr>
               <a:t> </a:t>
             </a:r>
             <a:r>
-              <a:rPr b="1"/>
-              <a:t>and</a:t>
-            </a:r>
-            <a:r>
-              <a:rPr/>
-              <a:t> an </a:t>
-            </a:r>
-            <a:r>
-              <a:rPr>
-                <a:latin typeface="Courier"/>
-              </a:rPr>
-              <a:t>.xlsx</a:t>
-            </a:r>
-          </a:p>
-          <a:p>
-            <a:pPr lvl="0"/>
-            <a:r>
-              <a:rPr/>
-              <a:t>Used </a:t>
-            </a:r>
-            <a:r>
-              <a:rPr>
-                <a:latin typeface="Courier"/>
-              </a:rPr>
-              <a:t>filter()</a:t>
-            </a:r>
-            <a:r>
-              <a:rPr/>
-              <a:t>, </a:t>
-            </a:r>
-            <a:r>
-              <a:rPr>
-                <a:latin typeface="Courier"/>
-              </a:rPr>
-              <a:t>select()</a:t>
-            </a:r>
-            <a:r>
-              <a:rPr/>
-              <a:t>, </a:t>
-            </a:r>
-            <a:r>
-              <a:rPr>
-                <a:latin typeface="Courier"/>
-              </a:rPr>
-              <a:t>mutate()</a:t>
-            </a:r>
-            <a:r>
-              <a:rPr/>
-              <a:t>, and </a:t>
-            </a:r>
-            <a:r>
-              <a:rPr>
-                <a:latin typeface="Courier"/>
-              </a:rPr>
-              <a:t>arrange()</a:t>
-            </a:r>
-            <a:r>
-              <a:rPr/>
-              <a:t> — and chained them into a pipeline</a:t>
-            </a:r>
-          </a:p>
-          <a:p>
-            <a:pPr lvl="0"/>
-            <a:r>
-              <a:rPr/>
-              <a:t>Converted units and log-transformed a column with </a:t>
-            </a:r>
-            <a:r>
-              <a:rPr>
-                <a:latin typeface="Courier"/>
-              </a:rPr>
-              <a:t>mutate()</a:t>
-            </a:r>
-          </a:p>
-          <a:p>
-            <a:pPr lvl="0"/>
-            <a:r>
-              <a:rPr/>
-              <a:t>Caught and removed duplicate rows with </a:t>
-            </a:r>
-            <a:r>
-              <a:rPr>
-                <a:latin typeface="Courier"/>
-              </a:rPr>
-              <a:t>distinct()</a:t>
-            </a:r>
-          </a:p>
-          <a:p>
-            <a:pPr lvl="0"/>
-            <a:r>
-              <a:rPr/>
-              <a:t>Saved a new file with </a:t>
-            </a:r>
-            <a:r>
-              <a:rPr>
-                <a:latin typeface="Courier"/>
-              </a:rPr>
-              <a:t>write_csv()</a:t>
-            </a:r>
-            <a:r>
-              <a:rPr/>
-              <a:t> without touching the raw data</a:t>
-            </a:r>
-          </a:p>
-          <a:p>
-            <a:pPr lvl="0" indent="0" marL="1270000">
-              <a:buNone/>
-            </a:pPr>
-            <a:r>
-              <a:rPr sz="2000" b="1"/>
-              <a:t>Tip</a:t>
-            </a:r>
-          </a:p>
-          <a:p>
-            <a:pPr lvl="0" indent="0" marL="1270000">
-              <a:buNone/>
-            </a:pPr>
-            <a:r>
-              <a:rPr sz="2000" b="1"/>
-              <a:t>🖐 Before next class</a:t>
-            </a:r>
-          </a:p>
-          <a:p>
-            <a:pPr lvl="0" indent="0" marL="1270000">
-              <a:buNone/>
-            </a:pPr>
-            <a:r>
-              <a:rPr sz="2000"/>
-              <a:t>Finish the worksheet: wrangle </a:t>
-            </a:r>
-            <a:r>
-              <a:rPr sz="2000">
-                <a:latin typeface="Courier"/>
-              </a:rPr>
-              <a:t>pine_needles.csv</a:t>
-            </a:r>
-            <a:r>
-              <a:rPr sz="2000"/>
-              <a:t> into a new data frame with at least one unit conversion and one log transform, then save it with </a:t>
-            </a:r>
-            <a:r>
-              <a:rPr sz="2000">
-                <a:latin typeface="Courier"/>
-              </a:rPr>
-              <a:t>write_csv()</a:t>
-            </a:r>
-            <a:r>
-              <a:rPr sz="2000"/>
-              <a:t>.</a:t>
+              <a:rPr>
+                <a:solidFill>
+                  <a:srgbClr val="4758AB"/>
+                </a:solidFill>
+                <a:latin typeface="Courier"/>
+              </a:rPr>
+              <a:t>distinct</a:t>
+            </a:r>
+            <a:r>
+              <a:rPr>
+                <a:solidFill>
+                  <a:srgbClr val="003B4F"/>
+                </a:solidFill>
+                <a:latin typeface="Courier"/>
+              </a:rPr>
+              <a:t>()</a:t>
+            </a:r>
+            <a:br/>
+            <a:br/>
+            <a:r>
+              <a:rPr>
+                <a:solidFill>
+                  <a:srgbClr val="4758AB"/>
+                </a:solidFill>
+                <a:latin typeface="Courier"/>
+              </a:rPr>
+              <a:t>nrow</a:t>
+            </a:r>
+            <a:r>
+              <a:rPr>
+                <a:solidFill>
+                  <a:srgbClr val="003B4F"/>
+                </a:solidFill>
+                <a:latin typeface="Courier"/>
+              </a:rPr>
+              <a:t>(needle_check_df)</a:t>
+            </a:r>
+          </a:p>
+          <a:p>
+            <a:pPr lvl="0" indent="0">
+              <a:buNone/>
+            </a:pPr>
+            <a:r>
+              <a:rPr>
+                <a:latin typeface="Courier"/>
+              </a:rPr>
+              <a:t>[1] 36</a:t>
+            </a:r>
+          </a:p>
+          <a:p>
+            <a:pPr lvl="0" indent="0">
+              <a:buNone/>
+            </a:pPr>
+            <a:r>
+              <a:rPr>
+                <a:solidFill>
+                  <a:srgbClr val="4758AB"/>
+                </a:solidFill>
+                <a:latin typeface="Courier"/>
+              </a:rPr>
+              <a:t>nrow</a:t>
+            </a:r>
+            <a:r>
+              <a:rPr>
+                <a:solidFill>
+                  <a:srgbClr val="003B4F"/>
+                </a:solidFill>
+                <a:latin typeface="Courier"/>
+              </a:rPr>
+              <a:t>(needle_clean_df)</a:t>
+            </a:r>
+          </a:p>
+          <a:p>
+            <a:pPr lvl="0" indent="0">
+              <a:buNone/>
+            </a:pPr>
+            <a:r>
+              <a:rPr>
+                <a:latin typeface="Courier"/>
+              </a:rPr>
+              <a:t>[1] 18</a:t>
             </a:r>
           </a:p>
         </p:txBody>
@@ -7473,7 +7624,7 @@
             </a:pPr>
             <a:r>
               <a:rPr sz="2000" b="1"/>
-              <a:t>Note</a:t>
+              <a:t>Warning</a:t>
             </a:r>
           </a:p>
           <a:p>
@@ -7482,64 +7633,50 @@
             </a:pPr>
             <a:r>
               <a:rPr sz="2000" b="1"/>
-              <a:t>Up next — Module 3</a:t>
-            </a:r>
-          </a:p>
-          <a:p>
-            <a:pPr lvl="0"/>
+              <a:t>⚠️ Watch out!</a:t>
+            </a:r>
+          </a:p>
+          <a:p>
+            <a:pPr lvl="0" indent="0" marL="1270000">
+              <a:buNone/>
+            </a:pPr>
+            <a:r>
+              <a:rPr sz="2000">
+                <a:latin typeface="Courier"/>
+              </a:rPr>
+              <a:t>distinct()</a:t>
+            </a:r>
             <a:r>
               <a:rPr sz="2000"/>
-              <a:t>Mean, median, variance, SD, SE</a:t>
-            </a:r>
-          </a:p>
-          <a:p>
-            <a:pPr lvl="0"/>
+              <a:t> only catches </a:t>
+            </a:r>
+            <a:r>
+              <a:rPr sz="2000" i="1"/>
+              <a:t>exact</a:t>
+            </a:r>
             <a:r>
               <a:rPr sz="2000"/>
-              <a:t>The </a:t>
+              <a:t> duplicate rows. A typo’d duplicate (</a:t>
             </a:r>
             <a:r>
               <a:rPr sz="2000">
                 <a:latin typeface="Courier"/>
               </a:rPr>
-              <a:t>length()</a:t>
+              <a:t>John</a:t>
             </a:r>
             <a:r>
               <a:rPr sz="2000"/>
-              <a:t> trap and the </a:t>
+              <a:t> vs </a:t>
             </a:r>
             <a:r>
               <a:rPr sz="2000">
                 <a:latin typeface="Courier"/>
               </a:rPr>
-              <a:t>sum(!is.na())</a:t>
+              <a:t>john</a:t>
             </a:r>
             <a:r>
               <a:rPr sz="2000"/>
-              <a:t> fix</a:t>
-            </a:r>
-          </a:p>
-          <a:p>
-            <a:pPr lvl="0"/>
-            <a:r>
-              <a:rPr sz="2000">
-                <a:latin typeface="Courier"/>
-              </a:rPr>
-              <a:t>group_by()</a:t>
-            </a:r>
-            <a:r>
-              <a:rPr sz="2000"/>
-              <a:t> + </a:t>
-            </a:r>
-            <a:r>
-              <a:rPr sz="2000">
-                <a:latin typeface="Courier"/>
-              </a:rPr>
-              <a:t>summarize()</a:t>
-            </a:r>
-            <a:r>
-              <a:rPr sz="2000"/>
-              <a:t> for tidy group comparisons</a:t>
+              <a:t>) slips right through — always eyeball your data too.</a:t>
             </a:r>
           </a:p>
         </p:txBody>
@@ -7591,6 +7728,868 @@
             </a:pPr>
             <a:r>
               <a:rPr/>
+              <a:t>Part 4 · Saving Your Work</a:t>
+            </a:r>
+          </a:p>
+        </p:txBody>
+      </p:sp>
+    </p:spTree>
+  </p:cSld>
+</p:sld>
+</file>
+
+<file path=ppt/slides/slide23.xml><?xml version="1.0" encoding="utf-8"?>
+<p:sld xmlns:a="http://schemas.openxmlformats.org/drawingml/2006/main" xmlns:r="http://schemas.openxmlformats.org/officeDocument/2006/relationships" xmlns:p="http://schemas.openxmlformats.org/presentationml/2006/main">
+  <p:cSld>
+    <p:spTree>
+      <p:nvGrpSpPr>
+        <p:cNvPr id="1" name=""/>
+        <p:cNvGrpSpPr/>
+        <p:nvPr/>
+      </p:nvGrpSpPr>
+      <p:grpSpPr>
+        <a:xfrm>
+          <a:off x="0" y="0"/>
+          <a:ext cx="0" cy="0"/>
+          <a:chOff x="0" y="0"/>
+          <a:chExt cx="0" cy="0"/>
+        </a:xfrm>
+      </p:grpSpPr>
+      <p:sp>
+        <p:nvSpPr>
+          <p:cNvPr id="2" name="Title 1"/>
+          <p:cNvSpPr>
+            <a:spLocks noGrp="1"/>
+          </p:cNvSpPr>
+          <p:nvPr>
+            <p:ph type="title"/>
+          </p:nvPr>
+        </p:nvSpPr>
+        <p:spPr>
+          <a:xfrm>
+            <a:off x="0" y="0"/>
+            <a:ext cx="9144000" cy="602780"/>
+          </a:xfrm>
+          <a:solidFill>
+            <a:srgbClr val="70121D"/>
+          </a:solidFill>
+        </p:spPr>
+        <p:txBody>
+          <a:bodyPr/>
+          <a:lstStyle/>
+          <a:p>
+            <a:pPr lvl="0" indent="0" marL="0">
+              <a:buNone/>
+            </a:pPr>
+            <a:r>
+              <a:rPr>
+                <a:latin typeface="Courier"/>
+              </a:rPr>
+              <a:t>write_csv()</a:t>
+            </a:r>
+            <a:r>
+              <a:rPr/>
+              <a:t> — the mirror image of </a:t>
+            </a:r>
+            <a:r>
+              <a:rPr>
+                <a:latin typeface="Courier"/>
+              </a:rPr>
+              <a:t>read_csv()</a:t>
+            </a:r>
+          </a:p>
+        </p:txBody>
+      </p:sp>
+      <p:sp>
+        <p:nvSpPr>
+          <p:cNvPr id="3" name="Content Placeholder 2"/>
+          <p:cNvSpPr>
+            <a:spLocks noGrp="1"/>
+          </p:cNvSpPr>
+          <p:nvPr>
+            <p:ph idx="1" sz="half"/>
+          </p:nvPr>
+        </p:nvSpPr>
+        <p:spPr/>
+        <p:txBody>
+          <a:bodyPr/>
+          <a:lstStyle/>
+          <a:p>
+            <a:pPr lvl="0" indent="0">
+              <a:buNone/>
+            </a:pPr>
+            <a:r>
+              <a:rPr>
+                <a:solidFill>
+                  <a:srgbClr val="4758AB"/>
+                </a:solidFill>
+                <a:latin typeface="Courier"/>
+              </a:rPr>
+              <a:t>write_csv</a:t>
+            </a:r>
+            <a:r>
+              <a:rPr>
+                <a:solidFill>
+                  <a:srgbClr val="003B4F"/>
+                </a:solidFill>
+                <a:latin typeface="Courier"/>
+              </a:rPr>
+              <a:t>(pine_wrangled_df, </a:t>
+            </a:r>
+            <a:r>
+              <a:rPr>
+                <a:solidFill>
+                  <a:srgbClr val="20794D"/>
+                </a:solidFill>
+                <a:latin typeface="Courier"/>
+              </a:rPr>
+              <a:t>"data/pine_needles_wrangled.csv"</a:t>
+            </a:r>
+            <a:r>
+              <a:rPr>
+                <a:solidFill>
+                  <a:srgbClr val="003B4F"/>
+                </a:solidFill>
+                <a:latin typeface="Courier"/>
+              </a:rPr>
+              <a:t>)</a:t>
+            </a:r>
+          </a:p>
+          <a:p>
+            <a:pPr lvl="0" indent="0" marL="1270000">
+              <a:buNone/>
+            </a:pPr>
+            <a:r>
+              <a:rPr sz="2000" b="1"/>
+              <a:t>Important</a:t>
+            </a:r>
+          </a:p>
+          <a:p>
+            <a:pPr lvl="0" indent="0" marL="1270000">
+              <a:buNone/>
+            </a:pPr>
+            <a:r>
+              <a:rPr sz="2000" b="1"/>
+              <a:t>Raw data is read-only.</a:t>
+            </a:r>
+            <a:r>
+              <a:rPr sz="2000"/>
+              <a:t> </a:t>
+            </a:r>
+            <a:r>
+              <a:rPr sz="2000">
+                <a:latin typeface="Courier"/>
+              </a:rPr>
+              <a:t>pine_needles.csv</a:t>
+            </a:r>
+            <a:r>
+              <a:rPr sz="2000"/>
+              <a:t> never gets overwritten — </a:t>
+            </a:r>
+            <a:r>
+              <a:rPr sz="2000">
+                <a:latin typeface="Courier"/>
+              </a:rPr>
+              <a:t>write_csv()</a:t>
+            </a:r>
+            <a:r>
+              <a:rPr sz="2000"/>
+              <a:t> always creates a </a:t>
+            </a:r>
+            <a:r>
+              <a:rPr sz="2000" b="1"/>
+              <a:t>new, separate file</a:t>
+            </a:r>
+            <a:r>
+              <a:rPr sz="2000"/>
+              <a:t>. That’s why we named it </a:t>
+            </a:r>
+            <a:r>
+              <a:rPr sz="2000">
+                <a:latin typeface="Courier"/>
+              </a:rPr>
+              <a:t>pine_needles_wrangled.csv</a:t>
+            </a:r>
+            <a:r>
+              <a:rPr sz="2000"/>
+              <a:t>, not </a:t>
+            </a:r>
+            <a:r>
+              <a:rPr sz="2000">
+                <a:latin typeface="Courier"/>
+              </a:rPr>
+              <a:t>pine_needles.csv</a:t>
+            </a:r>
+            <a:r>
+              <a:rPr sz="2000"/>
+              <a:t>.</a:t>
+            </a:r>
+          </a:p>
+        </p:txBody>
+      </p:sp>
+      <p:sp>
+        <p:nvSpPr>
+          <p:cNvPr id="4" name="Content Placeholder 3"/>
+          <p:cNvSpPr>
+            <a:spLocks noGrp="1"/>
+          </p:cNvSpPr>
+          <p:nvPr>
+            <p:ph idx="2" sz="half"/>
+          </p:nvPr>
+        </p:nvSpPr>
+        <p:spPr/>
+        <p:txBody>
+          <a:bodyPr/>
+          <a:lstStyle/>
+          <a:p>
+            <a:pPr lvl="0" indent="0" marL="1270000">
+              <a:buNone/>
+            </a:pPr>
+            <a:r>
+              <a:rPr sz="2000" b="1"/>
+              <a:t>Note</a:t>
+            </a:r>
+          </a:p>
+          <a:p>
+            <a:pPr lvl="0" indent="0" marL="1270000">
+              <a:buNone/>
+            </a:pPr>
+            <a:r>
+              <a:rPr sz="2000" b="1"/>
+              <a:t>✅ Key idea</a:t>
+            </a:r>
+          </a:p>
+          <a:p>
+            <a:pPr lvl="0" indent="0" marL="1270000">
+              <a:buNone/>
+            </a:pPr>
+            <a:r>
+              <a:rPr sz="2000"/>
+              <a:t>If you can’t reproduce a result from raw data + a script, something’s wrong with the script — never with the raw file. Keeping raw data untouched is what makes that guarantee possible.</a:t>
+            </a:r>
+          </a:p>
+        </p:txBody>
+      </p:sp>
+    </p:spTree>
+  </p:cSld>
+</p:sld>
+</file>
+
+<file path=ppt/slides/slide24.xml><?xml version="1.0" encoding="utf-8"?>
+<p:sld xmlns:a="http://schemas.openxmlformats.org/drawingml/2006/main" xmlns:r="http://schemas.openxmlformats.org/officeDocument/2006/relationships" xmlns:p="http://schemas.openxmlformats.org/presentationml/2006/main">
+  <p:cSld>
+    <p:spTree>
+      <p:nvGrpSpPr>
+        <p:cNvPr id="1" name=""/>
+        <p:cNvGrpSpPr/>
+        <p:nvPr/>
+      </p:nvGrpSpPr>
+      <p:grpSpPr>
+        <a:xfrm>
+          <a:off x="0" y="0"/>
+          <a:ext cx="0" cy="0"/>
+          <a:chOff x="0" y="0"/>
+          <a:chExt cx="0" cy="0"/>
+        </a:xfrm>
+      </p:grpSpPr>
+      <p:sp>
+        <p:nvSpPr>
+          <p:cNvPr id="2" name="Title 1"/>
+          <p:cNvSpPr>
+            <a:spLocks noGrp="1"/>
+          </p:cNvSpPr>
+          <p:nvPr>
+            <p:ph type="title"/>
+          </p:nvPr>
+        </p:nvSpPr>
+        <p:spPr>
+          <a:xfrm>
+            <a:off x="0" y="0"/>
+            <a:ext cx="9144000" cy="602780"/>
+          </a:xfrm>
+          <a:solidFill>
+            <a:srgbClr val="70121D"/>
+          </a:solidFill>
+        </p:spPr>
+        <p:txBody>
+          <a:bodyPr/>
+          <a:lstStyle/>
+          <a:p>
+            <a:pPr lvl="0" indent="0" marL="0">
+              <a:buNone/>
+            </a:pPr>
+            <a:r>
+              <a:rPr/>
+              <a:t>Naming your saved files</a:t>
+            </a:r>
+          </a:p>
+        </p:txBody>
+      </p:sp>
+      <p:sp>
+        <p:nvSpPr>
+          <p:cNvPr id="3" name="Content Placeholder 2"/>
+          <p:cNvSpPr>
+            <a:spLocks noGrp="1"/>
+          </p:cNvSpPr>
+          <p:nvPr>
+            <p:ph idx="1" sz="half"/>
+          </p:nvPr>
+        </p:nvSpPr>
+        <p:spPr/>
+        <p:txBody>
+          <a:bodyPr/>
+          <a:lstStyle/>
+          <a:p>
+            <a:pPr lvl="0"/>
+            <a:r>
+              <a:rPr/>
+              <a:t>Never overwrite </a:t>
+            </a:r>
+            <a:r>
+              <a:rPr>
+                <a:latin typeface="Courier"/>
+              </a:rPr>
+              <a:t>data/pine_needles.csv</a:t>
+            </a:r>
+            <a:r>
+              <a:rPr/>
+              <a:t> — that file is raw</a:t>
+            </a:r>
+          </a:p>
+          <a:p>
+            <a:pPr lvl="0"/>
+            <a:r>
+              <a:rPr/>
+              <a:t>Save wrangled output with a name that says what happened: </a:t>
+            </a:r>
+            <a:r>
+              <a:rPr>
+                <a:latin typeface="Courier"/>
+              </a:rPr>
+              <a:t>pine_needles_wrangled.csv</a:t>
+            </a:r>
+            <a:r>
+              <a:rPr/>
+              <a:t>, not </a:t>
+            </a:r>
+            <a:r>
+              <a:rPr>
+                <a:latin typeface="Courier"/>
+              </a:rPr>
+              <a:t>pine_needles2.csv</a:t>
+            </a:r>
+            <a:r>
+              <a:rPr/>
+              <a:t> or </a:t>
+            </a:r>
+            <a:r>
+              <a:rPr>
+                <a:latin typeface="Courier"/>
+              </a:rPr>
+              <a:t>final.csv</a:t>
+            </a:r>
+          </a:p>
+          <a:p>
+            <a:pPr lvl="0"/>
+            <a:r>
+              <a:rPr/>
+              <a:t>Anyone re-running your script from scratch should get the exact same output file</a:t>
+            </a:r>
+          </a:p>
+          <a:p>
+            <a:pPr lvl="0" indent="0" marL="1270000">
+              <a:buNone/>
+            </a:pPr>
+            <a:r>
+              <a:rPr sz="2000" b="1"/>
+              <a:t>Warning</a:t>
+            </a:r>
+          </a:p>
+          <a:p>
+            <a:pPr lvl="0" indent="0" marL="1270000">
+              <a:buNone/>
+            </a:pPr>
+            <a:r>
+              <a:rPr sz="2000" b="1"/>
+              <a:t>⚠️ Watch out!</a:t>
+            </a:r>
+          </a:p>
+          <a:p>
+            <a:pPr lvl="0" indent="0" marL="1270000">
+              <a:buNone/>
+            </a:pPr>
+            <a:r>
+              <a:rPr sz="2000">
+                <a:latin typeface="Courier"/>
+              </a:rPr>
+              <a:t>final.csv</a:t>
+            </a:r>
+            <a:r>
+              <a:rPr sz="2000"/>
+              <a:t>, </a:t>
+            </a:r>
+            <a:r>
+              <a:rPr sz="2000">
+                <a:latin typeface="Courier"/>
+              </a:rPr>
+              <a:t>final_v2.csv</a:t>
+            </a:r>
+            <a:r>
+              <a:rPr sz="2000"/>
+              <a:t>, </a:t>
+            </a:r>
+            <a:r>
+              <a:rPr sz="2000">
+                <a:latin typeface="Courier"/>
+              </a:rPr>
+              <a:t>final_FINAL.csv</a:t>
+            </a:r>
+            <a:r>
+              <a:rPr sz="2000"/>
+              <a:t> — this is exactly the mess a project folder with relative paths and clear names is meant to prevent.</a:t>
+            </a:r>
+          </a:p>
+        </p:txBody>
+      </p:sp>
+      <p:sp>
+        <p:nvSpPr>
+          <p:cNvPr id="4" name="Content Placeholder 3"/>
+          <p:cNvSpPr>
+            <a:spLocks noGrp="1"/>
+          </p:cNvSpPr>
+          <p:nvPr>
+            <p:ph idx="2" sz="half"/>
+          </p:nvPr>
+        </p:nvSpPr>
+        <p:spPr/>
+        <p:txBody>
+          <a:bodyPr/>
+          <a:lstStyle/>
+          <a:p>
+            <a:pPr lvl="0" indent="0" marL="1270000">
+              <a:buNone/>
+            </a:pPr>
+            <a:r>
+              <a:rPr sz="2000" b="1"/>
+              <a:t>Tip</a:t>
+            </a:r>
+          </a:p>
+          <a:p>
+            <a:pPr lvl="0" indent="0" marL="1270000">
+              <a:buNone/>
+            </a:pPr>
+            <a:r>
+              <a:rPr sz="2000" b="1"/>
+              <a:t>🖐 Try it yourself</a:t>
+            </a:r>
+          </a:p>
+          <a:p>
+            <a:pPr lvl="0" indent="0" marL="1270000">
+              <a:buNone/>
+            </a:pPr>
+            <a:r>
+              <a:rPr sz="2000"/>
+              <a:t>Predict what </a:t>
+            </a:r>
+            <a:r>
+              <a:rPr sz="2000">
+                <a:latin typeface="Courier"/>
+              </a:rPr>
+              <a:t>write_csv(pine_wrangled_df, "data/pine_needles_wrangled.csv")</a:t>
+            </a:r>
+            <a:r>
+              <a:rPr sz="2000"/>
+              <a:t> does if that file doesn’t exist yet. What if it already does?</a:t>
+            </a:r>
+          </a:p>
+        </p:txBody>
+      </p:sp>
+    </p:spTree>
+  </p:cSld>
+</p:sld>
+</file>
+
+<file path=ppt/slides/slide25.xml><?xml version="1.0" encoding="utf-8"?>
+<p:sld xmlns:a="http://schemas.openxmlformats.org/drawingml/2006/main" xmlns:r="http://schemas.openxmlformats.org/officeDocument/2006/relationships" xmlns:p="http://schemas.openxmlformats.org/presentationml/2006/main">
+  <p:cSld>
+    <p:spTree>
+      <p:nvGrpSpPr>
+        <p:cNvPr id="1" name=""/>
+        <p:cNvGrpSpPr/>
+        <p:nvPr/>
+      </p:nvGrpSpPr>
+      <p:grpSpPr>
+        <a:xfrm>
+          <a:off x="0" y="0"/>
+          <a:ext cx="0" cy="0"/>
+          <a:chOff x="0" y="0"/>
+          <a:chExt cx="0" cy="0"/>
+        </a:xfrm>
+      </p:grpSpPr>
+      <p:sp>
+        <p:nvSpPr>
+          <p:cNvPr id="2" name="Title 1"/>
+          <p:cNvSpPr>
+            <a:spLocks noGrp="1"/>
+          </p:cNvSpPr>
+          <p:nvPr>
+            <p:ph type="title"/>
+          </p:nvPr>
+        </p:nvSpPr>
+        <p:spPr>
+          <a:xfrm>
+            <a:off x="0" y="0"/>
+            <a:ext cx="9144000" cy="602780"/>
+          </a:xfrm>
+          <a:solidFill>
+            <a:srgbClr val="70121D"/>
+          </a:solidFill>
+        </p:spPr>
+        <p:txBody>
+          <a:bodyPr/>
+          <a:lstStyle/>
+          <a:p>
+            <a:pPr lvl="0" indent="0" marL="0">
+              <a:buNone/>
+            </a:pPr>
+            <a:r>
+              <a:rPr/>
+              <a:t>Wrap-up</a:t>
+            </a:r>
+          </a:p>
+        </p:txBody>
+      </p:sp>
+      <p:sp>
+        <p:nvSpPr>
+          <p:cNvPr id="3" name="Content Placeholder 2"/>
+          <p:cNvSpPr>
+            <a:spLocks noGrp="1"/>
+          </p:cNvSpPr>
+          <p:nvPr>
+            <p:ph idx="1" sz="half"/>
+          </p:nvPr>
+        </p:nvSpPr>
+        <p:spPr/>
+        <p:txBody>
+          <a:bodyPr/>
+          <a:lstStyle/>
+          <a:p>
+            <a:pPr lvl="0" indent="0" marL="0">
+              <a:buNone/>
+            </a:pPr>
+            <a:r>
+              <a:rPr/>
+              <a:t>Today you:</a:t>
+            </a:r>
+          </a:p>
+          <a:p>
+            <a:pPr lvl="0"/>
+            <a:r>
+              <a:rPr/>
+              <a:t>Imported the same data from a </a:t>
+            </a:r>
+            <a:r>
+              <a:rPr>
+                <a:latin typeface="Courier"/>
+              </a:rPr>
+              <a:t>.csv</a:t>
+            </a:r>
+            <a:r>
+              <a:rPr/>
+              <a:t> </a:t>
+            </a:r>
+            <a:r>
+              <a:rPr b="1"/>
+              <a:t>and</a:t>
+            </a:r>
+            <a:r>
+              <a:rPr/>
+              <a:t> an </a:t>
+            </a:r>
+            <a:r>
+              <a:rPr>
+                <a:latin typeface="Courier"/>
+              </a:rPr>
+              <a:t>.xlsx</a:t>
+            </a:r>
+          </a:p>
+          <a:p>
+            <a:pPr lvl="0"/>
+            <a:r>
+              <a:rPr/>
+              <a:t>Used </a:t>
+            </a:r>
+            <a:r>
+              <a:rPr>
+                <a:latin typeface="Courier"/>
+              </a:rPr>
+              <a:t>filter()</a:t>
+            </a:r>
+            <a:r>
+              <a:rPr/>
+              <a:t>, </a:t>
+            </a:r>
+            <a:r>
+              <a:rPr>
+                <a:latin typeface="Courier"/>
+              </a:rPr>
+              <a:t>select()</a:t>
+            </a:r>
+            <a:r>
+              <a:rPr/>
+              <a:t>, </a:t>
+            </a:r>
+            <a:r>
+              <a:rPr>
+                <a:latin typeface="Courier"/>
+              </a:rPr>
+              <a:t>mutate()</a:t>
+            </a:r>
+            <a:r>
+              <a:rPr/>
+              <a:t>, and </a:t>
+            </a:r>
+            <a:r>
+              <a:rPr>
+                <a:latin typeface="Courier"/>
+              </a:rPr>
+              <a:t>arrange()</a:t>
+            </a:r>
+            <a:r>
+              <a:rPr/>
+              <a:t> — and chained them into a pipeline</a:t>
+            </a:r>
+          </a:p>
+          <a:p>
+            <a:pPr lvl="0"/>
+            <a:r>
+              <a:rPr/>
+              <a:t>Converted units and log-transformed a column with </a:t>
+            </a:r>
+            <a:r>
+              <a:rPr>
+                <a:latin typeface="Courier"/>
+              </a:rPr>
+              <a:t>mutate()</a:t>
+            </a:r>
+          </a:p>
+          <a:p>
+            <a:pPr lvl="0"/>
+            <a:r>
+              <a:rPr/>
+              <a:t>Caught and removed duplicate rows with </a:t>
+            </a:r>
+            <a:r>
+              <a:rPr>
+                <a:latin typeface="Courier"/>
+              </a:rPr>
+              <a:t>distinct()</a:t>
+            </a:r>
+          </a:p>
+          <a:p>
+            <a:pPr lvl="0"/>
+            <a:r>
+              <a:rPr/>
+              <a:t>Saved a new file with </a:t>
+            </a:r>
+            <a:r>
+              <a:rPr>
+                <a:latin typeface="Courier"/>
+              </a:rPr>
+              <a:t>write_csv()</a:t>
+            </a:r>
+            <a:r>
+              <a:rPr/>
+              <a:t> without touching the raw data</a:t>
+            </a:r>
+          </a:p>
+          <a:p>
+            <a:pPr lvl="0" indent="0" marL="1270000">
+              <a:buNone/>
+            </a:pPr>
+            <a:r>
+              <a:rPr sz="2000" b="1"/>
+              <a:t>Tip</a:t>
+            </a:r>
+          </a:p>
+          <a:p>
+            <a:pPr lvl="0" indent="0" marL="1270000">
+              <a:buNone/>
+            </a:pPr>
+            <a:r>
+              <a:rPr sz="2000" b="1"/>
+              <a:t>🖐 Before next class</a:t>
+            </a:r>
+          </a:p>
+          <a:p>
+            <a:pPr lvl="0" indent="0" marL="1270000">
+              <a:buNone/>
+            </a:pPr>
+            <a:r>
+              <a:rPr sz="2000"/>
+              <a:t>Finish the worksheet: wrangle </a:t>
+            </a:r>
+            <a:r>
+              <a:rPr sz="2000">
+                <a:latin typeface="Courier"/>
+              </a:rPr>
+              <a:t>pine_needles.csv</a:t>
+            </a:r>
+            <a:r>
+              <a:rPr sz="2000"/>
+              <a:t> into a new data frame with at least one unit conversion and one log transform, then save it with </a:t>
+            </a:r>
+            <a:r>
+              <a:rPr sz="2000">
+                <a:latin typeface="Courier"/>
+              </a:rPr>
+              <a:t>write_csv()</a:t>
+            </a:r>
+            <a:r>
+              <a:rPr sz="2000"/>
+              <a:t>.</a:t>
+            </a:r>
+          </a:p>
+        </p:txBody>
+      </p:sp>
+      <p:sp>
+        <p:nvSpPr>
+          <p:cNvPr id="4" name="Content Placeholder 3"/>
+          <p:cNvSpPr>
+            <a:spLocks noGrp="1"/>
+          </p:cNvSpPr>
+          <p:nvPr>
+            <p:ph idx="2" sz="half"/>
+          </p:nvPr>
+        </p:nvSpPr>
+        <p:spPr/>
+        <p:txBody>
+          <a:bodyPr/>
+          <a:lstStyle/>
+          <a:p>
+            <a:pPr lvl="0" indent="0" marL="1270000">
+              <a:buNone/>
+            </a:pPr>
+            <a:r>
+              <a:rPr sz="2000" b="1"/>
+              <a:t>Note</a:t>
+            </a:r>
+          </a:p>
+          <a:p>
+            <a:pPr lvl="0" indent="0" marL="1270000">
+              <a:buNone/>
+            </a:pPr>
+            <a:r>
+              <a:rPr sz="2000" b="1"/>
+              <a:t>Up next — Module 3</a:t>
+            </a:r>
+          </a:p>
+          <a:p>
+            <a:pPr lvl="0"/>
+            <a:r>
+              <a:rPr sz="2000"/>
+              <a:t>Mean, median, variance, SD, SE</a:t>
+            </a:r>
+          </a:p>
+          <a:p>
+            <a:pPr lvl="0"/>
+            <a:r>
+              <a:rPr sz="2000"/>
+              <a:t>The </a:t>
+            </a:r>
+            <a:r>
+              <a:rPr sz="2000">
+                <a:latin typeface="Courier"/>
+              </a:rPr>
+              <a:t>length()</a:t>
+            </a:r>
+            <a:r>
+              <a:rPr sz="2000"/>
+              <a:t> trap and the </a:t>
+            </a:r>
+            <a:r>
+              <a:rPr sz="2000">
+                <a:latin typeface="Courier"/>
+              </a:rPr>
+              <a:t>sum(!is.na())</a:t>
+            </a:r>
+            <a:r>
+              <a:rPr sz="2000"/>
+              <a:t> fix</a:t>
+            </a:r>
+          </a:p>
+          <a:p>
+            <a:pPr lvl="0"/>
+            <a:r>
+              <a:rPr sz="2000">
+                <a:latin typeface="Courier"/>
+              </a:rPr>
+              <a:t>group_by()</a:t>
+            </a:r>
+            <a:r>
+              <a:rPr sz="2000"/>
+              <a:t> + </a:t>
+            </a:r>
+            <a:r>
+              <a:rPr sz="2000">
+                <a:latin typeface="Courier"/>
+              </a:rPr>
+              <a:t>summarize()</a:t>
+            </a:r>
+            <a:r>
+              <a:rPr sz="2000"/>
+              <a:t> for tidy group comparisons</a:t>
+            </a:r>
+          </a:p>
+        </p:txBody>
+      </p:sp>
+    </p:spTree>
+  </p:cSld>
+</p:sld>
+</file>
+
+<file path=ppt/slides/slide26.xml><?xml version="1.0" encoding="utf-8"?>
+<p:sld xmlns:a="http://schemas.openxmlformats.org/drawingml/2006/main" xmlns:r="http://schemas.openxmlformats.org/officeDocument/2006/relationships" xmlns:p="http://schemas.openxmlformats.org/presentationml/2006/main">
+  <p:cSld>
+    <p:spTree>
+      <p:nvGrpSpPr>
+        <p:cNvPr id="1" name=""/>
+        <p:cNvGrpSpPr/>
+        <p:nvPr/>
+      </p:nvGrpSpPr>
+      <p:grpSpPr>
+        <a:xfrm>
+          <a:off x="0" y="0"/>
+          <a:ext cx="0" cy="0"/>
+          <a:chOff x="0" y="0"/>
+          <a:chExt cx="0" cy="0"/>
+        </a:xfrm>
+      </p:grpSpPr>
+      <p:sp>
+        <p:nvSpPr>
+          <p:cNvPr id="2" name="Title 1"/>
+          <p:cNvSpPr>
+            <a:spLocks noGrp="1"/>
+          </p:cNvSpPr>
+          <p:nvPr>
+            <p:ph type="title"/>
+          </p:nvPr>
+        </p:nvSpPr>
+        <p:spPr>
+          <a:xfrm>
+            <a:off x="0" y="0"/>
+            <a:ext cx="9144000" cy="582780"/>
+          </a:xfrm>
+        </p:spPr>
+        <p:txBody>
+          <a:bodyPr/>
+          <a:lstStyle/>
+          <a:p>
+            <a:pPr lvl="0" indent="0" marL="0">
+              <a:buNone/>
+            </a:pPr>
+            <a:r>
+              <a:rPr/>
               <a:t>Getting unstuck</a:t>
             </a:r>
           </a:p>
@@ -7806,34 +8805,6 @@
           </a:p>
         </p:txBody>
       </p:sp>
-      <p:sp>
-        <p:nvSpPr>
-          <p:cNvPr id="3" name="Content Placeholder 2"/>
-          <p:cNvSpPr>
-            <a:spLocks noGrp="1"/>
-          </p:cNvSpPr>
-          <p:nvPr>
-            <p:ph idx="1"/>
-          </p:nvPr>
-        </p:nvSpPr>
-        <p:spPr/>
-        <p:txBody>
-          <a:bodyPr/>
-          <a:lstStyle/>
-          <a:p>
-            <a:pPr lvl="0" indent="0" marL="0">
-              <a:spcBef>
-                <a:spcPts val="3000"/>
-              </a:spcBef>
-              <a:buNone/>
-            </a:pPr>
-            <a:r>
-              <a:rPr b="1"/>
-              <a:t>The same data, two file formats</a:t>
-            </a:r>
-          </a:p>
-        </p:txBody>
-      </p:sp>
     </p:spTree>
   </p:cSld>
 </p:sld>
@@ -7858,6 +8829,39 @@
       </p:grpSpPr>
       <p:sp>
         <p:nvSpPr>
+          <p:cNvPr id="2" name="Title 1"/>
+          <p:cNvSpPr>
+            <a:spLocks noGrp="1"/>
+          </p:cNvSpPr>
+          <p:nvPr>
+            <p:ph type="title"/>
+          </p:nvPr>
+        </p:nvSpPr>
+        <p:spPr>
+          <a:xfrm>
+            <a:off x="0" y="0"/>
+            <a:ext cx="9144000" cy="602780"/>
+          </a:xfrm>
+          <a:solidFill>
+            <a:srgbClr val="70121D"/>
+          </a:solidFill>
+        </p:spPr>
+        <p:txBody>
+          <a:bodyPr/>
+          <a:lstStyle/>
+          <a:p>
+            <a:pPr lvl="0" indent="0" marL="0">
+              <a:buNone/>
+            </a:pPr>
+            <a:r>
+              <a:rPr/>
+              <a:t>The same data, two file formats</a:t>
+            </a:r>
+          </a:p>
+        </p:txBody>
+      </p:sp>
+      <p:sp>
+        <p:nvSpPr>
           <p:cNvPr id="3" name="Content Placeholder 2"/>
           <p:cNvSpPr>
             <a:spLocks noGrp="1"/>
@@ -8239,28 +9243,314 @@
       </p:grpSpPr>
       <p:sp>
         <p:nvSpPr>
-          <p:cNvPr id="3" name="Content Placeholder 2"/>
-          <p:cNvSpPr>
-            <a:spLocks noGrp="1"/>
-          </p:cNvSpPr>
-          <p:nvPr>
-            <p:ph idx="1"/>
-          </p:nvPr>
-        </p:nvSpPr>
-        <p:spPr/>
+          <p:cNvPr id="2" name="Title 1"/>
+          <p:cNvSpPr>
+            <a:spLocks noGrp="1"/>
+          </p:cNvSpPr>
+          <p:nvPr>
+            <p:ph type="title"/>
+          </p:nvPr>
+        </p:nvSpPr>
+        <p:spPr>
+          <a:xfrm>
+            <a:off x="0" y="0"/>
+            <a:ext cx="9144000" cy="602780"/>
+          </a:xfrm>
+          <a:solidFill>
+            <a:srgbClr val="70121D"/>
+          </a:solidFill>
+        </p:spPr>
         <p:txBody>
           <a:bodyPr/>
           <a:lstStyle/>
           <a:p>
             <a:pPr lvl="0" indent="0" marL="0">
-              <a:spcBef>
-                <a:spcPts val="3000"/>
-              </a:spcBef>
-              <a:buNone/>
-            </a:pPr>
-            <a:r>
-              <a:rPr b="1"/>
+              <a:buNone/>
+            </a:pPr>
+            <a:r>
+              <a:rPr/>
               <a:t>Look before you trust it — every time</a:t>
+            </a:r>
+          </a:p>
+        </p:txBody>
+      </p:sp>
+      <p:sp>
+        <p:nvSpPr>
+          <p:cNvPr id="3" name="Content Placeholder 2"/>
+          <p:cNvSpPr>
+            <a:spLocks noGrp="1"/>
+          </p:cNvSpPr>
+          <p:nvPr>
+            <p:ph idx="1" sz="half"/>
+          </p:nvPr>
+        </p:nvSpPr>
+        <p:spPr/>
+        <p:txBody>
+          <a:bodyPr/>
+          <a:lstStyle/>
+          <a:p>
+            <a:pPr lvl="0" indent="0">
+              <a:buNone/>
+            </a:pPr>
+            <a:r>
+              <a:rPr>
+                <a:solidFill>
+                  <a:srgbClr val="4758AB"/>
+                </a:solidFill>
+                <a:latin typeface="Courier"/>
+              </a:rPr>
+              <a:t>glimpse</a:t>
+            </a:r>
+            <a:r>
+              <a:rPr>
+                <a:solidFill>
+                  <a:srgbClr val="003B4F"/>
+                </a:solidFill>
+                <a:latin typeface="Courier"/>
+              </a:rPr>
+              <a:t>(pine_csv_df)</a:t>
+            </a:r>
+          </a:p>
+          <a:p>
+            <a:pPr lvl="0" indent="0">
+              <a:buNone/>
+            </a:pPr>
+            <a:r>
+              <a:rPr>
+                <a:latin typeface="Courier"/>
+              </a:rPr>
+              <a:t>Rows: 48
+Columns: 6
+$ date      &lt;chr&gt; "3/20/25", "3/20/25", "3/20/25", "3/20/25", "3/20/25", "3/20…
+$ group     &lt;chr&gt; "cephalopods", "cephalopods", "cephalopods", "cephalopods", …
+$ n_s       &lt;chr&gt; "n", "n", "n", "n", "n", "n", "s", "s", "s", "s", "s", "s", …
+$ wind      &lt;chr&gt; "lee", "lee", "lee", "lee", "lee", "lee", "wind", "wind", "w…
+$ tree_no   &lt;dbl&gt; 1, 1, 1, 1, 1, 1, 1, 1, 1, 1, 1, 1, 2, 2, 2, 2, 2, 2, 2, 2, …
+$ length_mm &lt;dbl&gt; 20, 21, 23, 25, 21, 16, 15, 16, 14, 17, 13, 15, 19, 18, 20, …</a:t>
+            </a:r>
+          </a:p>
+          <a:p>
+            <a:pPr lvl="0" indent="0">
+              <a:buNone/>
+            </a:pPr>
+            <a:r>
+              <a:rPr>
+                <a:solidFill>
+                  <a:srgbClr val="4758AB"/>
+                </a:solidFill>
+                <a:latin typeface="Courier"/>
+              </a:rPr>
+              <a:t>dim</a:t>
+            </a:r>
+            <a:r>
+              <a:rPr>
+                <a:solidFill>
+                  <a:srgbClr val="003B4F"/>
+                </a:solidFill>
+                <a:latin typeface="Courier"/>
+              </a:rPr>
+              <a:t>(pine_csv_df)</a:t>
+            </a:r>
+          </a:p>
+          <a:p>
+            <a:pPr lvl="0" indent="0">
+              <a:buNone/>
+            </a:pPr>
+            <a:r>
+              <a:rPr>
+                <a:latin typeface="Courier"/>
+              </a:rPr>
+              <a:t>[1] 48  6</a:t>
+            </a:r>
+          </a:p>
+          <a:p>
+            <a:pPr lvl="0" indent="0" marL="1270000">
+              <a:buNone/>
+            </a:pPr>
+            <a:r>
+              <a:rPr sz="2000" b="1"/>
+              <a:t>Tip</a:t>
+            </a:r>
+          </a:p>
+          <a:p>
+            <a:pPr lvl="0" indent="0" marL="1270000">
+              <a:buNone/>
+            </a:pPr>
+            <a:r>
+              <a:rPr sz="2000" b="1"/>
+              <a:t>🖐 Notice</a:t>
+            </a:r>
+          </a:p>
+          <a:p>
+            <a:pPr lvl="0" indent="0" marL="1270000">
+              <a:buNone/>
+            </a:pPr>
+            <a:r>
+              <a:rPr sz="2000"/>
+              <a:t>Six columns: </a:t>
+            </a:r>
+            <a:r>
+              <a:rPr sz="2000">
+                <a:latin typeface="Courier"/>
+              </a:rPr>
+              <a:t>date</a:t>
+            </a:r>
+            <a:r>
+              <a:rPr sz="2000"/>
+              <a:t>, </a:t>
+            </a:r>
+            <a:r>
+              <a:rPr sz="2000">
+                <a:latin typeface="Courier"/>
+              </a:rPr>
+              <a:t>group</a:t>
+            </a:r>
+            <a:r>
+              <a:rPr sz="2000"/>
+              <a:t> (field team name), </a:t>
+            </a:r>
+            <a:r>
+              <a:rPr sz="2000">
+                <a:latin typeface="Courier"/>
+              </a:rPr>
+              <a:t>n_s</a:t>
+            </a:r>
+            <a:r>
+              <a:rPr sz="2000"/>
+              <a:t>, </a:t>
+            </a:r>
+            <a:r>
+              <a:rPr sz="2000">
+                <a:latin typeface="Courier"/>
+              </a:rPr>
+              <a:t>wind</a:t>
+            </a:r>
+            <a:r>
+              <a:rPr sz="2000"/>
+              <a:t>, </a:t>
+            </a:r>
+            <a:r>
+              <a:rPr sz="2000">
+                <a:latin typeface="Courier"/>
+              </a:rPr>
+              <a:t>tree_no</a:t>
+            </a:r>
+            <a:r>
+              <a:rPr sz="2000"/>
+              <a:t>, </a:t>
+            </a:r>
+            <a:r>
+              <a:rPr sz="2000">
+                <a:latin typeface="Courier"/>
+              </a:rPr>
+              <a:t>length_mm</a:t>
+            </a:r>
+            <a:r>
+              <a:rPr sz="2000"/>
+              <a:t>. Same structure whether it came from the </a:t>
+            </a:r>
+            <a:r>
+              <a:rPr sz="2000">
+                <a:latin typeface="Courier"/>
+              </a:rPr>
+              <a:t>.csv</a:t>
+            </a:r>
+            <a:r>
+              <a:rPr sz="2000"/>
+              <a:t> or the </a:t>
+            </a:r>
+            <a:r>
+              <a:rPr sz="2000">
+                <a:latin typeface="Courier"/>
+              </a:rPr>
+              <a:t>.xlsx</a:t>
+            </a:r>
+            <a:r>
+              <a:rPr sz="2000"/>
+              <a:t>.</a:t>
+            </a:r>
+          </a:p>
+        </p:txBody>
+      </p:sp>
+      <p:sp>
+        <p:nvSpPr>
+          <p:cNvPr id="4" name="Content Placeholder 3"/>
+          <p:cNvSpPr>
+            <a:spLocks noGrp="1"/>
+          </p:cNvSpPr>
+          <p:nvPr>
+            <p:ph idx="2" sz="half"/>
+          </p:nvPr>
+        </p:nvSpPr>
+        <p:spPr/>
+        <p:txBody>
+          <a:bodyPr/>
+          <a:lstStyle/>
+          <a:p>
+            <a:pPr lvl="0" indent="0" marL="1270000">
+              <a:buNone/>
+            </a:pPr>
+            <a:r>
+              <a:rPr sz="2000" b="1"/>
+              <a:t>Warning</a:t>
+            </a:r>
+          </a:p>
+          <a:p>
+            <a:pPr lvl="0" indent="0" marL="1270000">
+              <a:buNone/>
+            </a:pPr>
+            <a:r>
+              <a:rPr sz="2000" b="1"/>
+              <a:t>⚠️ Watch out!</a:t>
+            </a:r>
+          </a:p>
+          <a:p>
+            <a:pPr lvl="0" indent="0" marL="1270000">
+              <a:buNone/>
+            </a:pPr>
+            <a:r>
+              <a:rPr sz="2000"/>
+              <a:t>Excel loves to turn a plain number column into a date, or a </a:t>
+            </a:r>
+            <a:r>
+              <a:rPr sz="2000">
+                <a:latin typeface="Courier"/>
+              </a:rPr>
+              <a:t>tree_no</a:t>
+            </a:r>
+            <a:r>
+              <a:rPr sz="2000"/>
+              <a:t> like </a:t>
+            </a:r>
+            <a:r>
+              <a:rPr sz="2000">
+                <a:latin typeface="Courier"/>
+              </a:rPr>
+              <a:t>1</a:t>
+            </a:r>
+            <a:r>
+              <a:rPr sz="2000"/>
+              <a:t> into </a:t>
+            </a:r>
+            <a:r>
+              <a:rPr sz="2000">
+                <a:latin typeface="Courier"/>
+              </a:rPr>
+              <a:t>1.0</a:t>
+            </a:r>
+            <a:r>
+              <a:rPr sz="2000"/>
+              <a:t>. Always </a:t>
+            </a:r>
+            <a:r>
+              <a:rPr sz="2000">
+                <a:latin typeface="Courier"/>
+              </a:rPr>
+              <a:t>glimpse()</a:t>
+            </a:r>
+            <a:r>
+              <a:rPr sz="2000"/>
+              <a:t> an Excel import before doing anything else.</a:t>
             </a:r>
           </a:p>
         </p:txBody>
@@ -8289,281 +9579,30 @@
       </p:grpSpPr>
       <p:sp>
         <p:nvSpPr>
-          <p:cNvPr id="3" name="Content Placeholder 2"/>
-          <p:cNvSpPr>
-            <a:spLocks noGrp="1"/>
-          </p:cNvSpPr>
-          <p:nvPr>
-            <p:ph idx="1" sz="half"/>
-          </p:nvPr>
-        </p:nvSpPr>
-        <p:spPr/>
+          <p:cNvPr id="2" name="Title 1"/>
+          <p:cNvSpPr>
+            <a:spLocks noGrp="1"/>
+          </p:cNvSpPr>
+          <p:nvPr>
+            <p:ph type="title"/>
+          </p:nvPr>
+        </p:nvSpPr>
+        <p:spPr>
+          <a:xfrm>
+            <a:off x="0" y="0"/>
+            <a:ext cx="9144000" cy="582780"/>
+          </a:xfrm>
+        </p:spPr>
         <p:txBody>
           <a:bodyPr/>
           <a:lstStyle/>
           <a:p>
-            <a:pPr lvl="0" indent="0">
-              <a:buNone/>
-            </a:pPr>
-            <a:r>
-              <a:rPr>
-                <a:solidFill>
-                  <a:srgbClr val="4758AB"/>
-                </a:solidFill>
-                <a:latin typeface="Courier"/>
-              </a:rPr>
-              <a:t>glimpse</a:t>
-            </a:r>
-            <a:r>
-              <a:rPr>
-                <a:solidFill>
-                  <a:srgbClr val="003B4F"/>
-                </a:solidFill>
-                <a:latin typeface="Courier"/>
-              </a:rPr>
-              <a:t>(pine_csv_df)</a:t>
-            </a:r>
-          </a:p>
-          <a:p>
-            <a:pPr lvl="0" indent="0">
-              <a:buNone/>
-            </a:pPr>
-            <a:r>
-              <a:rPr>
-                <a:latin typeface="Courier"/>
-              </a:rPr>
-              <a:t>Rows: 48
-Columns: 6
-$ date      &lt;chr&gt; "3/20/25", "3/20/25", "3/20/25", "3/20/25", "3/20/25", "3/20…
-$ group     &lt;chr&gt; "cephalopods", "cephalopods", "cephalopods", "cephalopods", …
-$ n_s       &lt;chr&gt; "n", "n", "n", "n", "n", "n", "s", "s", "s", "s", "s", "s", …
-$ wind      &lt;chr&gt; "lee", "lee", "lee", "lee", "lee", "lee", "wind", "wind", "w…
-$ tree_no   &lt;dbl&gt; 1, 1, 1, 1, 1, 1, 1, 1, 1, 1, 1, 1, 2, 2, 2, 2, 2, 2, 2, 2, …
-$ length_mm &lt;dbl&gt; 20, 21, 23, 25, 21, 16, 15, 16, 14, 17, 13, 15, 19, 18, 20, …</a:t>
-            </a:r>
-          </a:p>
-          <a:p>
-            <a:pPr lvl="0" indent="0">
-              <a:buNone/>
-            </a:pPr>
-            <a:r>
-              <a:rPr>
-                <a:solidFill>
-                  <a:srgbClr val="4758AB"/>
-                </a:solidFill>
-                <a:latin typeface="Courier"/>
-              </a:rPr>
-              <a:t>dim</a:t>
-            </a:r>
-            <a:r>
-              <a:rPr>
-                <a:solidFill>
-                  <a:srgbClr val="003B4F"/>
-                </a:solidFill>
-                <a:latin typeface="Courier"/>
-              </a:rPr>
-              <a:t>(pine_csv_df)</a:t>
-            </a:r>
-          </a:p>
-          <a:p>
-            <a:pPr lvl="0" indent="0">
-              <a:buNone/>
-            </a:pPr>
-            <a:r>
-              <a:rPr>
-                <a:latin typeface="Courier"/>
-              </a:rPr>
-              <a:t>[1] 48  6</a:t>
-            </a:r>
-          </a:p>
-          <a:p>
-            <a:pPr lvl="0" indent="0" marL="1270000">
-              <a:buNone/>
-            </a:pPr>
-            <a:r>
-              <a:rPr sz="2000" b="1"/>
-              <a:t>Tip</a:t>
-            </a:r>
-          </a:p>
-          <a:p>
-            <a:pPr lvl="0" indent="0" marL="1270000">
-              <a:buNone/>
-            </a:pPr>
-            <a:r>
-              <a:rPr sz="2000" b="1"/>
-              <a:t>🖐 Notice</a:t>
-            </a:r>
-          </a:p>
-          <a:p>
-            <a:pPr lvl="0" indent="0" marL="1270000">
-              <a:buNone/>
-            </a:pPr>
-            <a:r>
-              <a:rPr sz="2000"/>
-              <a:t>Six columns: </a:t>
-            </a:r>
-            <a:r>
-              <a:rPr sz="2000">
-                <a:latin typeface="Courier"/>
-              </a:rPr>
-              <a:t>date</a:t>
-            </a:r>
-            <a:r>
-              <a:rPr sz="2000"/>
-              <a:t>, </a:t>
-            </a:r>
-            <a:r>
-              <a:rPr sz="2000">
-                <a:latin typeface="Courier"/>
-              </a:rPr>
-              <a:t>group</a:t>
-            </a:r>
-            <a:r>
-              <a:rPr sz="2000"/>
-              <a:t> (field team name), </a:t>
-            </a:r>
-            <a:r>
-              <a:rPr sz="2000">
-                <a:latin typeface="Courier"/>
-              </a:rPr>
-              <a:t>n_s</a:t>
-            </a:r>
-            <a:r>
-              <a:rPr sz="2000"/>
-              <a:t>, </a:t>
-            </a:r>
-            <a:r>
-              <a:rPr sz="2000">
-                <a:latin typeface="Courier"/>
-              </a:rPr>
-              <a:t>wind</a:t>
-            </a:r>
-            <a:r>
-              <a:rPr sz="2000"/>
-              <a:t>, </a:t>
-            </a:r>
-            <a:r>
-              <a:rPr sz="2000">
-                <a:latin typeface="Courier"/>
-              </a:rPr>
-              <a:t>tree_no</a:t>
-            </a:r>
-            <a:r>
-              <a:rPr sz="2000"/>
-              <a:t>, </a:t>
-            </a:r>
-            <a:r>
-              <a:rPr sz="2000">
-                <a:latin typeface="Courier"/>
-              </a:rPr>
-              <a:t>length_mm</a:t>
-            </a:r>
-            <a:r>
-              <a:rPr sz="2000"/>
-              <a:t>. Same structure whether it came from the </a:t>
-            </a:r>
-            <a:r>
-              <a:rPr sz="2000">
-                <a:latin typeface="Courier"/>
-              </a:rPr>
-              <a:t>.csv</a:t>
-            </a:r>
-            <a:r>
-              <a:rPr sz="2000"/>
-              <a:t> or the </a:t>
-            </a:r>
-            <a:r>
-              <a:rPr sz="2000">
-                <a:latin typeface="Courier"/>
-              </a:rPr>
-              <a:t>.xlsx</a:t>
-            </a:r>
-            <a:r>
-              <a:rPr sz="2000"/>
-              <a:t>.</a:t>
-            </a:r>
-          </a:p>
-        </p:txBody>
-      </p:sp>
-      <p:sp>
-        <p:nvSpPr>
-          <p:cNvPr id="4" name="Content Placeholder 3"/>
-          <p:cNvSpPr>
-            <a:spLocks noGrp="1"/>
-          </p:cNvSpPr>
-          <p:nvPr>
-            <p:ph idx="2" sz="half"/>
-          </p:nvPr>
-        </p:nvSpPr>
-        <p:spPr/>
-        <p:txBody>
-          <a:bodyPr/>
-          <a:lstStyle/>
-          <a:p>
-            <a:pPr lvl="0" indent="0" marL="1270000">
-              <a:buNone/>
-            </a:pPr>
-            <a:r>
-              <a:rPr sz="2000" b="1"/>
-              <a:t>Warning</a:t>
-            </a:r>
-          </a:p>
-          <a:p>
-            <a:pPr lvl="0" indent="0" marL="1270000">
-              <a:buNone/>
-            </a:pPr>
-            <a:r>
-              <a:rPr sz="2000" b="1"/>
-              <a:t>⚠️ Watch out!</a:t>
-            </a:r>
-          </a:p>
-          <a:p>
-            <a:pPr lvl="0" indent="0" marL="1270000">
-              <a:buNone/>
-            </a:pPr>
-            <a:r>
-              <a:rPr sz="2000"/>
-              <a:t>Excel loves to turn a plain number column into a date, or a </a:t>
-            </a:r>
-            <a:r>
-              <a:rPr sz="2000">
-                <a:latin typeface="Courier"/>
-              </a:rPr>
-              <a:t>tree_no</a:t>
-            </a:r>
-            <a:r>
-              <a:rPr sz="2000"/>
-              <a:t> like </a:t>
-            </a:r>
-            <a:r>
-              <a:rPr sz="2000">
-                <a:latin typeface="Courier"/>
-              </a:rPr>
-              <a:t>1</a:t>
-            </a:r>
-            <a:r>
-              <a:rPr sz="2000"/>
-              <a:t> into </a:t>
-            </a:r>
-            <a:r>
-              <a:rPr sz="2000">
-                <a:latin typeface="Courier"/>
-              </a:rPr>
-              <a:t>1.0</a:t>
-            </a:r>
-            <a:r>
-              <a:rPr sz="2000"/>
-              <a:t>. Always </a:t>
-            </a:r>
-            <a:r>
-              <a:rPr sz="2000">
-                <a:latin typeface="Courier"/>
-              </a:rPr>
-              <a:t>glimpse()</a:t>
-            </a:r>
-            <a:r>
-              <a:rPr sz="2000"/>
-              <a:t> an Excel import before doing anything else.</a:t>
+            <a:pPr lvl="0" indent="0" marL="0">
+              <a:buNone/>
+            </a:pPr>
+            <a:r>
+              <a:rPr/>
+              <a:t>Part 2 · The Five Wrangling Verbs</a:t>
             </a:r>
           </a:p>
         </p:txBody>
@@ -8615,7 +9654,7 @@
             </a:pPr>
             <a:r>
               <a:rPr/>
-              <a:t>Part 2 · The Five Wrangling Verbs</a:t>
+              <a:t>The Five Wrangling Verbs</a:t>
             </a:r>
           </a:p>
         </p:txBody>
@@ -9417,193 +10456,6 @@
 4 3/20/25 cephalopods n     lee         1        21
 5 3/20/25 salmon      n     lee         2        23
 6 3/20/25 salmon      n     lee         2        21</a:t>
-            </a:r>
-          </a:p>
-          <a:p>
-            <a:pPr lvl="0" indent="0">
-              <a:buNone/>
-            </a:pPr>
-            <a:r>
-              <a:rPr>
-                <a:solidFill>
-                  <a:srgbClr val="5E5E5E"/>
-                </a:solidFill>
-                <a:latin typeface="Courier"/>
-              </a:rPr>
-              <a:t># Combine two conditions with a comma (AND)</a:t>
-            </a:r>
-            <a:br/>
-            <a:r>
-              <a:rPr>
-                <a:solidFill>
-                  <a:srgbClr val="003B4F"/>
-                </a:solidFill>
-                <a:latin typeface="Courier"/>
-              </a:rPr>
-              <a:t>pine_csv_df </a:t>
-            </a:r>
-            <a:r>
-              <a:rPr>
-                <a:solidFill>
-                  <a:srgbClr val="5E5E5E"/>
-                </a:solidFill>
-                <a:latin typeface="Courier"/>
-              </a:rPr>
-              <a:t>|&gt;</a:t>
-            </a:r>
-            <a:r>
-              <a:rPr>
-                <a:solidFill>
-                  <a:srgbClr val="003B4F"/>
-                </a:solidFill>
-                <a:latin typeface="Courier"/>
-              </a:rPr>
-              <a:t> </a:t>
-            </a:r>
-            <a:r>
-              <a:rPr>
-                <a:solidFill>
-                  <a:srgbClr val="4758AB"/>
-                </a:solidFill>
-                <a:latin typeface="Courier"/>
-              </a:rPr>
-              <a:t>filter</a:t>
-            </a:r>
-            <a:r>
-              <a:rPr>
-                <a:solidFill>
-                  <a:srgbClr val="003B4F"/>
-                </a:solidFill>
-                <a:latin typeface="Courier"/>
-              </a:rPr>
-              <a:t>(n_s </a:t>
-            </a:r>
-            <a:r>
-              <a:rPr>
-                <a:solidFill>
-                  <a:srgbClr val="5E5E5E"/>
-                </a:solidFill>
-                <a:latin typeface="Courier"/>
-              </a:rPr>
-              <a:t>==</a:t>
-            </a:r>
-            <a:r>
-              <a:rPr>
-                <a:solidFill>
-                  <a:srgbClr val="003B4F"/>
-                </a:solidFill>
-                <a:latin typeface="Courier"/>
-              </a:rPr>
-              <a:t> </a:t>
-            </a:r>
-            <a:r>
-              <a:rPr>
-                <a:solidFill>
-                  <a:srgbClr val="20794D"/>
-                </a:solidFill>
-                <a:latin typeface="Courier"/>
-              </a:rPr>
-              <a:t>"s"</a:t>
-            </a:r>
-            <a:r>
-              <a:rPr>
-                <a:solidFill>
-                  <a:srgbClr val="003B4F"/>
-                </a:solidFill>
-                <a:latin typeface="Courier"/>
-              </a:rPr>
-              <a:t>, length_mm </a:t>
-            </a:r>
-            <a:r>
-              <a:rPr>
-                <a:solidFill>
-                  <a:srgbClr val="5E5E5E"/>
-                </a:solidFill>
-                <a:latin typeface="Courier"/>
-              </a:rPr>
-              <a:t>&gt;</a:t>
-            </a:r>
-            <a:r>
-              <a:rPr>
-                <a:solidFill>
-                  <a:srgbClr val="003B4F"/>
-                </a:solidFill>
-                <a:latin typeface="Courier"/>
-              </a:rPr>
-              <a:t> </a:t>
-            </a:r>
-            <a:r>
-              <a:rPr>
-                <a:solidFill>
-                  <a:srgbClr val="AD0000"/>
-                </a:solidFill>
-                <a:latin typeface="Courier"/>
-              </a:rPr>
-              <a:t>15</a:t>
-            </a:r>
-            <a:r>
-              <a:rPr>
-                <a:solidFill>
-                  <a:srgbClr val="003B4F"/>
-                </a:solidFill>
-                <a:latin typeface="Courier"/>
-              </a:rPr>
-              <a:t>) </a:t>
-            </a:r>
-            <a:r>
-              <a:rPr>
-                <a:solidFill>
-                  <a:srgbClr val="5E5E5E"/>
-                </a:solidFill>
-                <a:latin typeface="Courier"/>
-              </a:rPr>
-              <a:t>|&gt;</a:t>
-            </a:r>
-            <a:r>
-              <a:rPr>
-                <a:solidFill>
-                  <a:srgbClr val="003B4F"/>
-                </a:solidFill>
-                <a:latin typeface="Courier"/>
-              </a:rPr>
-              <a:t> </a:t>
-            </a:r>
-            <a:r>
-              <a:rPr>
-                <a:solidFill>
-                  <a:srgbClr val="4758AB"/>
-                </a:solidFill>
-                <a:latin typeface="Courier"/>
-              </a:rPr>
-              <a:t>head</a:t>
-            </a:r>
-            <a:r>
-              <a:rPr>
-                <a:solidFill>
-                  <a:srgbClr val="003B4F"/>
-                </a:solidFill>
-                <a:latin typeface="Courier"/>
-              </a:rPr>
-              <a:t>()</a:t>
-            </a:r>
-          </a:p>
-          <a:p>
-            <a:pPr lvl="0" indent="0">
-              <a:buNone/>
-            </a:pPr>
-            <a:r>
-              <a:rPr>
-                <a:latin typeface="Courier"/>
-              </a:rPr>
-              <a:t># A tibble: 6 × 6
-  date    group       n_s   wind  tree_no length_mm
-  &lt;chr&gt;   &lt;chr&gt;       &lt;chr&gt; &lt;chr&gt;   &lt;dbl&gt;     &lt;dbl&gt;
-1 3/20/25 cephalopods s     wind        1        16
-2 3/20/25 cephalopods s     wind        1        17
-3 3/20/25 crayfish    s     wind        3        16
-4 3/20/25 crayfish    s     wind        3        17
-5 3/20/25 snail       s     wind        4        17
-6 3/20/25 snail       s     wind        4        16</a:t>
             </a:r>
           </a:p>
           <a:p>
@@ -10042,11 +10894,11 @@
               <a:rPr>
                 <a:latin typeface="Courier"/>
               </a:rPr>
-              <a:t>select()</a:t>
+              <a:t>filter()</a:t>
             </a:r>
             <a:r>
               <a:rPr/>
-              <a:t> — Picking Columns</a:t>
+              <a:t> — Combining Conditions</a:t>
             </a:r>
           </a:p>
         </p:txBody>
@@ -10076,7 +10928,7 @@
                 </a:solidFill>
                 <a:latin typeface="Courier"/>
               </a:rPr>
-              <a:t># Keep only side and length</a:t>
+              <a:t># Combine two conditions with a comma (AND)</a:t>
             </a:r>
             <a:br/>
             <a:r>
@@ -10113,16 +10965,16 @@
                 </a:solidFill>
                 <a:latin typeface="Courier"/>
               </a:rPr>
-              <a:t>select</a:t>
-            </a:r>
-            <a:r>
-              <a:rPr>
-                <a:solidFill>
-                  <a:srgbClr val="003B4F"/>
-                </a:solidFill>
-                <a:latin typeface="Courier"/>
-              </a:rPr>
-              <a:t>(n_s, length_mm) </a:t>
+              <a:t>filter</a:t>
+            </a:r>
+            <a:r>
+              <a:rPr>
+                <a:solidFill>
+                  <a:srgbClr val="003B4F"/>
+                </a:solidFill>
+                <a:latin typeface="Courier"/>
+              </a:rPr>
+              <a:t>(n_s </a:t>
             </a:r>
             <a:r>
               <a:rPr>
@@ -10131,6 +10983,78 @@
                 </a:solidFill>
                 <a:latin typeface="Courier"/>
               </a:rPr>
+              <a:t>==</a:t>
+            </a:r>
+            <a:r>
+              <a:rPr>
+                <a:solidFill>
+                  <a:srgbClr val="003B4F"/>
+                </a:solidFill>
+                <a:latin typeface="Courier"/>
+              </a:rPr>
+              <a:t> </a:t>
+            </a:r>
+            <a:r>
+              <a:rPr>
+                <a:solidFill>
+                  <a:srgbClr val="20794D"/>
+                </a:solidFill>
+                <a:latin typeface="Courier"/>
+              </a:rPr>
+              <a:t>"s"</a:t>
+            </a:r>
+            <a:r>
+              <a:rPr>
+                <a:solidFill>
+                  <a:srgbClr val="003B4F"/>
+                </a:solidFill>
+                <a:latin typeface="Courier"/>
+              </a:rPr>
+              <a:t>, length_mm </a:t>
+            </a:r>
+            <a:r>
+              <a:rPr>
+                <a:solidFill>
+                  <a:srgbClr val="5E5E5E"/>
+                </a:solidFill>
+                <a:latin typeface="Courier"/>
+              </a:rPr>
+              <a:t>&gt;</a:t>
+            </a:r>
+            <a:r>
+              <a:rPr>
+                <a:solidFill>
+                  <a:srgbClr val="003B4F"/>
+                </a:solidFill>
+                <a:latin typeface="Courier"/>
+              </a:rPr>
+              <a:t> </a:t>
+            </a:r>
+            <a:r>
+              <a:rPr>
+                <a:solidFill>
+                  <a:srgbClr val="AD0000"/>
+                </a:solidFill>
+                <a:latin typeface="Courier"/>
+              </a:rPr>
+              <a:t>15</a:t>
+            </a:r>
+            <a:r>
+              <a:rPr>
+                <a:solidFill>
+                  <a:srgbClr val="003B4F"/>
+                </a:solidFill>
+                <a:latin typeface="Courier"/>
+              </a:rPr>
+              <a:t>) </a:t>
+            </a:r>
+            <a:r>
+              <a:rPr>
+                <a:solidFill>
+                  <a:srgbClr val="5E5E5E"/>
+                </a:solidFill>
+                <a:latin typeface="Courier"/>
+              </a:rPr>
               <a:t>|&gt;</a:t>
             </a:r>
             <a:r>
@@ -10169,332 +11093,15 @@
               <a:rPr>
                 <a:latin typeface="Courier"/>
               </a:rPr>
-              <a:t># A tibble: 6 × 2
-  n_s   length_mm
-  &lt;chr&gt;     &lt;dbl&gt;
-1 n            20
-2 n            21
-3 n            23
-4 n            25
-5 n            21
-6 n            16</a:t>
-            </a:r>
-          </a:p>
-          <a:p>
-            <a:pPr lvl="0" indent="0">
-              <a:buNone/>
-            </a:pPr>
-            <a:r>
-              <a:rPr>
-                <a:solidFill>
-                  <a:srgbClr val="5E5E5E"/>
-                </a:solidFill>
-                <a:latin typeface="Courier"/>
-              </a:rPr>
-              <a:t># Drop the date column (minus sign)</a:t>
-            </a:r>
-            <a:br/>
-            <a:r>
-              <a:rPr>
-                <a:solidFill>
-                  <a:srgbClr val="003B4F"/>
-                </a:solidFill>
-                <a:latin typeface="Courier"/>
-              </a:rPr>
-              <a:t>pine_csv_df </a:t>
-            </a:r>
-            <a:r>
-              <a:rPr>
-                <a:solidFill>
-                  <a:srgbClr val="5E5E5E"/>
-                </a:solidFill>
-                <a:latin typeface="Courier"/>
-              </a:rPr>
-              <a:t>|&gt;</a:t>
-            </a:r>
-            <a:r>
-              <a:rPr>
-                <a:solidFill>
-                  <a:srgbClr val="003B4F"/>
-                </a:solidFill>
-                <a:latin typeface="Courier"/>
-              </a:rPr>
-              <a:t> </a:t>
-            </a:r>
-            <a:r>
-              <a:rPr>
-                <a:solidFill>
-                  <a:srgbClr val="4758AB"/>
-                </a:solidFill>
-                <a:latin typeface="Courier"/>
-              </a:rPr>
-              <a:t>select</a:t>
-            </a:r>
-            <a:r>
-              <a:rPr>
-                <a:solidFill>
-                  <a:srgbClr val="003B4F"/>
-                </a:solidFill>
-                <a:latin typeface="Courier"/>
-              </a:rPr>
-              <a:t>(</a:t>
-            </a:r>
-            <a:r>
-              <a:rPr>
-                <a:solidFill>
-                  <a:srgbClr val="5E5E5E"/>
-                </a:solidFill>
-                <a:latin typeface="Courier"/>
-              </a:rPr>
-              <a:t>-</a:t>
-            </a:r>
-            <a:r>
-              <a:rPr>
-                <a:solidFill>
-                  <a:srgbClr val="003B4F"/>
-                </a:solidFill>
-                <a:latin typeface="Courier"/>
-              </a:rPr>
-              <a:t>date) </a:t>
-            </a:r>
-            <a:r>
-              <a:rPr>
-                <a:solidFill>
-                  <a:srgbClr val="5E5E5E"/>
-                </a:solidFill>
-                <a:latin typeface="Courier"/>
-              </a:rPr>
-              <a:t>|&gt;</a:t>
-            </a:r>
-            <a:r>
-              <a:rPr>
-                <a:solidFill>
-                  <a:srgbClr val="003B4F"/>
-                </a:solidFill>
-                <a:latin typeface="Courier"/>
-              </a:rPr>
-              <a:t> </a:t>
-            </a:r>
-            <a:r>
-              <a:rPr>
-                <a:solidFill>
-                  <a:srgbClr val="4758AB"/>
-                </a:solidFill>
-                <a:latin typeface="Courier"/>
-              </a:rPr>
-              <a:t>head</a:t>
-            </a:r>
-            <a:r>
-              <a:rPr>
-                <a:solidFill>
-                  <a:srgbClr val="003B4F"/>
-                </a:solidFill>
-                <a:latin typeface="Courier"/>
-              </a:rPr>
-              <a:t>()</a:t>
-            </a:r>
-          </a:p>
-          <a:p>
-            <a:pPr lvl="0" indent="0">
-              <a:buNone/>
-            </a:pPr>
-            <a:r>
-              <a:rPr>
-                <a:latin typeface="Courier"/>
-              </a:rPr>
-              <a:t># A tibble: 6 × 5
-  group       n_s   wind  tree_no length_mm
-  &lt;chr&gt;       &lt;chr&gt; &lt;chr&gt;   &lt;dbl&gt;     &lt;dbl&gt;
-1 cephalopods n     lee         1        20
-2 cephalopods n     lee         1        21
-3 cephalopods n     lee         1        23
-4 cephalopods n     lee         1        25
-5 cephalopods n     lee         1        21
-6 cephalopods n     lee         1        16</a:t>
-            </a:r>
-          </a:p>
-          <a:p>
-            <a:pPr lvl="0" indent="0">
-              <a:buNone/>
-            </a:pPr>
-            <a:r>
-              <a:rPr>
-                <a:solidFill>
-                  <a:srgbClr val="5E5E5E"/>
-                </a:solidFill>
-                <a:latin typeface="Courier"/>
-              </a:rPr>
-              <a:t># Keep columns that contain a word</a:t>
-            </a:r>
-            <a:br/>
-            <a:r>
-              <a:rPr>
-                <a:solidFill>
-                  <a:srgbClr val="003B4F"/>
-                </a:solidFill>
-                <a:latin typeface="Courier"/>
-              </a:rPr>
-              <a:t>pine_csv_df </a:t>
-            </a:r>
-            <a:r>
-              <a:rPr>
-                <a:solidFill>
-                  <a:srgbClr val="5E5E5E"/>
-                </a:solidFill>
-                <a:latin typeface="Courier"/>
-              </a:rPr>
-              <a:t>|&gt;</a:t>
-            </a:r>
-            <a:r>
-              <a:rPr>
-                <a:solidFill>
-                  <a:srgbClr val="003B4F"/>
-                </a:solidFill>
-                <a:latin typeface="Courier"/>
-              </a:rPr>
-              <a:t> </a:t>
-            </a:r>
-            <a:r>
-              <a:rPr>
-                <a:solidFill>
-                  <a:srgbClr val="4758AB"/>
-                </a:solidFill>
-                <a:latin typeface="Courier"/>
-              </a:rPr>
-              <a:t>select</a:t>
-            </a:r>
-            <a:r>
-              <a:rPr>
-                <a:solidFill>
-                  <a:srgbClr val="003B4F"/>
-                </a:solidFill>
-                <a:latin typeface="Courier"/>
-              </a:rPr>
-              <a:t>(</a:t>
-            </a:r>
-            <a:r>
-              <a:rPr>
-                <a:solidFill>
-                  <a:srgbClr val="4758AB"/>
-                </a:solidFill>
-                <a:latin typeface="Courier"/>
-              </a:rPr>
-              <a:t>contains</a:t>
-            </a:r>
-            <a:r>
-              <a:rPr>
-                <a:solidFill>
-                  <a:srgbClr val="003B4F"/>
-                </a:solidFill>
-                <a:latin typeface="Courier"/>
-              </a:rPr>
-              <a:t>(</a:t>
-            </a:r>
-            <a:r>
-              <a:rPr>
-                <a:solidFill>
-                  <a:srgbClr val="20794D"/>
-                </a:solidFill>
-                <a:latin typeface="Courier"/>
-              </a:rPr>
-              <a:t>"n"</a:t>
-            </a:r>
-            <a:r>
-              <a:rPr>
-                <a:solidFill>
-                  <a:srgbClr val="003B4F"/>
-                </a:solidFill>
-                <a:latin typeface="Courier"/>
-              </a:rPr>
-              <a:t>)) </a:t>
-            </a:r>
-            <a:r>
-              <a:rPr>
-                <a:solidFill>
-                  <a:srgbClr val="5E5E5E"/>
-                </a:solidFill>
-                <a:latin typeface="Courier"/>
-              </a:rPr>
-              <a:t>|&gt;</a:t>
-            </a:r>
-            <a:r>
-              <a:rPr>
-                <a:solidFill>
-                  <a:srgbClr val="003B4F"/>
-                </a:solidFill>
-                <a:latin typeface="Courier"/>
-              </a:rPr>
-              <a:t> </a:t>
-            </a:r>
-            <a:r>
-              <a:rPr>
-                <a:solidFill>
-                  <a:srgbClr val="4758AB"/>
-                </a:solidFill>
-                <a:latin typeface="Courier"/>
-              </a:rPr>
-              <a:t>head</a:t>
-            </a:r>
-            <a:r>
-              <a:rPr>
-                <a:solidFill>
-                  <a:srgbClr val="003B4F"/>
-                </a:solidFill>
-                <a:latin typeface="Courier"/>
-              </a:rPr>
-              <a:t>()</a:t>
-            </a:r>
-          </a:p>
-          <a:p>
-            <a:pPr lvl="0" indent="0">
-              <a:buNone/>
-            </a:pPr>
-            <a:r>
-              <a:rPr>
-                <a:latin typeface="Courier"/>
-              </a:rPr>
-              <a:t># A tibble: 6 × 4
-  n_s   wind  tree_no length_mm
-  &lt;chr&gt; &lt;chr&gt;   &lt;dbl&gt;     &lt;dbl&gt;
-1 n     lee         1        20
-2 n     lee         1        21
-3 n     lee         1        23
-4 n     lee         1        25
-5 n     lee         1        21
-6 n     lee         1        16</a:t>
-            </a:r>
-          </a:p>
-          <a:p>
-            <a:pPr lvl="0" indent="0" marL="1270000">
-              <a:buNone/>
-            </a:pPr>
-            <a:r>
-              <a:rPr sz="2000" b="1"/>
-              <a:t>Note</a:t>
-            </a:r>
-          </a:p>
-          <a:p>
-            <a:pPr lvl="0" indent="0" marL="1270000">
-              <a:buNone/>
-            </a:pPr>
-            <a:r>
-              <a:rPr sz="2000" b="1"/>
-              <a:t>✅ Key idea</a:t>
-            </a:r>
-          </a:p>
-          <a:p>
-            <a:pPr lvl="0" indent="0" marL="1270000">
-              <a:buNone/>
-            </a:pPr>
-            <a:r>
-              <a:rPr sz="2000">
-                <a:latin typeface="Courier"/>
-              </a:rPr>
-              <a:t>select()</a:t>
-            </a:r>
-            <a:r>
-              <a:rPr sz="2000"/>
-              <a:t> doesn’t touch rows — it only trims the columns you’re carrying forward. Useful the moment a dataset has 30+ columns and you need 4 of them.</a:t>
+              <a:t># A tibble: 6 × 6
+  date    group       n_s   wind  tree_no length_mm
+  &lt;chr&gt;   &lt;chr&gt;       &lt;chr&gt; &lt;chr&gt;   &lt;dbl&gt;     &lt;dbl&gt;
+1 3/20/25 cephalopods s     wind        1        16
+2 3/20/25 cephalopods s     wind        1        17
+3 3/20/25 crayfish    s     wind        3        16
+4 3/20/25 crayfish    s     wind        3        17
+5 3/20/25 snail       s     wind        4        17
+6 3/20/25 snail       s     wind        4        16</a:t>
             </a:r>
           </a:p>
         </p:txBody>
@@ -10514,54 +11121,56 @@
           <a:bodyPr/>
           <a:lstStyle/>
           <a:p>
-            <a:pPr lvl="0" indent="0" marL="0">
-              <a:buNone/>
-            </a:pPr>
-            <a:r>
-              <a:rPr b="1"/>
-              <a:t>Useful helpers:</a:t>
-            </a:r>
-          </a:p>
-          <a:p>
-            <a:pPr lvl="0"/>
-            <a:r>
-              <a:rPr>
-                <a:latin typeface="Courier"/>
-              </a:rPr>
-              <a:t>starts_with("x")</a:t>
-            </a:r>
-          </a:p>
-          <a:p>
-            <a:pPr lvl="0"/>
-            <a:r>
-              <a:rPr>
-                <a:latin typeface="Courier"/>
-              </a:rPr>
-              <a:t>ends_with("_mm")</a:t>
-            </a:r>
-          </a:p>
-          <a:p>
-            <a:pPr lvl="0"/>
-            <a:r>
-              <a:rPr>
-                <a:latin typeface="Courier"/>
-              </a:rPr>
-              <a:t>contains("wind")</a:t>
-            </a:r>
-          </a:p>
-          <a:p>
-            <a:pPr lvl="0" indent="0" marL="0">
-              <a:buNone/>
-            </a:pPr>
-            <a:r>
-              <a:rPr/>
-              <a:t>📖 R4DS §3.3 — </a:t>
-            </a:r>
-            <a:r>
-              <a:rPr>
-                <a:latin typeface="Courier"/>
-              </a:rPr>
-              <a:t>select()</a:t>
+            <a:pPr lvl="0" indent="0" marL="1270000">
+              <a:buNone/>
+            </a:pPr>
+            <a:r>
+              <a:rPr sz="2000" b="1"/>
+              <a:t>Tip</a:t>
+            </a:r>
+          </a:p>
+          <a:p>
+            <a:pPr lvl="0" indent="0" marL="1270000">
+              <a:buNone/>
+            </a:pPr>
+            <a:r>
+              <a:rPr sz="2000" b="1"/>
+              <a:t>AND vs. OR</a:t>
+            </a:r>
+          </a:p>
+          <a:p>
+            <a:pPr lvl="0" indent="0" marL="1270000">
+              <a:buNone/>
+            </a:pPr>
+            <a:r>
+              <a:rPr sz="2000"/>
+              <a:t>A comma between conditions means </a:t>
+            </a:r>
+            <a:r>
+              <a:rPr sz="2000" b="1"/>
+              <a:t>AND</a:t>
+            </a:r>
+            <a:r>
+              <a:rPr sz="2000"/>
+              <a:t> — every condition must be true for a row to be kept. Use </a:t>
+            </a:r>
+            <a:r>
+              <a:rPr sz="2000">
+                <a:latin typeface="Courier"/>
+              </a:rPr>
+              <a:t>|</a:t>
+            </a:r>
+            <a:r>
+              <a:rPr sz="2000"/>
+              <a:t> between conditions for </a:t>
+            </a:r>
+            <a:r>
+              <a:rPr sz="2000" b="1"/>
+              <a:t>OR</a:t>
+            </a:r>
+            <a:r>
+              <a:rPr sz="2000"/>
+              <a:t> instead.</a:t>
             </a:r>
           </a:p>
         </p:txBody>

--- a/docs/content/wrangling_data/wrangling_data_lecture.pptx
+++ b/docs/content/wrangling_data/wrangling_data_lecture.pptx
@@ -3327,7 +3327,7 @@
             </a:pPr>
             <a:r>
               <a:rPr/>
-              <a:t>Wrangling Your Data</a:t>
+              <a:t>Lecture: Wrangling Your Data</a:t>
             </a:r>
           </a:p>
         </p:txBody>
@@ -5064,7 +5064,7 @@
             </a:r>
             <a:r>
               <a:rPr sz="2000"/>
-              <a:t> has nothing to catch here. Module 3 digs into </a:t>
+              <a:t> has nothing to catch here. Describing Your Data digs into </a:t>
             </a:r>
             <a:r>
               <a:rPr sz="2000" i="1"/>
@@ -7004,7 +7004,7 @@
             </a:pPr>
             <a:r>
               <a:rPr sz="2000" b="1"/>
-              <a:t>✅ Key idea from Module 1</a:t>
+              <a:t>✅ Key idea from Getting Started</a:t>
             </a:r>
           </a:p>
           <a:p>
@@ -10981,7 +10981,7 @@
             </a:r>
             <a:r>
               <a:rPr/>
-              <a:t> from Module 1 — one tree standing in for many? Duplicate rows are the data-entry version of the same mistake: the same measurement counted twice inflates your sample size without adding real information.</a:t>
+              <a:t> from Getting Started — one tree standing in for many? Duplicate rows are the data-entry version of the same mistake: the same measurement counted twice inflates your sample size without adding real information.</a:t>
             </a:r>
           </a:p>
           <a:p>
@@ -12709,7 +12709,7 @@
             </a:pPr>
             <a:r>
               <a:rPr sz="2000" b="1"/>
-              <a:t>Up next — Module 3</a:t>
+              <a:t>Up next — Describing Your Data</a:t>
             </a:r>
           </a:p>
           <a:p>
@@ -14183,7 +14183,7 @@
             </a:r>
             <a:r>
               <a:rPr sz="2000"/>
-              <a:t> is Module 3’s whole topic. Today: the other four, plus saving what you build.</a:t>
+              <a:t> is Describing Your Data’s whole topic. Today: the other four, plus saving what you build.</a:t>
             </a:r>
           </a:p>
         </p:txBody>

--- a/docs/content/wrangling_data/wrangling_data_lecture.pptx
+++ b/docs/content/wrangling_data/wrangling_data_lecture.pptx
@@ -3469,7 +3469,7 @@
             </a:r>
             <a:r>
               <a:rPr sz="2000"/>
-              <a:t> keeps a row if the side is lee </a:t>
+              <a:t> keeps a row if the side is shady </a:t>
             </a:r>
             <a:r>
               <a:rPr sz="2000" b="1"/>
@@ -3481,7 +3481,7 @@
             </a:r>
             <a:r>
               <a:rPr sz="2000" i="1"/>
-              <a:t>windward</a:t>
+              <a:t>sunny</a:t>
             </a:r>
             <a:r>
               <a:rPr sz="2000"/>
@@ -3537,7 +3537,7 @@
                 </a:solidFill>
                 <a:latin typeface="Courier"/>
               </a:rPr>
-              <a:t># Lee-side needles, OR any exceptionally long needle</a:t>
+              <a:t># Shady-side needles, OR any exceptionally long needle</a:t>
             </a:r>
             <a:br/>
             <a:r>
@@ -3723,14 +3723,14 @@
                 <a:latin typeface="Courier"/>
               </a:rPr>
               <a:t># A tibble: 6 × 6
-  date    group       n_s   wind  tree_no length_mm
+  date    group       n_s   sun   tree_no length_mm
   &lt;chr&gt;   &lt;chr&gt;       &lt;chr&gt; &lt;chr&gt;   &lt;dbl&gt;     &lt;dbl&gt;
-1 3/20/25 cephalopods n     lee         1        20
-2 3/20/25 cephalopods n     lee         1        21
-3 3/20/25 cephalopods n     lee         1        23
-4 3/20/25 cephalopods n     lee         1        25
-5 3/20/25 cephalopods n     lee         1        21
-6 3/20/25 cephalopods n     lee         1        16</a:t>
+1 3/20/25 cephalopods n     shady       1        20
+2 3/20/25 cephalopods n     shady       1        21
+3 3/20/25 cephalopods n     shady       1        23
+4 3/20/25 cephalopods n     shady       1        25
+5 3/20/25 cephalopods n     shady       1        21
+6 3/20/25 cephalopods n     shady       1        16</a:t>
             </a:r>
           </a:p>
         </p:txBody>
@@ -4070,14 +4070,14 @@
                 <a:latin typeface="Courier"/>
               </a:rPr>
               <a:t># A tibble: 6 × 6
-  date    group       n_s   wind  tree_no length_mm
+  date    group       n_s   sun   tree_no length_mm
   &lt;chr&gt;   &lt;chr&gt;       &lt;chr&gt; &lt;chr&gt;   &lt;dbl&gt;     &lt;dbl&gt;
-1 3/20/25 cephalopods n     lee         1        20
-2 3/20/25 cephalopods n     lee         1        21
-3 3/20/25 cephalopods n     lee         1        23
-4 3/20/25 cephalopods n     lee         1        25
-5 3/20/25 cephalopods n     lee         1        21
-6 3/20/25 cephalopods n     lee         1        16</a:t>
+1 3/20/25 cephalopods n     shady       1        20
+2 3/20/25 cephalopods n     shady       1        21
+3 3/20/25 cephalopods n     shady       1        23
+4 3/20/25 cephalopods n     shady       1        25
+5 3/20/25 cephalopods n     shady       1        21
+6 3/20/25 cephalopods n     shady       1        16</a:t>
             </a:r>
           </a:p>
           <a:p>
@@ -4277,14 +4277,14 @@
                 <a:latin typeface="Courier"/>
               </a:rPr>
               <a:t># A tibble: 6 × 6
-  date    group       n_s   wind  tree_no length_mm
+  date    group       n_s   sun   tree_no length_mm
   &lt;chr&gt;   &lt;chr&gt;       &lt;chr&gt; &lt;chr&gt;   &lt;dbl&gt;     &lt;dbl&gt;
-1 3/20/25 cephalopods n     lee         1        20
-2 3/20/25 cephalopods n     lee         1        21
-3 3/20/25 cephalopods n     lee         1        23
-4 3/20/25 cephalopods n     lee         1        25
-5 3/20/25 cephalopods n     lee         1        21
-6 3/20/25 cephalopods n     lee         1        16</a:t>
+1 3/20/25 cephalopods n     shady       1        20
+2 3/20/25 cephalopods n     shady       1        21
+3 3/20/25 cephalopods n     shady       1        23
+4 3/20/25 cephalopods n     shady       1        25
+5 3/20/25 cephalopods n     shady       1        21
+6 3/20/25 cephalopods n     shady       1        16</a:t>
             </a:r>
           </a:p>
         </p:txBody>
@@ -5390,14 +5390,14 @@
                 <a:latin typeface="Courier"/>
               </a:rPr>
               <a:t># A tibble: 6 × 5
-  group       n_s   wind  tree_no length_mm
+  group       n_s   sun   tree_no length_mm
   &lt;chr&gt;       &lt;chr&gt; &lt;chr&gt;   &lt;dbl&gt;     &lt;dbl&gt;
-1 cephalopods n     lee         1        20
-2 cephalopods n     lee         1        21
-3 cephalopods n     lee         1        23
-4 cephalopods n     lee         1        25
-5 cephalopods n     lee         1        21
-6 cephalopods n     lee         1        16</a:t>
+1 cephalopods n     shady       1        20
+2 cephalopods n     shady       1        21
+3 cephalopods n     shady       1        23
+4 cephalopods n     shady       1        25
+5 cephalopods n     shady       1        21
+6 cephalopods n     shady       1        16</a:t>
             </a:r>
           </a:p>
           <a:p>
@@ -5691,14 +5691,14 @@
                 <a:latin typeface="Courier"/>
               </a:rPr>
               <a:t># A tibble: 6 × 4
-  n_s   wind  tree_no length_mm
+  n_s   sun   tree_no length_mm
   &lt;chr&gt; &lt;chr&gt;   &lt;dbl&gt;     &lt;dbl&gt;
-1 n     lee         1        20
-2 n     lee         1        21
-3 n     lee         1        23
-4 n     lee         1        25
-5 n     lee         1        21
-6 n     lee         1        16</a:t>
+1 n     shady       1        20
+2 n     shady       1        21
+3 n     shady       1        23
+4 n     shady       1        25
+5 n     shady       1        21
+6 n     shady       1        16</a:t>
             </a:r>
           </a:p>
         </p:txBody>
@@ -5750,7 +5750,7 @@
               <a:rPr>
                 <a:latin typeface="Courier"/>
               </a:rPr>
-              <a:t>contains("wind")</a:t>
+              <a:t>contains("sun")</a:t>
             </a:r>
           </a:p>
           <a:p>
@@ -6109,14 +6109,14 @@
                 <a:latin typeface="Courier"/>
               </a:rPr>
               <a:t># A tibble: 6 × 7
-  date    group       n_s   wind  tree_no length_mm length_cm
+  date    group       n_s   sun   tree_no length_mm length_cm
   &lt;chr&gt;   &lt;chr&gt;       &lt;chr&gt; &lt;chr&gt;   &lt;dbl&gt;     &lt;dbl&gt;     &lt;dbl&gt;
-1 3/20/25 cephalopods n     lee         1        20       2  
-2 3/20/25 cephalopods n     lee         1        21       2.1
-3 3/20/25 cephalopods n     lee         1        23       2.3
-4 3/20/25 cephalopods n     lee         1        25       2.5
-5 3/20/25 cephalopods n     lee         1        21       2.1
-6 3/20/25 cephalopods n     lee         1        16       1.6</a:t>
+1 3/20/25 cephalopods n     shady       1        20       2  
+2 3/20/25 cephalopods n     shady       1        21       2.1
+3 3/20/25 cephalopods n     shady       1        23       2.3
+4 3/20/25 cephalopods n     shady       1        25       2.5
+5 3/20/25 cephalopods n     shady       1        21       2.1
+6 3/20/25 cephalopods n     shady       1        16       1.6</a:t>
             </a:r>
           </a:p>
         </p:txBody>
@@ -6406,14 +6406,14 @@
                 <a:latin typeface="Courier"/>
               </a:rPr>
               <a:t># A tibble: 6 × 7
-  date    group       n_s   wind  tree_no length_mm log_length
+  date    group       n_s   sun   tree_no length_mm log_length
   &lt;chr&gt;   &lt;chr&gt;       &lt;chr&gt; &lt;chr&gt;   &lt;dbl&gt;     &lt;dbl&gt;      &lt;dbl&gt;
-1 3/20/25 cephalopods n     lee         1        20       3.00
-2 3/20/25 cephalopods n     lee         1        21       3.04
-3 3/20/25 cephalopods n     lee         1        23       3.14
-4 3/20/25 cephalopods n     lee         1        25       3.22
-5 3/20/25 cephalopods n     lee         1        21       3.04
-6 3/20/25 cephalopods n     lee         1        16       2.77</a:t>
+1 3/20/25 cephalopods n     shady       1        20       3.00
+2 3/20/25 cephalopods n     shady       1        21       3.04
+3 3/20/25 cephalopods n     shady       1        23       3.14
+4 3/20/25 cephalopods n     shady       1        25       3.22
+5 3/20/25 cephalopods n     shady       1        21       3.04
+6 3/20/25 cephalopods n     shady       1        16       2.77</a:t>
             </a:r>
           </a:p>
           <a:p>
@@ -6715,14 +6715,14 @@
                 <a:latin typeface="Courier"/>
               </a:rPr>
               <a:t># A tibble: 6 × 8
-  date    group       n_s   wind  tree_no length_mm length_cm size_class
+  date    group       n_s   sun   tree_no length_mm length_cm size_class
   &lt;chr&gt;   &lt;chr&gt;       &lt;chr&gt; &lt;chr&gt;   &lt;dbl&gt;     &lt;dbl&gt;     &lt;dbl&gt; &lt;chr&gt;     
-1 3/20/25 cephalopods n     lee         1        20       2   long      
-2 3/20/25 cephalopods n     lee         1        21       2.1 long      
-3 3/20/25 cephalopods n     lee         1        23       2.3 long      
-4 3/20/25 cephalopods n     lee         1        25       2.5 long      
-5 3/20/25 cephalopods n     lee         1        21       2.1 long      
-6 3/20/25 cephalopods n     lee         1        16       1.6 short     </a:t>
+1 3/20/25 cephalopods n     shady       1        20       2   long      
+2 3/20/25 cephalopods n     shady       1        21       2.1 long      
+3 3/20/25 cephalopods n     shady       1        23       2.3 long      
+4 3/20/25 cephalopods n     shady       1        25       2.5 long      
+5 3/20/25 cephalopods n     shady       1        21       2.1 long      
+6 3/20/25 cephalopods n     shady       1        16       1.6 short     </a:t>
             </a:r>
           </a:p>
         </p:txBody>
@@ -9274,18 +9274,18 @@
                 <a:latin typeface="Courier"/>
               </a:rPr>
               <a:t># A tibble: 48 × 6
-   date    group       n_s   wind  tree_no length_mm
+   date    group       n_s   sun   tree_no length_mm
    &lt;chr&gt;   &lt;chr&gt;       &lt;chr&gt; &lt;chr&gt;   &lt;dbl&gt;     &lt;dbl&gt;
- 1 3/20/25 salmon      s     wind        2        12
- 2 3/20/25 salmon      s     wind        2        12
- 3 3/20/25 salmon      s     wind        2        12
- 4 3/20/25 cephalopods s     wind        1        13
- 5 3/20/25 salmon      s     wind        2        13
- 6 3/20/25 crayfish    s     wind        3        13
- 7 3/20/25 cephalopods s     wind        1        14
- 8 3/20/25 salmon      s     wind        2        14
- 9 3/20/25 salmon      s     wind        2        14
-10 3/20/25 crayfish    s     wind        3        14
+ 1 3/20/25 salmon      s     sunny       2        12
+ 2 3/20/25 salmon      s     sunny       2        12
+ 3 3/20/25 salmon      s     sunny       2        12
+ 4 3/20/25 cephalopods s     sunny       1        13
+ 5 3/20/25 salmon      s     sunny       2        13
+ 6 3/20/25 crayfish    s     sunny       3        13
+ 7 3/20/25 cephalopods s     sunny       1        14
+ 8 3/20/25 salmon      s     sunny       2        14
+ 9 3/20/25 salmon      s     sunny       2        14
+10 3/20/25 crayfish    s     sunny       3        14
 # ℹ 38 more rows</a:t>
             </a:r>
           </a:p>
@@ -9376,18 +9376,18 @@
                 <a:latin typeface="Courier"/>
               </a:rPr>
               <a:t># A tibble: 48 × 6
-   date    group       n_s   wind  tree_no length_mm
+   date    group       n_s   sun   tree_no length_mm
    &lt;chr&gt;   &lt;chr&gt;       &lt;chr&gt; &lt;chr&gt;   &lt;dbl&gt;     &lt;dbl&gt;
- 1 3/20/25 cephalopods n     lee         1        25
- 2 3/20/25 crayfish    n     lee         3        25
- 3 3/20/25 cephalopods n     lee         1        23
- 4 3/20/25 salmon      n     lee         2        23
- 5 3/20/25 crayfish    n     lee         3        23
- 6 3/20/25 snail       n     lee         4        23
- 7 3/20/25 cephalopods n     lee         1        21
- 8 3/20/25 cephalopods n     lee         1        21
- 9 3/20/25 salmon      n     lee         2        21
-10 3/20/25 crayfish    n     lee         3        21
+ 1 3/20/25 cephalopods n     shady       1        25
+ 2 3/20/25 crayfish    n     shady       3        25
+ 3 3/20/25 cephalopods n     shady       1        23
+ 4 3/20/25 salmon      n     shady       2        23
+ 5 3/20/25 crayfish    n     shady       3        23
+ 6 3/20/25 snail       n     shady       4        23
+ 7 3/20/25 cephalopods n     shady       1        21
+ 8 3/20/25 cephalopods n     shady       1        21
+ 9 3/20/25 salmon      n     shady       2        21
+10 3/20/25 crayfish    n     shady       3        21
 # ℹ 38 more rows</a:t>
             </a:r>
           </a:p>
@@ -9599,18 +9599,18 @@
                 <a:latin typeface="Courier"/>
               </a:rPr>
               <a:t># A tibble: 48 × 6
-   date    group       n_s   wind  tree_no length_mm
+   date    group       n_s   sun   tree_no length_mm
    &lt;chr&gt;   &lt;chr&gt;       &lt;chr&gt; &lt;chr&gt;   &lt;dbl&gt;     &lt;dbl&gt;
- 1 3/20/25 cephalopods n     lee         1        25
- 2 3/20/25 crayfish    n     lee         3        25
- 3 3/20/25 cephalopods n     lee         1        23
- 4 3/20/25 salmon      n     lee         2        23
- 5 3/20/25 crayfish    n     lee         3        23
- 6 3/20/25 snail       n     lee         4        23
- 7 3/20/25 cephalopods n     lee         1        21
- 8 3/20/25 cephalopods n     lee         1        21
- 9 3/20/25 salmon      n     lee         2        21
-10 3/20/25 crayfish    n     lee         3        21
+ 1 3/20/25 cephalopods n     shady       1        25
+ 2 3/20/25 crayfish    n     shady       3        25
+ 3 3/20/25 cephalopods n     shady       1        23
+ 4 3/20/25 salmon      n     shady       2        23
+ 5 3/20/25 crayfish    n     shady       3        23
+ 6 3/20/25 snail       n     shady       4        23
+ 7 3/20/25 cephalopods n     shady       1        21
+ 8 3/20/25 cephalopods n     shady       1        21
+ 9 3/20/25 salmon      n     shady       2        21
+10 3/20/25 crayfish    n     shady       3        21
 # ℹ 38 more rows</a:t>
             </a:r>
           </a:p>
@@ -9887,7 +9887,7 @@
                 </a:solidFill>
                 <a:latin typeface="Courier"/>
               </a:rPr>
-              <a:t>(group, n_s, wind, length_mm) </a:t>
+              <a:t>(group, n_s, sun, length_mm) </a:t>
             </a:r>
             <a:r>
               <a:rPr>
@@ -9905,7 +9905,7 @@
                 </a:solidFill>
                 <a:latin typeface="Courier"/>
               </a:rPr>
-              <a:t>   </a:t>
+              <a:t>    </a:t>
             </a:r>
             <a:r>
               <a:rPr>
@@ -10433,14 +10433,14 @@
                 <a:latin typeface="Courier"/>
               </a:rPr>
               <a:t># A tibble: 6 × 7
-  group       n_s   wind  length_mm length_cm log_length size_class
+  group       n_s   sun   length_mm length_cm log_length size_class
   &lt;chr&gt;       &lt;chr&gt; &lt;chr&gt;     &lt;dbl&gt;     &lt;dbl&gt;      &lt;dbl&gt; &lt;chr&gt;     
-1 cephalopods n     lee          25       2.5       3.22 long      
-2 crayfish    n     lee          25       2.5       3.22 long      
-3 cephalopods n     lee          23       2.3       3.14 long      
-4 salmon      n     lee          23       2.3       3.14 long      
-5 crayfish    n     lee          23       2.3       3.14 long      
-6 snail       n     lee          23       2.3       3.14 long      </a:t>
+1 cephalopods n     shady        25       2.5       3.22 long      
+2 crayfish    n     shady        25       2.5       3.22 long      
+3 cephalopods n     shady        23       2.3       3.14 long      
+4 salmon      n     shady        23       2.3       3.14 long      
+5 crayfish    n     shady        23       2.3       3.14 long      
+6 snail       n     shady        23       2.3       3.14 long      </a:t>
             </a:r>
           </a:p>
           <a:p>
@@ -13500,7 +13500,7 @@
 $ date      &lt;chr&gt; "3/20/25", "3/20/25", "3/20/25", "3/20/25", "3/20/25", "3/20…
 $ group     &lt;chr&gt; "cephalopods", "cephalopods", "cephalopods", "cephalopods", …
 $ n_s       &lt;chr&gt; "n", "n", "n", "n", "n", "n", "s", "s", "s", "s", "s", "s", …
-$ wind      &lt;chr&gt; "lee", "lee", "lee", "lee", "lee", "lee", "wind", "wind", "w…
+$ sun       &lt;chr&gt; "shady", "shady", "shady", "shady", "shady", "shady", "sunny…
 $ tree_no   &lt;dbl&gt; 1, 1, 1, 1, 1, 1, 1, 1, 1, 1, 1, 1, 2, 2, 2, 2, 2, 2, 2, 2, …
 $ length_mm &lt;dbl&gt; 20, 21, 23, 25, 21, 16, 15, 16, 14, 17, 13, 15, 19, 18, 20, …</a:t>
             </a:r>
@@ -13599,7 +13599,7 @@
               <a:rPr sz="2000">
                 <a:latin typeface="Courier"/>
               </a:rPr>
-              <a:t>wind</a:t>
+              <a:t>sun</a:t>
             </a:r>
             <a:r>
               <a:rPr sz="2000"/>
@@ -14343,7 +14343,7 @@
                 </a:solidFill>
                 <a:latin typeface="Courier"/>
               </a:rPr>
-              <a:t># Keep only the sheltered (lee) side</a:t>
+              <a:t># Keep only the shady (sheltered) side</a:t>
             </a:r>
             <a:br/>
             <a:r>
@@ -14473,14 +14473,14 @@
                 <a:latin typeface="Courier"/>
               </a:rPr>
               <a:t># A tibble: 6 × 6
-  date    group       n_s   wind  tree_no length_mm
+  date    group       n_s   sun   tree_no length_mm
   &lt;chr&gt;   &lt;chr&gt;       &lt;chr&gt; &lt;chr&gt;   &lt;dbl&gt;     &lt;dbl&gt;
-1 3/20/25 cephalopods n     lee         1        20
-2 3/20/25 cephalopods n     lee         1        21
-3 3/20/25 cephalopods n     lee         1        23
-4 3/20/25 cephalopods n     lee         1        25
-5 3/20/25 cephalopods n     lee         1        21
-6 3/20/25 cephalopods n     lee         1        16</a:t>
+1 3/20/25 cephalopods n     shady       1        20
+2 3/20/25 cephalopods n     shady       1        21
+3 3/20/25 cephalopods n     shady       1        23
+4 3/20/25 cephalopods n     shady       1        25
+5 3/20/25 cephalopods n     shady       1        21
+6 3/20/25 cephalopods n     shady       1        16</a:t>
             </a:r>
           </a:p>
           <a:p>
@@ -14624,14 +14624,14 @@
                 <a:latin typeface="Courier"/>
               </a:rPr>
               <a:t># A tibble: 6 × 6
-  date    group       n_s   wind  tree_no length_mm
+  date    group       n_s   sun   tree_no length_mm
   &lt;chr&gt;   &lt;chr&gt;       &lt;chr&gt; &lt;chr&gt;   &lt;dbl&gt;     &lt;dbl&gt;
-1 3/20/25 cephalopods n     lee         1        21
-2 3/20/25 cephalopods n     lee         1        23
-3 3/20/25 cephalopods n     lee         1        25
-4 3/20/25 cephalopods n     lee         1        21
-5 3/20/25 salmon      n     lee         2        23
-6 3/20/25 salmon      n     lee         2        21</a:t>
+1 3/20/25 cephalopods n     shady       1        21
+2 3/20/25 cephalopods n     shady       1        23
+3 3/20/25 cephalopods n     shady       1        25
+4 3/20/25 cephalopods n     shady       1        21
+5 3/20/25 salmon      n     shady       2        23
+6 3/20/25 salmon      n     shady       2        21</a:t>
             </a:r>
           </a:p>
           <a:p>
@@ -15270,14 +15270,14 @@
                 <a:latin typeface="Courier"/>
               </a:rPr>
               <a:t># A tibble: 6 × 6
-  date    group       n_s   wind  tree_no length_mm
+  date    group       n_s   sun   tree_no length_mm
   &lt;chr&gt;   &lt;chr&gt;       &lt;chr&gt; &lt;chr&gt;   &lt;dbl&gt;     &lt;dbl&gt;
-1 3/20/25 cephalopods s     wind        1        16
-2 3/20/25 cephalopods s     wind        1        17
-3 3/20/25 crayfish    s     wind        3        16
-4 3/20/25 crayfish    s     wind        3        17
-5 3/20/25 snail       s     wind        4        17
-6 3/20/25 snail       s     wind        4        16</a:t>
+1 3/20/25 cephalopods s     sunny       1        16
+2 3/20/25 cephalopods s     sunny       1        17
+3 3/20/25 crayfish    s     sunny       3        16
+4 3/20/25 crayfish    s     sunny       3        17
+5 3/20/25 snail       s     sunny       4        17
+6 3/20/25 snail       s     sunny       4        16</a:t>
             </a:r>
           </a:p>
         </p:txBody>

--- a/docs/content/wrangling_data/wrangling_data_lecture.pptx
+++ b/docs/content/wrangling_data/wrangling_data_lecture.pptx
@@ -3477,7 +3477,12 @@
             </a:r>
             <a:r>
               <a:rPr sz="2000"/>
-              <a:t> the needle is longer than 22mm. Will this ever keep a </a:t>
+              <a:t> the needle is longer than 22mm.</a:t>
+            </a:r>
+            <a:br/>
+            <a:r>
+              <a:rPr sz="2000"/>
+              <a:t>Will this ever keep a </a:t>
             </a:r>
             <a:r>
               <a:rPr sz="2000" i="1"/>
@@ -3485,7 +3490,12 @@
             </a:r>
             <a:r>
               <a:rPr sz="2000"/>
-              <a:t> needle? Under what condition?</a:t>
+              <a:t> needle?</a:t>
+            </a:r>
+            <a:br/>
+            <a:r>
+              <a:rPr sz="2000"/>
+              <a:t>Under what condition?</a:t>
             </a:r>
           </a:p>
         </p:txBody>
@@ -3768,9 +3778,7 @@
             </a:r>
           </a:p>
           <a:p>
-            <a:pPr lvl="0" indent="0" marL="1270000">
-              <a:buNone/>
-            </a:pPr>
+            <a:pPr lvl="0"/>
             <a:r>
               <a:rPr sz="2000">
                 <a:latin typeface="Courier"/>
@@ -3801,11 +3809,21 @@
               <a:rPr sz="2000">
                 <a:latin typeface="Courier"/>
               </a:rPr>
-              <a:t>|&gt;</a:t>
-            </a:r>
-            <a:r>
-              <a:rPr sz="2000"/>
-              <a:t>. They look related but do completely different jobs — one is logical OR, the other chains steps together.</a:t>
+              <a:t>|&gt; or %&gt;%</a:t>
+            </a:r>
+          </a:p>
+          <a:p>
+            <a:pPr lvl="0"/>
+            <a:r>
+              <a:rPr sz="2000"/>
+              <a:t>Look related but do completely different jobs</a:t>
+            </a:r>
+          </a:p>
+          <a:p>
+            <a:pPr lvl="0"/>
+            <a:r>
+              <a:rPr sz="2000"/>
+              <a:t>one is logical OR, the other chains steps together.</a:t>
             </a:r>
           </a:p>
         </p:txBody>
@@ -4322,9 +4340,7 @@
             </a:r>
           </a:p>
           <a:p>
-            <a:pPr lvl="0" indent="0" marL="1270000">
-              <a:buNone/>
-            </a:pPr>
+            <a:pPr lvl="0"/>
             <a:r>
               <a:rPr sz="2000">
                 <a:latin typeface="Courier"/>
@@ -4351,7 +4367,14 @@
             </a:r>
             <a:r>
               <a:rPr sz="2000"/>
-              <a:t> of these?” — it’s the clean way to write an OR across many possible values without a long chain of </a:t>
+              <a:t> of these?”</a:t>
+            </a:r>
+          </a:p>
+          <a:p>
+            <a:pPr lvl="1"/>
+            <a:r>
+              <a:rPr sz="2000"/>
+              <a:t>it’s the clean way to write an OR across many possible values without a long chain of </a:t>
             </a:r>
             <a:r>
               <a:rPr sz="2000">
@@ -4944,9 +4967,7 @@
             </a:r>
           </a:p>
           <a:p>
-            <a:pPr lvl="0" indent="0" marL="1270000">
-              <a:buNone/>
-            </a:pPr>
+            <a:pPr lvl="0"/>
             <a:r>
               <a:rPr sz="2000">
                 <a:latin typeface="Courier"/>
@@ -4955,8 +4976,11 @@
             </a:r>
             <a:r>
               <a:rPr sz="2000"/>
-              <a:t> is itself a boolean test — </a:t>
-            </a:r>
+              <a:t> is itself a boolean test</a:t>
+            </a:r>
+          </a:p>
+          <a:p>
+            <a:pPr lvl="1"/>
             <a:r>
               <a:rPr sz="2000">
                 <a:latin typeface="Courier"/>
@@ -4983,9 +5007,12 @@
               </a:rPr>
               <a:t>filter()</a:t>
             </a:r>
-            <a:r>
-              <a:rPr sz="2000"/>
-              <a:t> exactly like </a:t>
+          </a:p>
+          <a:p>
+            <a:pPr lvl="1"/>
+            <a:r>
+              <a:rPr sz="2000"/>
+              <a:t>exactly like </a:t>
             </a:r>
             <a:r>
               <a:rPr sz="2000">
@@ -5064,7 +5091,12 @@
             </a:r>
             <a:r>
               <a:rPr sz="2000"/>
-              <a:t> has nothing to catch here. Describing Your Data digs into </a:t>
+              <a:t> has nothing to catch here.</a:t>
+            </a:r>
+            <a:br/>
+            <a:r>
+              <a:rPr sz="2000"/>
+              <a:t>Describing Your Data digs into </a:t>
             </a:r>
             <a:r>
               <a:rPr sz="2000" i="1"/>
@@ -5732,7 +5764,7 @@
               <a:rPr>
                 <a:latin typeface="Courier"/>
               </a:rPr>
-              <a:t>starts_with("x")</a:t>
+              <a:t>starts_with("x") - super useful for similar units or types of data in variable</a:t>
             </a:r>
           </a:p>
           <a:p>
@@ -5871,7 +5903,12 @@
             </a:r>
             <a:r>
               <a:rPr sz="2000"/>
-              <a:t> converts millimeters to centimeters. Will </a:t>
+              <a:t> converts millimeters to centimeters.</a:t>
+            </a:r>
+            <a:br/>
+            <a:r>
+              <a:rPr sz="2000"/>
+              <a:t>Will </a:t>
             </a:r>
             <a:r>
               <a:rPr sz="2000">
@@ -5907,7 +5944,12 @@
             </a:r>
             <a:r>
               <a:rPr sz="2000"/>
-              <a:t> a new column? How many columns will the result have?</a:t>
+              <a:t> a new column?</a:t>
+            </a:r>
+            <a:br/>
+            <a:r>
+              <a:rPr sz="2000"/>
+              <a:t>How many columns will the result have?</a:t>
             </a:r>
           </a:p>
         </p:txBody>
@@ -6165,7 +6207,12 @@
             </a:r>
             <a:r>
               <a:rPr sz="2000"/>
-              <a:t> keeps every existing column and adds new ones to the right. To </a:t>
+              <a:t> keeps every existing column and adds new ones to the right.</a:t>
+            </a:r>
+            <a:br/>
+            <a:r>
+              <a:rPr sz="2000"/>
+              <a:t>To </a:t>
             </a:r>
             <a:r>
               <a:rPr sz="2000" i="1"/>
@@ -6173,8 +6220,9 @@
             </a:r>
             <a:r>
               <a:rPr sz="2000"/>
-              <a:t> a column, reuse its name: </a:t>
-            </a:r>
+              <a:t> a column, reuse its name:</a:t>
+            </a:r>
+            <a:br/>
             <a:r>
               <a:rPr sz="2000">
                 <a:latin typeface="Courier"/>
@@ -6760,9 +6808,7 @@
             </a:r>
           </a:p>
           <a:p>
-            <a:pPr lvl="0" indent="0" marL="1270000">
-              <a:buNone/>
-            </a:pPr>
+            <a:pPr lvl="0"/>
             <a:r>
               <a:rPr sz="2000"/>
               <a:t>Many biological measurements are </a:t>
@@ -6771,9 +6817,26 @@
               <a:rPr sz="2000" b="1"/>
               <a:t>right-skewed</a:t>
             </a:r>
-            <a:r>
-              <a:rPr sz="2000"/>
-              <a:t> — a log transform pulls extreme values in and can make a distribution more symmetric before you summarize or test it. We’ll check whether it matters for our data in a later module.</a:t>
+          </a:p>
+          <a:p>
+            <a:pPr lvl="1"/>
+            <a:r>
+              <a:rPr sz="2000"/>
+              <a:t>a log transform pulls extreme values in and can make a distribution more symmetric before you summarize or test it.</a:t>
+            </a:r>
+          </a:p>
+          <a:p>
+            <a:pPr lvl="0"/>
+            <a:r>
+              <a:rPr sz="2000"/>
+              <a:t>We’ll check whether it matters for our data in a later module</a:t>
+            </a:r>
+          </a:p>
+          <a:p>
+            <a:pPr lvl="0"/>
+            <a:r>
+              <a:rPr sz="2000"/>
+              <a:t>Know what log you are doing log2 log10 or ln?????</a:t>
             </a:r>
           </a:p>
         </p:txBody>
@@ -6963,7 +7026,13 @@
             </a:r>
             <a:r>
               <a:rPr/>
-              <a:t>)</a:t>
+              <a:t> , </a:t>
+            </a:r>
+            <a:r>
+              <a:rPr>
+                <a:latin typeface="Courier"/>
+              </a:rPr>
+              <a:t>outout/)</a:t>
             </a:r>
           </a:p>
           <a:p>
@@ -7826,7 +7895,12 @@
             </a:r>
             <a:r>
               <a:rPr sz="2000"/>
-              <a:t>. Once a row matches </a:t>
+              <a:t>.</a:t>
+            </a:r>
+            <a:br/>
+            <a:r>
+              <a:rPr sz="2000"/>
+              <a:t>Once a row matches </a:t>
             </a:r>
             <a:r>
               <a:rPr sz="2000">
@@ -11206,7 +11280,18 @@
             </a:r>
             <a:r>
               <a:rPr sz="2000"/>
-              <a:t> — returns the data with duplicate rows removed</a:t>
+              <a:t> — returns the data with duplicate rows removed - be careful!!!\</a:t>
+            </a:r>
+          </a:p>
+          <a:p>
+            <a:pPr lvl="0"/>
+            <a:r>
+              <a:rPr sz="2000" b="1"/>
+              <a:t>unique()</a:t>
+            </a:r>
+            <a:r>
+              <a:rPr sz="2000"/>
+              <a:t> - looks for the unique rows or names in rows for mispellinbg</a:t>
             </a:r>
           </a:p>
         </p:txBody>
@@ -13076,6 +13161,26 @@
             <a:r>
               <a:rPr>
                 <a:solidFill>
+                  <a:srgbClr val="5E5E5E"/>
+                </a:solidFill>
+                <a:latin typeface="Courier"/>
+              </a:rPr>
+              <a:t># install.packages("readxl")</a:t>
+            </a:r>
+            <a:br/>
+            <a:r>
+              <a:rPr>
+                <a:solidFill>
+                  <a:srgbClr val="5E5E5E"/>
+                </a:solidFill>
+                <a:latin typeface="Courier"/>
+              </a:rPr>
+              <a:t># install.packages("janitor")</a:t>
+            </a:r>
+            <a:br/>
+            <a:r>
+              <a:rPr>
+                <a:solidFill>
                   <a:srgbClr val="4758AB"/>
                 </a:solidFill>
                 <a:latin typeface="Courier"/>
@@ -13118,6 +13223,34 @@
                 <a:latin typeface="Courier"/>
               </a:rPr>
               <a:t># reading Excel files</a:t>
+            </a:r>
+            <a:br/>
+            <a:r>
+              <a:rPr>
+                <a:solidFill>
+                  <a:srgbClr val="4758AB"/>
+                </a:solidFill>
+                <a:latin typeface="Courier"/>
+              </a:rPr>
+              <a:t>library</a:t>
+            </a:r>
+            <a:r>
+              <a:rPr>
+                <a:solidFill>
+                  <a:srgbClr val="003B4F"/>
+                </a:solidFill>
+                <a:latin typeface="Courier"/>
+              </a:rPr>
+              <a:t>(janitor)  </a:t>
+            </a:r>
+            <a:r>
+              <a:rPr>
+                <a:solidFill>
+                  <a:srgbClr val="5E5E5E"/>
+                </a:solidFill>
+                <a:latin typeface="Courier"/>
+              </a:rPr>
+              <a:t># cleans variable names, excel poop, rounding issues</a:t>
             </a:r>
             <a:br/>
             <a:br/>
@@ -13263,7 +13396,12 @@
             </a:r>
             <a:r>
               <a:rPr sz="2000"/>
-              <a:t>). Excel files need the separate </a:t>
+              <a:t>).</a:t>
+            </a:r>
+            <a:br/>
+            <a:r>
+              <a:rPr sz="2000"/>
+              <a:t>Excel files need the separate </a:t>
             </a:r>
             <a:r>
               <a:rPr sz="2000">
@@ -13273,7 +13411,12 @@
             </a:r>
             <a:r>
               <a:rPr sz="2000"/>
-              <a:t> package — install once, </a:t>
+              <a:t> package</a:t>
+            </a:r>
+            <a:br/>
+            <a:r>
+              <a:rPr sz="2000"/>
+              <a:t>— install once, </a:t>
             </a:r>
             <a:r>
               <a:rPr sz="2000">
@@ -13583,7 +13726,7 @@
             </a:r>
             <a:r>
               <a:rPr sz="2000"/>
-              <a:t> (field team name), </a:t>
+              <a:t>, </a:t>
             </a:r>
             <a:r>
               <a:rPr sz="2000">
@@ -13623,7 +13766,12 @@
             </a:r>
             <a:r>
               <a:rPr sz="2000"/>
-              <a:t>. Same structure whether it came from the </a:t>
+              <a:t> or what you call them.</a:t>
+            </a:r>
+            <a:br/>
+            <a:r>
+              <a:rPr sz="2000"/>
+              <a:t>Same structure whether it came from the </a:t>
             </a:r>
             <a:r>
               <a:rPr sz="2000">
@@ -13716,7 +13864,12 @@
             </a:r>
             <a:r>
               <a:rPr sz="2000"/>
-              <a:t>. Always </a:t>
+              <a:t>.</a:t>
+            </a:r>
+            <a:br/>
+            <a:r>
+              <a:rPr sz="2000"/>
+              <a:t>Always </a:t>
             </a:r>
             <a:r>
               <a:rPr sz="2000">
@@ -14183,7 +14336,12 @@
             </a:r>
             <a:r>
               <a:rPr sz="2000"/>
-              <a:t> is Describing Your Data’s whole topic. Today: the other four, plus saving what you build.</a:t>
+              <a:t> is Describing Your Data’s whole topic.</a:t>
+            </a:r>
+            <a:br/>
+            <a:r>
+              <a:rPr sz="2000"/>
+              <a:t>Today: the other four, plus saving what you build.</a:t>
             </a:r>
           </a:p>
         </p:txBody>
@@ -14653,9 +14811,7 @@
             </a:r>
           </a:p>
           <a:p>
-            <a:pPr lvl="0" indent="0" marL="1270000">
-              <a:buNone/>
-            </a:pPr>
+            <a:pPr lvl="0"/>
             <a:r>
               <a:rPr sz="2000">
                 <a:latin typeface="Courier"/>
@@ -14664,8 +14820,11 @@
             </a:r>
             <a:r>
               <a:rPr sz="2000"/>
-              <a:t> assigns a value. </a:t>
-            </a:r>
+              <a:t> assigns a value</a:t>
+            </a:r>
+          </a:p>
+          <a:p>
+            <a:pPr lvl="0"/>
             <a:r>
               <a:rPr sz="2000">
                 <a:latin typeface="Courier"/>
@@ -14684,7 +14843,14 @@
             </a:r>
             <a:r>
               <a:rPr sz="2000"/>
-              <a:t> is an error — you want </a:t>
+              <a:t> is an error</a:t>
+            </a:r>
+          </a:p>
+          <a:p>
+            <a:pPr lvl="0"/>
+            <a:r>
+              <a:rPr sz="2000"/>
+              <a:t>you want </a:t>
             </a:r>
             <a:r>
               <a:rPr sz="2000">
@@ -15315,9 +15481,7 @@
             </a:r>
           </a:p>
           <a:p>
-            <a:pPr lvl="0" indent="0" marL="1270000">
-              <a:buNone/>
-            </a:pPr>
+            <a:pPr lvl="0"/>
             <a:r>
               <a:rPr sz="2000"/>
               <a:t>A comma between conditions means </a:t>
@@ -15326,9 +15490,19 @@
               <a:rPr sz="2000" b="1"/>
               <a:t>AND</a:t>
             </a:r>
-            <a:r>
-              <a:rPr sz="2000"/>
-              <a:t> — every condition must be true for a row to be kept. Use </a:t>
+          </a:p>
+          <a:p>
+            <a:pPr lvl="1"/>
+            <a:r>
+              <a:rPr sz="2000"/>
+              <a:t>—every condition must be true for a row to be kept.</a:t>
+            </a:r>
+          </a:p>
+          <a:p>
+            <a:pPr lvl="0"/>
+            <a:r>
+              <a:rPr sz="2000"/>
+              <a:t>Use </a:t>
             </a:r>
             <a:r>
               <a:rPr sz="2000">
@@ -15346,7 +15520,7 @@
             </a:r>
             <a:r>
               <a:rPr sz="2000"/>
-              <a:t> instead.</a:t>
+              <a:t> instead</a:t>
             </a:r>
           </a:p>
         </p:txBody>
